--- a/LOH/4_F2SWS/Workshop4_Slides_Collections_Dispute_EN.pptx
+++ b/LOH/4_F2SWS/Workshop4_Slides_Collections_Dispute_EN.pptx
@@ -4,32 +4,35 @@
   <p:sldMasterIdLst>
     <p:sldMasterId id="2147483648" r:id="rId1"/>
   </p:sldMasterIdLst>
+  <p:notesMasterIdLst>
+    <p:notesMasterId r:id="rId25"/>
+  </p:notesMasterIdLst>
   <p:sldIdLst>
-    <p:sldId id="256" r:id="rId7"/>
-    <p:sldId id="257" r:id="rId8"/>
-    <p:sldId id="258" r:id="rId10"/>
-    <p:sldId id="259" r:id="rId11"/>
-    <p:sldId id="260" r:id="rId12"/>
-    <p:sldId id="261" r:id="rId13"/>
-    <p:sldId id="262" r:id="rId14"/>
-    <p:sldId id="263" r:id="rId15"/>
-    <p:sldId id="264" r:id="rId16"/>
-    <p:sldId id="265" r:id="rId17"/>
-    <p:sldId id="266" r:id="rId18"/>
-    <p:sldId id="267" r:id="rId19"/>
-    <p:sldId id="268" r:id="rId20"/>
-    <p:sldId id="269" r:id="rId21"/>
-    <p:sldId id="270" r:id="rId22"/>
-    <p:sldId id="271" r:id="rId23"/>
-    <p:sldId id="272" r:id="rId24"/>
-    <p:sldId id="273" r:id="rId25"/>
-    <p:sldId id="274" r:id="rId26"/>
-    <p:sldId id="275" r:id="rId27"/>
-    <p:sldId id="276" r:id="rId28"/>
-    <p:sldId id="277" r:id="rId29"/>
-    <p:sldId id="278" r:id="rId30"/>
+    <p:sldId id="256" r:id="rId2"/>
+    <p:sldId id="257" r:id="rId3"/>
+    <p:sldId id="258" r:id="rId4"/>
+    <p:sldId id="259" r:id="rId5"/>
+    <p:sldId id="260" r:id="rId6"/>
+    <p:sldId id="261" r:id="rId7"/>
+    <p:sldId id="262" r:id="rId8"/>
+    <p:sldId id="263" r:id="rId9"/>
+    <p:sldId id="264" r:id="rId10"/>
+    <p:sldId id="265" r:id="rId11"/>
+    <p:sldId id="266" r:id="rId12"/>
+    <p:sldId id="267" r:id="rId13"/>
+    <p:sldId id="268" r:id="rId14"/>
+    <p:sldId id="269" r:id="rId15"/>
+    <p:sldId id="270" r:id="rId16"/>
+    <p:sldId id="271" r:id="rId17"/>
+    <p:sldId id="272" r:id="rId18"/>
+    <p:sldId id="273" r:id="rId19"/>
+    <p:sldId id="274" r:id="rId20"/>
+    <p:sldId id="275" r:id="rId21"/>
+    <p:sldId id="276" r:id="rId22"/>
+    <p:sldId id="277" r:id="rId23"/>
+    <p:sldId id="278" r:id="rId24"/>
   </p:sldIdLst>
-  <p:sldSz cx="12191695" cy="6858000" type="screen4x3"/>
+  <p:sldSz cx="12192000" cy="6858000"/>
   <p:notesSz cx="6858000" cy="9144000"/>
   <p:defaultTextStyle>
     <a:defPPr>
@@ -126,11 +129,56 @@
       </a:defRPr>
     </a:lvl9pPr>
   </p:defaultTextStyle>
+  <p:extLst>
+    <p:ext uri="{EFAFB233-063F-42B5-8137-9DF3F51BA10A}">
+      <p15:sldGuideLst xmlns:p15="http://schemas.microsoft.com/office/powerpoint/2012/main">
+        <p15:guide id="1" orient="horz" pos="2160">
+          <p15:clr>
+            <a:srgbClr val="A4A3A4"/>
+          </p15:clr>
+        </p15:guide>
+        <p15:guide id="2" pos="2880">
+          <p15:clr>
+            <a:srgbClr val="A4A3A4"/>
+          </p15:clr>
+        </p15:guide>
+      </p15:sldGuideLst>
+    </p:ext>
+  </p:extLst>
 </p:presentation>
 </file>
 
+<file path=ppt/changesInfos/changesInfo1.xml><?xml version="1.0" encoding="utf-8"?>
+<pc:chgInfo xmlns:a="http://schemas.openxmlformats.org/drawingml/2006/main" xmlns:r="http://schemas.openxmlformats.org/officeDocument/2006/relationships" xmlns:ac="http://schemas.microsoft.com/office/drawing/2013/main/command" xmlns:pc="http://schemas.microsoft.com/office/powerpoint/2013/main/command">
+  <pc:docChgLst>
+    <pc:chgData name="Goethel, Moritz" userId="310144ca-c1c3-45b4-be1d-abfb30ac7548" providerId="ADAL" clId="{A600174E-EA43-4471-813E-896CA05C8581}"/>
+    <pc:docChg chg="modSld">
+      <pc:chgData name="Goethel, Moritz" userId="310144ca-c1c3-45b4-be1d-abfb30ac7548" providerId="ADAL" clId="{A600174E-EA43-4471-813E-896CA05C8581}" dt="2026-10-14T19:53:35.849" v="2" actId="20577"/>
+      <pc:docMkLst>
+        <pc:docMk/>
+      </pc:docMkLst>
+      <pc:sldChg chg="modSp mod">
+        <pc:chgData name="Goethel, Moritz" userId="310144ca-c1c3-45b4-be1d-abfb30ac7548" providerId="ADAL" clId="{A600174E-EA43-4471-813E-896CA05C8581}" dt="2026-10-14T19:53:35.849" v="2" actId="20577"/>
+        <pc:sldMkLst>
+          <pc:docMk/>
+          <pc:sldMk cId="0" sldId="258"/>
+        </pc:sldMkLst>
+        <pc:spChg chg="mod">
+          <ac:chgData name="Goethel, Moritz" userId="310144ca-c1c3-45b4-be1d-abfb30ac7548" providerId="ADAL" clId="{A600174E-EA43-4471-813E-896CA05C8581}" dt="2026-10-14T19:53:35.849" v="2" actId="20577"/>
+          <ac:spMkLst>
+            <pc:docMk/>
+            <pc:sldMk cId="0" sldId="258"/>
+            <ac:spMk id="16" creationId="{00000000-0000-0000-0000-000000000000}"/>
+          </ac:spMkLst>
+        </pc:spChg>
+      </pc:sldChg>
+    </pc:docChg>
+  </pc:docChgLst>
+</pc:chgInfo>
+</file>
+
 <file path=ppt/notesMasters/notesMaster1.xml><?xml version="1.0" encoding="utf-8"?>
-<p:notesMaster xmlns:a="http://schemas.openxmlformats.org/drawingml/2006/main" xmlns:p="http://schemas.openxmlformats.org/presentationml/2006/main" xmlns:r="http://schemas.openxmlformats.org/officeDocument/2006/relationships">
+<p:notesMaster xmlns:a="http://schemas.openxmlformats.org/drawingml/2006/main" xmlns:r="http://schemas.openxmlformats.org/officeDocument/2006/relationships" xmlns:p="http://schemas.openxmlformats.org/presentationml/2006/main">
   <p:cSld>
     <p:bg>
       <p:bgRef idx="1001">
@@ -164,7 +212,7 @@
         <p:spPr>
           <a:xfrm>
             <a:off x="0" y="0"/>
-            <a:ext cx="2971800" cy="457200"/>
+            <a:ext cx="2971800" cy="458788"/>
           </a:xfrm>
           <a:prstGeom prst="rect">
             <a:avLst/>
@@ -178,7 +226,7 @@
             </a:lvl1pPr>
           </a:lstStyle>
           <a:p>
-            <a:endParaRPr lang="en-US"/>
+            <a:endParaRPr lang="de-DE"/>
           </a:p>
         </p:txBody>
       </p:sp>
@@ -195,7 +243,7 @@
         <p:spPr>
           <a:xfrm>
             <a:off x="3884613" y="0"/>
-            <a:ext cx="2971800" cy="457200"/>
+            <a:ext cx="2971800" cy="458788"/>
           </a:xfrm>
           <a:prstGeom prst="rect">
             <a:avLst/>
@@ -209,11 +257,11 @@
             </a:lvl1pPr>
           </a:lstStyle>
           <a:p>
-            <a:fld id="{0F89C1C7-3DCD-1040-A9CF-14679D8B5DDD}" type="datetimeFigureOut">
-              <a:rPr lang="en-US" smtClean="0"/>
-              <a:t>10/17/16</a:t>
+            <a:fld id="{C1049B2A-4894-4B59-BFAB-67C919AAB016}" type="datetimeFigureOut">
+              <a:rPr lang="de-DE" smtClean="0"/>
+              <a:t>14.10.2026</a:t>
             </a:fld>
-            <a:endParaRPr lang="en-US"/>
+            <a:endParaRPr lang="de-DE"/>
           </a:p>
         </p:txBody>
       </p:sp>
@@ -229,8 +277,8 @@
         </p:nvSpPr>
         <p:spPr>
           <a:xfrm>
-            <a:off x="1143000" y="685800"/>
-            <a:ext cx="4572000" cy="3429000"/>
+            <a:off x="685800" y="1143000"/>
+            <a:ext cx="5486400" cy="3086100"/>
           </a:xfrm>
           <a:prstGeom prst="rect">
             <a:avLst/>
@@ -246,7 +294,7 @@
           <a:bodyPr vert="horz" lIns="91440" tIns="45720" rIns="91440" bIns="45720" rtlCol="0" anchor="ctr"/>
           <a:lstStyle/>
           <a:p>
-            <a:endParaRPr lang="en-US"/>
+            <a:endParaRPr lang="de-DE"/>
           </a:p>
         </p:txBody>
       </p:sp>
@@ -262,8 +310,8 @@
         </p:nvSpPr>
         <p:spPr>
           <a:xfrm>
-            <a:off x="685800" y="4343400"/>
-            <a:ext cx="5486400" cy="4114800"/>
+            <a:off x="685800" y="4400550"/>
+            <a:ext cx="5486400" cy="3600450"/>
           </a:xfrm>
           <a:prstGeom prst="rect">
             <a:avLst/>
@@ -275,38 +323,38 @@
           <a:p>
             <a:pPr lvl="0"/>
             <a:r>
-              <a:rPr lang="en-US" smtClean="0"/>
+              <a:rPr lang="en-US"/>
               <a:t>Click to edit Master text styles</a:t>
             </a:r>
           </a:p>
           <a:p>
             <a:pPr lvl="1"/>
             <a:r>
-              <a:rPr lang="en-US" smtClean="0"/>
+              <a:rPr lang="en-US"/>
               <a:t>Second level</a:t>
             </a:r>
           </a:p>
           <a:p>
             <a:pPr lvl="2"/>
             <a:r>
-              <a:rPr lang="en-US" smtClean="0"/>
+              <a:rPr lang="en-US"/>
               <a:t>Third level</a:t>
             </a:r>
           </a:p>
           <a:p>
             <a:pPr lvl="3"/>
             <a:r>
-              <a:rPr lang="en-US" smtClean="0"/>
+              <a:rPr lang="en-US"/>
               <a:t>Fourth level</a:t>
             </a:r>
           </a:p>
           <a:p>
             <a:pPr lvl="4"/>
             <a:r>
-              <a:rPr lang="en-US" smtClean="0"/>
+              <a:rPr lang="en-US"/>
               <a:t>Fifth level</a:t>
             </a:r>
-            <a:endParaRPr lang="en-US"/>
+            <a:endParaRPr lang="de-DE"/>
           </a:p>
         </p:txBody>
       </p:sp>
@@ -323,7 +371,7 @@
         <p:spPr>
           <a:xfrm>
             <a:off x="0" y="8685213"/>
-            <a:ext cx="2971800" cy="457200"/>
+            <a:ext cx="2971800" cy="458787"/>
           </a:xfrm>
           <a:prstGeom prst="rect">
             <a:avLst/>
@@ -337,7 +385,7 @@
             </a:lvl1pPr>
           </a:lstStyle>
           <a:p>
-            <a:endParaRPr lang="en-US"/>
+            <a:endParaRPr lang="de-DE"/>
           </a:p>
         </p:txBody>
       </p:sp>
@@ -354,7 +402,7 @@
         <p:spPr>
           <a:xfrm>
             <a:off x="3884613" y="8685213"/>
-            <a:ext cx="2971800" cy="457200"/>
+            <a:ext cx="2971800" cy="458787"/>
           </a:xfrm>
           <a:prstGeom prst="rect">
             <a:avLst/>
@@ -368,24 +416,24 @@
             </a:lvl1pPr>
           </a:lstStyle>
           <a:p>
-            <a:fld id="{BB5E49A5-4136-284D-997B-48E1D791AD67}" type="slidenum">
-              <a:rPr lang="en-US" smtClean="0"/>
+            <a:fld id="{20D9F2B5-C956-4437-81ED-FFBF233F25ED}" type="slidenum">
+              <a:rPr lang="de-DE" smtClean="0"/>
               <a:t>‹#›</a:t>
             </a:fld>
-            <a:endParaRPr lang="en-US"/>
+            <a:endParaRPr lang="de-DE"/>
           </a:p>
         </p:txBody>
       </p:sp>
     </p:spTree>
     <p:extLst>
       <p:ext uri="{BB962C8B-B14F-4D97-AF65-F5344CB8AC3E}">
-        <p14:creationId xmlns:p14="http://schemas.microsoft.com/office/powerpoint/2010/main" val="2623252185"/>
+        <p14:creationId xmlns:p14="http://schemas.microsoft.com/office/powerpoint/2010/main" val="1454366364"/>
       </p:ext>
     </p:extLst>
   </p:cSld>
   <p:clrMap bg1="lt1" tx1="dk1" bg2="lt2" tx2="dk2" accent1="accent1" accent2="accent2" accent3="accent3" accent4="accent4" accent5="accent5" accent6="accent6" hlink="hlink" folHlink="folHlink"/>
   <p:notesStyle>
-    <a:lvl1pPr marL="0" algn="l" defTabSz="457200" rtl="0" eaLnBrk="1" latinLnBrk="0" hangingPunct="1">
+    <a:lvl1pPr marL="0" algn="l" defTabSz="914400" rtl="0" eaLnBrk="1" latinLnBrk="0" hangingPunct="1">
       <a:defRPr sz="1200" kern="1200">
         <a:solidFill>
           <a:schemeClr val="tx1"/>
@@ -395,7 +443,7 @@
         <a:cs typeface="+mn-cs"/>
       </a:defRPr>
     </a:lvl1pPr>
-    <a:lvl2pPr marL="457200" algn="l" defTabSz="457200" rtl="0" eaLnBrk="1" latinLnBrk="0" hangingPunct="1">
+    <a:lvl2pPr marL="457200" algn="l" defTabSz="914400" rtl="0" eaLnBrk="1" latinLnBrk="0" hangingPunct="1">
       <a:defRPr sz="1200" kern="1200">
         <a:solidFill>
           <a:schemeClr val="tx1"/>
@@ -405,7 +453,7 @@
         <a:cs typeface="+mn-cs"/>
       </a:defRPr>
     </a:lvl2pPr>
-    <a:lvl3pPr marL="914400" algn="l" defTabSz="457200" rtl="0" eaLnBrk="1" latinLnBrk="0" hangingPunct="1">
+    <a:lvl3pPr marL="914400" algn="l" defTabSz="914400" rtl="0" eaLnBrk="1" latinLnBrk="0" hangingPunct="1">
       <a:defRPr sz="1200" kern="1200">
         <a:solidFill>
           <a:schemeClr val="tx1"/>
@@ -415,7 +463,7 @@
         <a:cs typeface="+mn-cs"/>
       </a:defRPr>
     </a:lvl3pPr>
-    <a:lvl4pPr marL="1371600" algn="l" defTabSz="457200" rtl="0" eaLnBrk="1" latinLnBrk="0" hangingPunct="1">
+    <a:lvl4pPr marL="1371600" algn="l" defTabSz="914400" rtl="0" eaLnBrk="1" latinLnBrk="0" hangingPunct="1">
       <a:defRPr sz="1200" kern="1200">
         <a:solidFill>
           <a:schemeClr val="tx1"/>
@@ -425,7 +473,7 @@
         <a:cs typeface="+mn-cs"/>
       </a:defRPr>
     </a:lvl4pPr>
-    <a:lvl5pPr marL="1828800" algn="l" defTabSz="457200" rtl="0" eaLnBrk="1" latinLnBrk="0" hangingPunct="1">
+    <a:lvl5pPr marL="1828800" algn="l" defTabSz="914400" rtl="0" eaLnBrk="1" latinLnBrk="0" hangingPunct="1">
       <a:defRPr sz="1200" kern="1200">
         <a:solidFill>
           <a:schemeClr val="tx1"/>
@@ -435,7 +483,7 @@
         <a:cs typeface="+mn-cs"/>
       </a:defRPr>
     </a:lvl5pPr>
-    <a:lvl6pPr marL="2286000" algn="l" defTabSz="457200" rtl="0" eaLnBrk="1" latinLnBrk="0" hangingPunct="1">
+    <a:lvl6pPr marL="2286000" algn="l" defTabSz="914400" rtl="0" eaLnBrk="1" latinLnBrk="0" hangingPunct="1">
       <a:defRPr sz="1200" kern="1200">
         <a:solidFill>
           <a:schemeClr val="tx1"/>
@@ -445,7 +493,7 @@
         <a:cs typeface="+mn-cs"/>
       </a:defRPr>
     </a:lvl6pPr>
-    <a:lvl7pPr marL="2743200" algn="l" defTabSz="457200" rtl="0" eaLnBrk="1" latinLnBrk="0" hangingPunct="1">
+    <a:lvl7pPr marL="2743200" algn="l" defTabSz="914400" rtl="0" eaLnBrk="1" latinLnBrk="0" hangingPunct="1">
       <a:defRPr sz="1200" kern="1200">
         <a:solidFill>
           <a:schemeClr val="tx1"/>
@@ -455,7 +503,7 @@
         <a:cs typeface="+mn-cs"/>
       </a:defRPr>
     </a:lvl7pPr>
-    <a:lvl8pPr marL="3200400" algn="l" defTabSz="457200" rtl="0" eaLnBrk="1" latinLnBrk="0" hangingPunct="1">
+    <a:lvl8pPr marL="3200400" algn="l" defTabSz="914400" rtl="0" eaLnBrk="1" latinLnBrk="0" hangingPunct="1">
       <a:defRPr sz="1200" kern="1200">
         <a:solidFill>
           <a:schemeClr val="tx1"/>
@@ -465,7 +513,7 @@
         <a:cs typeface="+mn-cs"/>
       </a:defRPr>
     </a:lvl8pPr>
-    <a:lvl9pPr marL="3657600" algn="l" defTabSz="457200" rtl="0" eaLnBrk="1" latinLnBrk="0" hangingPunct="1">
+    <a:lvl9pPr marL="3657600" algn="l" defTabSz="914400" rtl="0" eaLnBrk="1" latinLnBrk="0" hangingPunct="1">
       <a:defRPr sz="1200" kern="1200">
         <a:solidFill>
           <a:schemeClr val="tx1"/>
@@ -480,7 +528,7 @@
 </file>
 
 <file path=ppt/notesSlides/notesSlide1.xml><?xml version="1.0" encoding="utf-8"?>
-<p:notes xmlns:a="http://schemas.openxmlformats.org/drawingml/2006/main" xmlns:p="http://schemas.openxmlformats.org/presentationml/2006/main" xmlns:r="http://schemas.openxmlformats.org/officeDocument/2006/relationships">
+<p:notes xmlns:a="http://schemas.openxmlformats.org/drawingml/2006/main" xmlns:r="http://schemas.openxmlformats.org/officeDocument/2006/relationships" xmlns:p="http://schemas.openxmlformats.org/presentationml/2006/main">
   <p:cSld>
     <p:spTree>
       <p:nvGrpSpPr>
@@ -500,7 +548,7 @@
         <p:nvSpPr>
           <p:cNvPr id="2" name="Slide Image Placeholder 1"/>
           <p:cNvSpPr>
-            <a:spLocks noGrp="1"/>
+            <a:spLocks noGrp="1" noRot="1" noChangeAspect="1"/>
           </p:cNvSpPr>
           <p:nvPr>
             <p:ph type="sldImg" idx="2"/>
@@ -515,7 +563,7 @@
             <a:spLocks noGrp="1"/>
           </p:cNvSpPr>
           <p:nvPr>
-            <p:ph type="body" idx="3" sz="quarter"/>
+            <p:ph type="body" sz="quarter" idx="3"/>
           </p:nvPr>
         </p:nvSpPr>
         <p:spPr/>
@@ -536,7 +584,7 @@
             <a:spLocks noGrp="1"/>
           </p:cNvSpPr>
           <p:nvPr>
-            <p:ph type="sldNum" idx="5" sz="quarter"/>
+            <p:ph type="sldNum" sz="quarter" idx="5"/>
           </p:nvPr>
         </p:nvSpPr>
         <p:spPr/>
@@ -550,7 +598,7 @@
 </file>
 
 <file path=ppt/notesSlides/notesSlide10.xml><?xml version="1.0" encoding="utf-8"?>
-<p:notes xmlns:a="http://schemas.openxmlformats.org/drawingml/2006/main" xmlns:p="http://schemas.openxmlformats.org/presentationml/2006/main" xmlns:r="http://schemas.openxmlformats.org/officeDocument/2006/relationships">
+<p:notes xmlns:a="http://schemas.openxmlformats.org/drawingml/2006/main" xmlns:r="http://schemas.openxmlformats.org/officeDocument/2006/relationships" xmlns:p="http://schemas.openxmlformats.org/presentationml/2006/main">
   <p:cSld>
     <p:spTree>
       <p:nvGrpSpPr>
@@ -570,7 +618,7 @@
         <p:nvSpPr>
           <p:cNvPr id="2" name="Slide Image Placeholder 1"/>
           <p:cNvSpPr>
-            <a:spLocks noGrp="1"/>
+            <a:spLocks noGrp="1" noRot="1" noChangeAspect="1"/>
           </p:cNvSpPr>
           <p:nvPr>
             <p:ph type="sldImg" idx="2"/>
@@ -585,7 +633,7 @@
             <a:spLocks noGrp="1"/>
           </p:cNvSpPr>
           <p:nvPr>
-            <p:ph type="body" idx="3" sz="quarter"/>
+            <p:ph type="body" sz="quarter" idx="3"/>
           </p:nvPr>
         </p:nvSpPr>
         <p:spPr/>
@@ -606,7 +654,7 @@
             <a:spLocks noGrp="1"/>
           </p:cNvSpPr>
           <p:nvPr>
-            <p:ph type="sldNum" idx="5" sz="quarter"/>
+            <p:ph type="sldNum" sz="quarter" idx="5"/>
           </p:nvPr>
         </p:nvSpPr>
         <p:spPr/>
@@ -620,7 +668,7 @@
 </file>
 
 <file path=ppt/notesSlides/notesSlide11.xml><?xml version="1.0" encoding="utf-8"?>
-<p:notes xmlns:a="http://schemas.openxmlformats.org/drawingml/2006/main" xmlns:p="http://schemas.openxmlformats.org/presentationml/2006/main" xmlns:r="http://schemas.openxmlformats.org/officeDocument/2006/relationships">
+<p:notes xmlns:a="http://schemas.openxmlformats.org/drawingml/2006/main" xmlns:r="http://schemas.openxmlformats.org/officeDocument/2006/relationships" xmlns:p="http://schemas.openxmlformats.org/presentationml/2006/main">
   <p:cSld>
     <p:spTree>
       <p:nvGrpSpPr>
@@ -640,7 +688,7 @@
         <p:nvSpPr>
           <p:cNvPr id="2" name="Slide Image Placeholder 1"/>
           <p:cNvSpPr>
-            <a:spLocks noGrp="1"/>
+            <a:spLocks noGrp="1" noRot="1" noChangeAspect="1"/>
           </p:cNvSpPr>
           <p:nvPr>
             <p:ph type="sldImg" idx="2"/>
@@ -655,7 +703,7 @@
             <a:spLocks noGrp="1"/>
           </p:cNvSpPr>
           <p:nvPr>
-            <p:ph type="body" idx="3" sz="quarter"/>
+            <p:ph type="body" sz="quarter" idx="3"/>
           </p:nvPr>
         </p:nvSpPr>
         <p:spPr/>
@@ -676,7 +724,7 @@
             <a:spLocks noGrp="1"/>
           </p:cNvSpPr>
           <p:nvPr>
-            <p:ph type="sldNum" idx="5" sz="quarter"/>
+            <p:ph type="sldNum" sz="quarter" idx="5"/>
           </p:nvPr>
         </p:nvSpPr>
         <p:spPr/>
@@ -690,7 +738,7 @@
 </file>
 
 <file path=ppt/notesSlides/notesSlide12.xml><?xml version="1.0" encoding="utf-8"?>
-<p:notes xmlns:a="http://schemas.openxmlformats.org/drawingml/2006/main" xmlns:p="http://schemas.openxmlformats.org/presentationml/2006/main" xmlns:r="http://schemas.openxmlformats.org/officeDocument/2006/relationships">
+<p:notes xmlns:a="http://schemas.openxmlformats.org/drawingml/2006/main" xmlns:r="http://schemas.openxmlformats.org/officeDocument/2006/relationships" xmlns:p="http://schemas.openxmlformats.org/presentationml/2006/main">
   <p:cSld>
     <p:spTree>
       <p:nvGrpSpPr>
@@ -710,7 +758,7 @@
         <p:nvSpPr>
           <p:cNvPr id="2" name="Slide Image Placeholder 1"/>
           <p:cNvSpPr>
-            <a:spLocks noGrp="1"/>
+            <a:spLocks noGrp="1" noRot="1" noChangeAspect="1"/>
           </p:cNvSpPr>
           <p:nvPr>
             <p:ph type="sldImg" idx="2"/>
@@ -725,7 +773,7 @@
             <a:spLocks noGrp="1"/>
           </p:cNvSpPr>
           <p:nvPr>
-            <p:ph type="body" idx="3" sz="quarter"/>
+            <p:ph type="body" sz="quarter" idx="3"/>
           </p:nvPr>
         </p:nvSpPr>
         <p:spPr/>
@@ -746,7 +794,7 @@
             <a:spLocks noGrp="1"/>
           </p:cNvSpPr>
           <p:nvPr>
-            <p:ph type="sldNum" idx="5" sz="quarter"/>
+            <p:ph type="sldNum" sz="quarter" idx="5"/>
           </p:nvPr>
         </p:nvSpPr>
         <p:spPr/>
@@ -760,7 +808,7 @@
 </file>
 
 <file path=ppt/notesSlides/notesSlide13.xml><?xml version="1.0" encoding="utf-8"?>
-<p:notes xmlns:a="http://schemas.openxmlformats.org/drawingml/2006/main" xmlns:p="http://schemas.openxmlformats.org/presentationml/2006/main" xmlns:r="http://schemas.openxmlformats.org/officeDocument/2006/relationships">
+<p:notes xmlns:a="http://schemas.openxmlformats.org/drawingml/2006/main" xmlns:r="http://schemas.openxmlformats.org/officeDocument/2006/relationships" xmlns:p="http://schemas.openxmlformats.org/presentationml/2006/main">
   <p:cSld>
     <p:spTree>
       <p:nvGrpSpPr>
@@ -780,7 +828,7 @@
         <p:nvSpPr>
           <p:cNvPr id="2" name="Slide Image Placeholder 1"/>
           <p:cNvSpPr>
-            <a:spLocks noGrp="1"/>
+            <a:spLocks noGrp="1" noRot="1" noChangeAspect="1"/>
           </p:cNvSpPr>
           <p:nvPr>
             <p:ph type="sldImg" idx="2"/>
@@ -795,7 +843,7 @@
             <a:spLocks noGrp="1"/>
           </p:cNvSpPr>
           <p:nvPr>
-            <p:ph type="body" idx="3" sz="quarter"/>
+            <p:ph type="body" sz="quarter" idx="3"/>
           </p:nvPr>
         </p:nvSpPr>
         <p:spPr/>
@@ -816,7 +864,7 @@
             <a:spLocks noGrp="1"/>
           </p:cNvSpPr>
           <p:nvPr>
-            <p:ph type="sldNum" idx="5" sz="quarter"/>
+            <p:ph type="sldNum" sz="quarter" idx="5"/>
           </p:nvPr>
         </p:nvSpPr>
         <p:spPr/>
@@ -830,7 +878,7 @@
 </file>
 
 <file path=ppt/notesSlides/notesSlide14.xml><?xml version="1.0" encoding="utf-8"?>
-<p:notes xmlns:a="http://schemas.openxmlformats.org/drawingml/2006/main" xmlns:p="http://schemas.openxmlformats.org/presentationml/2006/main" xmlns:r="http://schemas.openxmlformats.org/officeDocument/2006/relationships">
+<p:notes xmlns:a="http://schemas.openxmlformats.org/drawingml/2006/main" xmlns:r="http://schemas.openxmlformats.org/officeDocument/2006/relationships" xmlns:p="http://schemas.openxmlformats.org/presentationml/2006/main">
   <p:cSld>
     <p:spTree>
       <p:nvGrpSpPr>
@@ -850,7 +898,7 @@
         <p:nvSpPr>
           <p:cNvPr id="2" name="Slide Image Placeholder 1"/>
           <p:cNvSpPr>
-            <a:spLocks noGrp="1"/>
+            <a:spLocks noGrp="1" noRot="1" noChangeAspect="1"/>
           </p:cNvSpPr>
           <p:nvPr>
             <p:ph type="sldImg" idx="2"/>
@@ -865,7 +913,7 @@
             <a:spLocks noGrp="1"/>
           </p:cNvSpPr>
           <p:nvPr>
-            <p:ph type="body" idx="3" sz="quarter"/>
+            <p:ph type="body" sz="quarter" idx="3"/>
           </p:nvPr>
         </p:nvSpPr>
         <p:spPr/>
@@ -886,7 +934,7 @@
             <a:spLocks noGrp="1"/>
           </p:cNvSpPr>
           <p:nvPr>
-            <p:ph type="sldNum" idx="5" sz="quarter"/>
+            <p:ph type="sldNum" sz="quarter" idx="5"/>
           </p:nvPr>
         </p:nvSpPr>
         <p:spPr/>
@@ -900,7 +948,7 @@
 </file>
 
 <file path=ppt/notesSlides/notesSlide15.xml><?xml version="1.0" encoding="utf-8"?>
-<p:notes xmlns:a="http://schemas.openxmlformats.org/drawingml/2006/main" xmlns:p="http://schemas.openxmlformats.org/presentationml/2006/main" xmlns:r="http://schemas.openxmlformats.org/officeDocument/2006/relationships">
+<p:notes xmlns:a="http://schemas.openxmlformats.org/drawingml/2006/main" xmlns:r="http://schemas.openxmlformats.org/officeDocument/2006/relationships" xmlns:p="http://schemas.openxmlformats.org/presentationml/2006/main">
   <p:cSld>
     <p:spTree>
       <p:nvGrpSpPr>
@@ -920,7 +968,7 @@
         <p:nvSpPr>
           <p:cNvPr id="2" name="Slide Image Placeholder 1"/>
           <p:cNvSpPr>
-            <a:spLocks noGrp="1"/>
+            <a:spLocks noGrp="1" noRot="1" noChangeAspect="1"/>
           </p:cNvSpPr>
           <p:nvPr>
             <p:ph type="sldImg" idx="2"/>
@@ -935,7 +983,7 @@
             <a:spLocks noGrp="1"/>
           </p:cNvSpPr>
           <p:nvPr>
-            <p:ph type="body" idx="3" sz="quarter"/>
+            <p:ph type="body" sz="quarter" idx="3"/>
           </p:nvPr>
         </p:nvSpPr>
         <p:spPr/>
@@ -956,7 +1004,7 @@
             <a:spLocks noGrp="1"/>
           </p:cNvSpPr>
           <p:nvPr>
-            <p:ph type="sldNum" idx="5" sz="quarter"/>
+            <p:ph type="sldNum" sz="quarter" idx="5"/>
           </p:nvPr>
         </p:nvSpPr>
         <p:spPr/>
@@ -970,7 +1018,7 @@
 </file>
 
 <file path=ppt/notesSlides/notesSlide16.xml><?xml version="1.0" encoding="utf-8"?>
-<p:notes xmlns:a="http://schemas.openxmlformats.org/drawingml/2006/main" xmlns:p="http://schemas.openxmlformats.org/presentationml/2006/main" xmlns:r="http://schemas.openxmlformats.org/officeDocument/2006/relationships">
+<p:notes xmlns:a="http://schemas.openxmlformats.org/drawingml/2006/main" xmlns:r="http://schemas.openxmlformats.org/officeDocument/2006/relationships" xmlns:p="http://schemas.openxmlformats.org/presentationml/2006/main">
   <p:cSld>
     <p:spTree>
       <p:nvGrpSpPr>
@@ -990,7 +1038,7 @@
         <p:nvSpPr>
           <p:cNvPr id="2" name="Slide Image Placeholder 1"/>
           <p:cNvSpPr>
-            <a:spLocks noGrp="1"/>
+            <a:spLocks noGrp="1" noRot="1" noChangeAspect="1"/>
           </p:cNvSpPr>
           <p:nvPr>
             <p:ph type="sldImg" idx="2"/>
@@ -1005,7 +1053,7 @@
             <a:spLocks noGrp="1"/>
           </p:cNvSpPr>
           <p:nvPr>
-            <p:ph type="body" idx="3" sz="quarter"/>
+            <p:ph type="body" sz="quarter" idx="3"/>
           </p:nvPr>
         </p:nvSpPr>
         <p:spPr/>
@@ -1026,7 +1074,7 @@
             <a:spLocks noGrp="1"/>
           </p:cNvSpPr>
           <p:nvPr>
-            <p:ph type="sldNum" idx="5" sz="quarter"/>
+            <p:ph type="sldNum" sz="quarter" idx="5"/>
           </p:nvPr>
         </p:nvSpPr>
         <p:spPr/>
@@ -1040,7 +1088,7 @@
 </file>
 
 <file path=ppt/notesSlides/notesSlide17.xml><?xml version="1.0" encoding="utf-8"?>
-<p:notes xmlns:a="http://schemas.openxmlformats.org/drawingml/2006/main" xmlns:p="http://schemas.openxmlformats.org/presentationml/2006/main" xmlns:r="http://schemas.openxmlformats.org/officeDocument/2006/relationships">
+<p:notes xmlns:a="http://schemas.openxmlformats.org/drawingml/2006/main" xmlns:r="http://schemas.openxmlformats.org/officeDocument/2006/relationships" xmlns:p="http://schemas.openxmlformats.org/presentationml/2006/main">
   <p:cSld>
     <p:spTree>
       <p:nvGrpSpPr>
@@ -1060,7 +1108,7 @@
         <p:nvSpPr>
           <p:cNvPr id="2" name="Slide Image Placeholder 1"/>
           <p:cNvSpPr>
-            <a:spLocks noGrp="1"/>
+            <a:spLocks noGrp="1" noRot="1" noChangeAspect="1"/>
           </p:cNvSpPr>
           <p:nvPr>
             <p:ph type="sldImg" idx="2"/>
@@ -1075,7 +1123,7 @@
             <a:spLocks noGrp="1"/>
           </p:cNvSpPr>
           <p:nvPr>
-            <p:ph type="body" idx="3" sz="quarter"/>
+            <p:ph type="body" sz="quarter" idx="3"/>
           </p:nvPr>
         </p:nvSpPr>
         <p:spPr/>
@@ -1096,7 +1144,7 @@
             <a:spLocks noGrp="1"/>
           </p:cNvSpPr>
           <p:nvPr>
-            <p:ph type="sldNum" idx="5" sz="quarter"/>
+            <p:ph type="sldNum" sz="quarter" idx="5"/>
           </p:nvPr>
         </p:nvSpPr>
         <p:spPr/>
@@ -1110,7 +1158,7 @@
 </file>
 
 <file path=ppt/notesSlides/notesSlide18.xml><?xml version="1.0" encoding="utf-8"?>
-<p:notes xmlns:a="http://schemas.openxmlformats.org/drawingml/2006/main" xmlns:p="http://schemas.openxmlformats.org/presentationml/2006/main" xmlns:r="http://schemas.openxmlformats.org/officeDocument/2006/relationships">
+<p:notes xmlns:a="http://schemas.openxmlformats.org/drawingml/2006/main" xmlns:r="http://schemas.openxmlformats.org/officeDocument/2006/relationships" xmlns:p="http://schemas.openxmlformats.org/presentationml/2006/main">
   <p:cSld>
     <p:spTree>
       <p:nvGrpSpPr>
@@ -1130,7 +1178,7 @@
         <p:nvSpPr>
           <p:cNvPr id="2" name="Slide Image Placeholder 1"/>
           <p:cNvSpPr>
-            <a:spLocks noGrp="1"/>
+            <a:spLocks noGrp="1" noRot="1" noChangeAspect="1"/>
           </p:cNvSpPr>
           <p:nvPr>
             <p:ph type="sldImg" idx="2"/>
@@ -1145,7 +1193,7 @@
             <a:spLocks noGrp="1"/>
           </p:cNvSpPr>
           <p:nvPr>
-            <p:ph type="body" idx="3" sz="quarter"/>
+            <p:ph type="body" sz="quarter" idx="3"/>
           </p:nvPr>
         </p:nvSpPr>
         <p:spPr/>
@@ -1166,7 +1214,7 @@
             <a:spLocks noGrp="1"/>
           </p:cNvSpPr>
           <p:nvPr>
-            <p:ph type="sldNum" idx="5" sz="quarter"/>
+            <p:ph type="sldNum" sz="quarter" idx="5"/>
           </p:nvPr>
         </p:nvSpPr>
         <p:spPr/>
@@ -1180,7 +1228,7 @@
 </file>
 
 <file path=ppt/notesSlides/notesSlide19.xml><?xml version="1.0" encoding="utf-8"?>
-<p:notes xmlns:a="http://schemas.openxmlformats.org/drawingml/2006/main" xmlns:p="http://schemas.openxmlformats.org/presentationml/2006/main" xmlns:r="http://schemas.openxmlformats.org/officeDocument/2006/relationships">
+<p:notes xmlns:a="http://schemas.openxmlformats.org/drawingml/2006/main" xmlns:r="http://schemas.openxmlformats.org/officeDocument/2006/relationships" xmlns:p="http://schemas.openxmlformats.org/presentationml/2006/main">
   <p:cSld>
     <p:spTree>
       <p:nvGrpSpPr>
@@ -1200,7 +1248,7 @@
         <p:nvSpPr>
           <p:cNvPr id="2" name="Slide Image Placeholder 1"/>
           <p:cNvSpPr>
-            <a:spLocks noGrp="1"/>
+            <a:spLocks noGrp="1" noRot="1" noChangeAspect="1"/>
           </p:cNvSpPr>
           <p:nvPr>
             <p:ph type="sldImg" idx="2"/>
@@ -1215,7 +1263,7 @@
             <a:spLocks noGrp="1"/>
           </p:cNvSpPr>
           <p:nvPr>
-            <p:ph type="body" idx="3" sz="quarter"/>
+            <p:ph type="body" sz="quarter" idx="3"/>
           </p:nvPr>
         </p:nvSpPr>
         <p:spPr/>
@@ -1236,7 +1284,7 @@
             <a:spLocks noGrp="1"/>
           </p:cNvSpPr>
           <p:nvPr>
-            <p:ph type="sldNum" idx="5" sz="quarter"/>
+            <p:ph type="sldNum" sz="quarter" idx="5"/>
           </p:nvPr>
         </p:nvSpPr>
         <p:spPr/>
@@ -1250,7 +1298,7 @@
 </file>
 
 <file path=ppt/notesSlides/notesSlide2.xml><?xml version="1.0" encoding="utf-8"?>
-<p:notes xmlns:a="http://schemas.openxmlformats.org/drawingml/2006/main" xmlns:p="http://schemas.openxmlformats.org/presentationml/2006/main" xmlns:r="http://schemas.openxmlformats.org/officeDocument/2006/relationships">
+<p:notes xmlns:a="http://schemas.openxmlformats.org/drawingml/2006/main" xmlns:r="http://schemas.openxmlformats.org/officeDocument/2006/relationships" xmlns:p="http://schemas.openxmlformats.org/presentationml/2006/main">
   <p:cSld>
     <p:spTree>
       <p:nvGrpSpPr>
@@ -1270,7 +1318,7 @@
         <p:nvSpPr>
           <p:cNvPr id="2" name="Slide Image Placeholder 1"/>
           <p:cNvSpPr>
-            <a:spLocks noGrp="1"/>
+            <a:spLocks noGrp="1" noRot="1" noChangeAspect="1"/>
           </p:cNvSpPr>
           <p:nvPr>
             <p:ph type="sldImg" idx="2"/>
@@ -1285,7 +1333,7 @@
             <a:spLocks noGrp="1"/>
           </p:cNvSpPr>
           <p:nvPr>
-            <p:ph type="body" idx="3" sz="quarter"/>
+            <p:ph type="body" sz="quarter" idx="3"/>
           </p:nvPr>
         </p:nvSpPr>
         <p:spPr/>
@@ -1306,7 +1354,7 @@
             <a:spLocks noGrp="1"/>
           </p:cNvSpPr>
           <p:nvPr>
-            <p:ph type="sldNum" idx="5" sz="quarter"/>
+            <p:ph type="sldNum" sz="quarter" idx="5"/>
           </p:nvPr>
         </p:nvSpPr>
         <p:spPr/>
@@ -1320,7 +1368,7 @@
 </file>
 
 <file path=ppt/notesSlides/notesSlide20.xml><?xml version="1.0" encoding="utf-8"?>
-<p:notes xmlns:a="http://schemas.openxmlformats.org/drawingml/2006/main" xmlns:p="http://schemas.openxmlformats.org/presentationml/2006/main" xmlns:r="http://schemas.openxmlformats.org/officeDocument/2006/relationships">
+<p:notes xmlns:a="http://schemas.openxmlformats.org/drawingml/2006/main" xmlns:r="http://schemas.openxmlformats.org/officeDocument/2006/relationships" xmlns:p="http://schemas.openxmlformats.org/presentationml/2006/main">
   <p:cSld>
     <p:spTree>
       <p:nvGrpSpPr>
@@ -1340,7 +1388,7 @@
         <p:nvSpPr>
           <p:cNvPr id="2" name="Slide Image Placeholder 1"/>
           <p:cNvSpPr>
-            <a:spLocks noGrp="1"/>
+            <a:spLocks noGrp="1" noRot="1" noChangeAspect="1"/>
           </p:cNvSpPr>
           <p:nvPr>
             <p:ph type="sldImg" idx="2"/>
@@ -1355,7 +1403,7 @@
             <a:spLocks noGrp="1"/>
           </p:cNvSpPr>
           <p:nvPr>
-            <p:ph type="body" idx="3" sz="quarter"/>
+            <p:ph type="body" sz="quarter" idx="3"/>
           </p:nvPr>
         </p:nvSpPr>
         <p:spPr/>
@@ -1376,7 +1424,7 @@
             <a:spLocks noGrp="1"/>
           </p:cNvSpPr>
           <p:nvPr>
-            <p:ph type="sldNum" idx="5" sz="quarter"/>
+            <p:ph type="sldNum" sz="quarter" idx="5"/>
           </p:nvPr>
         </p:nvSpPr>
         <p:spPr/>
@@ -1390,7 +1438,7 @@
 </file>
 
 <file path=ppt/notesSlides/notesSlide21.xml><?xml version="1.0" encoding="utf-8"?>
-<p:notes xmlns:a="http://schemas.openxmlformats.org/drawingml/2006/main" xmlns:p="http://schemas.openxmlformats.org/presentationml/2006/main" xmlns:r="http://schemas.openxmlformats.org/officeDocument/2006/relationships">
+<p:notes xmlns:a="http://schemas.openxmlformats.org/drawingml/2006/main" xmlns:r="http://schemas.openxmlformats.org/officeDocument/2006/relationships" xmlns:p="http://schemas.openxmlformats.org/presentationml/2006/main">
   <p:cSld>
     <p:spTree>
       <p:nvGrpSpPr>
@@ -1410,7 +1458,7 @@
         <p:nvSpPr>
           <p:cNvPr id="2" name="Slide Image Placeholder 1"/>
           <p:cNvSpPr>
-            <a:spLocks noGrp="1"/>
+            <a:spLocks noGrp="1" noRot="1" noChangeAspect="1"/>
           </p:cNvSpPr>
           <p:nvPr>
             <p:ph type="sldImg" idx="2"/>
@@ -1425,7 +1473,7 @@
             <a:spLocks noGrp="1"/>
           </p:cNvSpPr>
           <p:nvPr>
-            <p:ph type="body" idx="3" sz="quarter"/>
+            <p:ph type="body" sz="quarter" idx="3"/>
           </p:nvPr>
         </p:nvSpPr>
         <p:spPr/>
@@ -1446,7 +1494,7 @@
             <a:spLocks noGrp="1"/>
           </p:cNvSpPr>
           <p:nvPr>
-            <p:ph type="sldNum" idx="5" sz="quarter"/>
+            <p:ph type="sldNum" sz="quarter" idx="5"/>
           </p:nvPr>
         </p:nvSpPr>
         <p:spPr/>
@@ -1460,7 +1508,7 @@
 </file>
 
 <file path=ppt/notesSlides/notesSlide22.xml><?xml version="1.0" encoding="utf-8"?>
-<p:notes xmlns:a="http://schemas.openxmlformats.org/drawingml/2006/main" xmlns:p="http://schemas.openxmlformats.org/presentationml/2006/main" xmlns:r="http://schemas.openxmlformats.org/officeDocument/2006/relationships">
+<p:notes xmlns:a="http://schemas.openxmlformats.org/drawingml/2006/main" xmlns:r="http://schemas.openxmlformats.org/officeDocument/2006/relationships" xmlns:p="http://schemas.openxmlformats.org/presentationml/2006/main">
   <p:cSld>
     <p:spTree>
       <p:nvGrpSpPr>
@@ -1480,7 +1528,7 @@
         <p:nvSpPr>
           <p:cNvPr id="2" name="Slide Image Placeholder 1"/>
           <p:cNvSpPr>
-            <a:spLocks noGrp="1"/>
+            <a:spLocks noGrp="1" noRot="1" noChangeAspect="1"/>
           </p:cNvSpPr>
           <p:nvPr>
             <p:ph type="sldImg" idx="2"/>
@@ -1495,7 +1543,7 @@
             <a:spLocks noGrp="1"/>
           </p:cNvSpPr>
           <p:nvPr>
-            <p:ph type="body" idx="3" sz="quarter"/>
+            <p:ph type="body" sz="quarter" idx="3"/>
           </p:nvPr>
         </p:nvSpPr>
         <p:spPr/>
@@ -1516,7 +1564,7 @@
             <a:spLocks noGrp="1"/>
           </p:cNvSpPr>
           <p:nvPr>
-            <p:ph type="sldNum" idx="5" sz="quarter"/>
+            <p:ph type="sldNum" sz="quarter" idx="5"/>
           </p:nvPr>
         </p:nvSpPr>
         <p:spPr/>
@@ -1530,7 +1578,7 @@
 </file>
 
 <file path=ppt/notesSlides/notesSlide3.xml><?xml version="1.0" encoding="utf-8"?>
-<p:notes xmlns:a="http://schemas.openxmlformats.org/drawingml/2006/main" xmlns:p="http://schemas.openxmlformats.org/presentationml/2006/main" xmlns:r="http://schemas.openxmlformats.org/officeDocument/2006/relationships">
+<p:notes xmlns:a="http://schemas.openxmlformats.org/drawingml/2006/main" xmlns:r="http://schemas.openxmlformats.org/officeDocument/2006/relationships" xmlns:p="http://schemas.openxmlformats.org/presentationml/2006/main">
   <p:cSld>
     <p:spTree>
       <p:nvGrpSpPr>
@@ -1550,7 +1598,7 @@
         <p:nvSpPr>
           <p:cNvPr id="2" name="Slide Image Placeholder 1"/>
           <p:cNvSpPr>
-            <a:spLocks noGrp="1"/>
+            <a:spLocks noGrp="1" noRot="1" noChangeAspect="1"/>
           </p:cNvSpPr>
           <p:nvPr>
             <p:ph type="sldImg" idx="2"/>
@@ -1565,7 +1613,7 @@
             <a:spLocks noGrp="1"/>
           </p:cNvSpPr>
           <p:nvPr>
-            <p:ph type="body" idx="3" sz="quarter"/>
+            <p:ph type="body" sz="quarter" idx="3"/>
           </p:nvPr>
         </p:nvSpPr>
         <p:spPr/>
@@ -1586,7 +1634,7 @@
             <a:spLocks noGrp="1"/>
           </p:cNvSpPr>
           <p:nvPr>
-            <p:ph type="sldNum" idx="5" sz="quarter"/>
+            <p:ph type="sldNum" sz="quarter" idx="5"/>
           </p:nvPr>
         </p:nvSpPr>
         <p:spPr/>
@@ -1600,7 +1648,7 @@
 </file>
 
 <file path=ppt/notesSlides/notesSlide4.xml><?xml version="1.0" encoding="utf-8"?>
-<p:notes xmlns:a="http://schemas.openxmlformats.org/drawingml/2006/main" xmlns:p="http://schemas.openxmlformats.org/presentationml/2006/main" xmlns:r="http://schemas.openxmlformats.org/officeDocument/2006/relationships">
+<p:notes xmlns:a="http://schemas.openxmlformats.org/drawingml/2006/main" xmlns:r="http://schemas.openxmlformats.org/officeDocument/2006/relationships" xmlns:p="http://schemas.openxmlformats.org/presentationml/2006/main">
   <p:cSld>
     <p:spTree>
       <p:nvGrpSpPr>
@@ -1620,7 +1668,7 @@
         <p:nvSpPr>
           <p:cNvPr id="2" name="Slide Image Placeholder 1"/>
           <p:cNvSpPr>
-            <a:spLocks noGrp="1"/>
+            <a:spLocks noGrp="1" noRot="1" noChangeAspect="1"/>
           </p:cNvSpPr>
           <p:nvPr>
             <p:ph type="sldImg" idx="2"/>
@@ -1635,7 +1683,7 @@
             <a:spLocks noGrp="1"/>
           </p:cNvSpPr>
           <p:nvPr>
-            <p:ph type="body" idx="3" sz="quarter"/>
+            <p:ph type="body" sz="quarter" idx="3"/>
           </p:nvPr>
         </p:nvSpPr>
         <p:spPr/>
@@ -1656,7 +1704,7 @@
             <a:spLocks noGrp="1"/>
           </p:cNvSpPr>
           <p:nvPr>
-            <p:ph type="sldNum" idx="5" sz="quarter"/>
+            <p:ph type="sldNum" sz="quarter" idx="5"/>
           </p:nvPr>
         </p:nvSpPr>
         <p:spPr/>
@@ -1670,7 +1718,7 @@
 </file>
 
 <file path=ppt/notesSlides/notesSlide5.xml><?xml version="1.0" encoding="utf-8"?>
-<p:notes xmlns:a="http://schemas.openxmlformats.org/drawingml/2006/main" xmlns:p="http://schemas.openxmlformats.org/presentationml/2006/main" xmlns:r="http://schemas.openxmlformats.org/officeDocument/2006/relationships">
+<p:notes xmlns:a="http://schemas.openxmlformats.org/drawingml/2006/main" xmlns:r="http://schemas.openxmlformats.org/officeDocument/2006/relationships" xmlns:p="http://schemas.openxmlformats.org/presentationml/2006/main">
   <p:cSld>
     <p:spTree>
       <p:nvGrpSpPr>
@@ -1690,7 +1738,7 @@
         <p:nvSpPr>
           <p:cNvPr id="2" name="Slide Image Placeholder 1"/>
           <p:cNvSpPr>
-            <a:spLocks noGrp="1"/>
+            <a:spLocks noGrp="1" noRot="1" noChangeAspect="1"/>
           </p:cNvSpPr>
           <p:nvPr>
             <p:ph type="sldImg" idx="2"/>
@@ -1705,7 +1753,7 @@
             <a:spLocks noGrp="1"/>
           </p:cNvSpPr>
           <p:nvPr>
-            <p:ph type="body" idx="3" sz="quarter"/>
+            <p:ph type="body" sz="quarter" idx="3"/>
           </p:nvPr>
         </p:nvSpPr>
         <p:spPr/>
@@ -1726,7 +1774,7 @@
             <a:spLocks noGrp="1"/>
           </p:cNvSpPr>
           <p:nvPr>
-            <p:ph type="sldNum" idx="5" sz="quarter"/>
+            <p:ph type="sldNum" sz="quarter" idx="5"/>
           </p:nvPr>
         </p:nvSpPr>
         <p:spPr/>
@@ -1740,7 +1788,7 @@
 </file>
 
 <file path=ppt/notesSlides/notesSlide6.xml><?xml version="1.0" encoding="utf-8"?>
-<p:notes xmlns:a="http://schemas.openxmlformats.org/drawingml/2006/main" xmlns:p="http://schemas.openxmlformats.org/presentationml/2006/main" xmlns:r="http://schemas.openxmlformats.org/officeDocument/2006/relationships">
+<p:notes xmlns:a="http://schemas.openxmlformats.org/drawingml/2006/main" xmlns:r="http://schemas.openxmlformats.org/officeDocument/2006/relationships" xmlns:p="http://schemas.openxmlformats.org/presentationml/2006/main">
   <p:cSld>
     <p:spTree>
       <p:nvGrpSpPr>
@@ -1760,7 +1808,7 @@
         <p:nvSpPr>
           <p:cNvPr id="2" name="Slide Image Placeholder 1"/>
           <p:cNvSpPr>
-            <a:spLocks noGrp="1"/>
+            <a:spLocks noGrp="1" noRot="1" noChangeAspect="1"/>
           </p:cNvSpPr>
           <p:nvPr>
             <p:ph type="sldImg" idx="2"/>
@@ -1775,7 +1823,7 @@
             <a:spLocks noGrp="1"/>
           </p:cNvSpPr>
           <p:nvPr>
-            <p:ph type="body" idx="3" sz="quarter"/>
+            <p:ph type="body" sz="quarter" idx="3"/>
           </p:nvPr>
         </p:nvSpPr>
         <p:spPr/>
@@ -1796,7 +1844,7 @@
             <a:spLocks noGrp="1"/>
           </p:cNvSpPr>
           <p:nvPr>
-            <p:ph type="sldNum" idx="5" sz="quarter"/>
+            <p:ph type="sldNum" sz="quarter" idx="5"/>
           </p:nvPr>
         </p:nvSpPr>
         <p:spPr/>
@@ -1810,7 +1858,7 @@
 </file>
 
 <file path=ppt/notesSlides/notesSlide7.xml><?xml version="1.0" encoding="utf-8"?>
-<p:notes xmlns:a="http://schemas.openxmlformats.org/drawingml/2006/main" xmlns:p="http://schemas.openxmlformats.org/presentationml/2006/main" xmlns:r="http://schemas.openxmlformats.org/officeDocument/2006/relationships">
+<p:notes xmlns:a="http://schemas.openxmlformats.org/drawingml/2006/main" xmlns:r="http://schemas.openxmlformats.org/officeDocument/2006/relationships" xmlns:p="http://schemas.openxmlformats.org/presentationml/2006/main">
   <p:cSld>
     <p:spTree>
       <p:nvGrpSpPr>
@@ -1830,7 +1878,7 @@
         <p:nvSpPr>
           <p:cNvPr id="2" name="Slide Image Placeholder 1"/>
           <p:cNvSpPr>
-            <a:spLocks noGrp="1"/>
+            <a:spLocks noGrp="1" noRot="1" noChangeAspect="1"/>
           </p:cNvSpPr>
           <p:nvPr>
             <p:ph type="sldImg" idx="2"/>
@@ -1845,7 +1893,7 @@
             <a:spLocks noGrp="1"/>
           </p:cNvSpPr>
           <p:nvPr>
-            <p:ph type="body" idx="3" sz="quarter"/>
+            <p:ph type="body" sz="quarter" idx="3"/>
           </p:nvPr>
         </p:nvSpPr>
         <p:spPr/>
@@ -1866,7 +1914,7 @@
             <a:spLocks noGrp="1"/>
           </p:cNvSpPr>
           <p:nvPr>
-            <p:ph type="sldNum" idx="5" sz="quarter"/>
+            <p:ph type="sldNum" sz="quarter" idx="5"/>
           </p:nvPr>
         </p:nvSpPr>
         <p:spPr/>
@@ -1880,7 +1928,7 @@
 </file>
 
 <file path=ppt/notesSlides/notesSlide8.xml><?xml version="1.0" encoding="utf-8"?>
-<p:notes xmlns:a="http://schemas.openxmlformats.org/drawingml/2006/main" xmlns:p="http://schemas.openxmlformats.org/presentationml/2006/main" xmlns:r="http://schemas.openxmlformats.org/officeDocument/2006/relationships">
+<p:notes xmlns:a="http://schemas.openxmlformats.org/drawingml/2006/main" xmlns:r="http://schemas.openxmlformats.org/officeDocument/2006/relationships" xmlns:p="http://schemas.openxmlformats.org/presentationml/2006/main">
   <p:cSld>
     <p:spTree>
       <p:nvGrpSpPr>
@@ -1900,7 +1948,7 @@
         <p:nvSpPr>
           <p:cNvPr id="2" name="Slide Image Placeholder 1"/>
           <p:cNvSpPr>
-            <a:spLocks noGrp="1"/>
+            <a:spLocks noGrp="1" noRot="1" noChangeAspect="1"/>
           </p:cNvSpPr>
           <p:nvPr>
             <p:ph type="sldImg" idx="2"/>
@@ -1915,7 +1963,7 @@
             <a:spLocks noGrp="1"/>
           </p:cNvSpPr>
           <p:nvPr>
-            <p:ph type="body" idx="3" sz="quarter"/>
+            <p:ph type="body" sz="quarter" idx="3"/>
           </p:nvPr>
         </p:nvSpPr>
         <p:spPr/>
@@ -1936,7 +1984,7 @@
             <a:spLocks noGrp="1"/>
           </p:cNvSpPr>
           <p:nvPr>
-            <p:ph type="sldNum" idx="5" sz="quarter"/>
+            <p:ph type="sldNum" sz="quarter" idx="5"/>
           </p:nvPr>
         </p:nvSpPr>
         <p:spPr/>
@@ -1950,7 +1998,7 @@
 </file>
 
 <file path=ppt/notesSlides/notesSlide9.xml><?xml version="1.0" encoding="utf-8"?>
-<p:notes xmlns:a="http://schemas.openxmlformats.org/drawingml/2006/main" xmlns:p="http://schemas.openxmlformats.org/presentationml/2006/main" xmlns:r="http://schemas.openxmlformats.org/officeDocument/2006/relationships">
+<p:notes xmlns:a="http://schemas.openxmlformats.org/drawingml/2006/main" xmlns:r="http://schemas.openxmlformats.org/officeDocument/2006/relationships" xmlns:p="http://schemas.openxmlformats.org/presentationml/2006/main">
   <p:cSld>
     <p:spTree>
       <p:nvGrpSpPr>
@@ -1970,7 +2018,7 @@
         <p:nvSpPr>
           <p:cNvPr id="2" name="Slide Image Placeholder 1"/>
           <p:cNvSpPr>
-            <a:spLocks noGrp="1"/>
+            <a:spLocks noGrp="1" noRot="1" noChangeAspect="1"/>
           </p:cNvSpPr>
           <p:nvPr>
             <p:ph type="sldImg" idx="2"/>
@@ -1985,7 +2033,7 @@
             <a:spLocks noGrp="1"/>
           </p:cNvSpPr>
           <p:nvPr>
-            <p:ph type="body" idx="3" sz="quarter"/>
+            <p:ph type="body" sz="quarter" idx="3"/>
           </p:nvPr>
         </p:nvSpPr>
         <p:spPr/>
@@ -2006,7 +2054,7 @@
             <a:spLocks noGrp="1"/>
           </p:cNvSpPr>
           <p:nvPr>
-            <p:ph type="sldNum" idx="5" sz="quarter"/>
+            <p:ph type="sldNum" sz="quarter" idx="5"/>
           </p:nvPr>
         </p:nvSpPr>
         <p:spPr/>
@@ -2057,10 +2105,9 @@
           <a:lstStyle/>
           <a:p>
             <a:r>
-              <a:rPr lang="en-US" smtClean="0"/>
+              <a:rPr lang="en-US"/>
               <a:t>Click to edit Master title style</a:t>
             </a:r>
-            <a:endParaRPr lang="en-US"/>
           </a:p>
         </p:txBody>
       </p:sp>
@@ -2176,10 +2223,9 @@
           </a:lstStyle>
           <a:p>
             <a:r>
-              <a:rPr lang="en-US" smtClean="0"/>
+              <a:rPr lang="en-US"/>
               <a:t>Click to edit Master subtitle style</a:t>
             </a:r>
-            <a:endParaRPr lang="en-US"/>
           </a:p>
         </p:txBody>
       </p:sp>
@@ -2200,7 +2246,7 @@
           <a:p>
             <a:fld id="{5BCAD085-E8A6-8845-BD4E-CB4CCA059FC4}" type="datetimeFigureOut">
               <a:rPr lang="en-US" smtClean="0"/>
-              <a:t>1/27/13</a:t>
+              <a:t>10/14/2026</a:t>
             </a:fld>
             <a:endParaRPr lang="en-US"/>
           </a:p>
@@ -2294,10 +2340,9 @@
           <a:lstStyle/>
           <a:p>
             <a:r>
-              <a:rPr lang="en-US" smtClean="0"/>
+              <a:rPr lang="en-US"/>
               <a:t>Click to edit Master title style</a:t>
             </a:r>
-            <a:endParaRPr lang="en-US"/>
           </a:p>
         </p:txBody>
       </p:sp>
@@ -2318,38 +2363,37 @@
           <a:p>
             <a:pPr lvl="0"/>
             <a:r>
-              <a:rPr lang="en-US" smtClean="0"/>
+              <a:rPr lang="en-US"/>
               <a:t>Click to edit Master text styles</a:t>
             </a:r>
           </a:p>
           <a:p>
             <a:pPr lvl="1"/>
             <a:r>
-              <a:rPr lang="en-US" smtClean="0"/>
+              <a:rPr lang="en-US"/>
               <a:t>Second level</a:t>
             </a:r>
           </a:p>
           <a:p>
             <a:pPr lvl="2"/>
             <a:r>
-              <a:rPr lang="en-US" smtClean="0"/>
+              <a:rPr lang="en-US"/>
               <a:t>Third level</a:t>
             </a:r>
           </a:p>
           <a:p>
             <a:pPr lvl="3"/>
             <a:r>
-              <a:rPr lang="en-US" smtClean="0"/>
+              <a:rPr lang="en-US"/>
               <a:t>Fourth level</a:t>
             </a:r>
           </a:p>
           <a:p>
             <a:pPr lvl="4"/>
             <a:r>
-              <a:rPr lang="en-US" smtClean="0"/>
+              <a:rPr lang="en-US"/>
               <a:t>Fifth level</a:t>
             </a:r>
-            <a:endParaRPr lang="en-US"/>
           </a:p>
         </p:txBody>
       </p:sp>
@@ -2370,7 +2414,7 @@
           <a:p>
             <a:fld id="{5BCAD085-E8A6-8845-BD4E-CB4CCA059FC4}" type="datetimeFigureOut">
               <a:rPr lang="en-US" smtClean="0"/>
-              <a:t>1/27/13</a:t>
+              <a:t>10/14/2026</a:t>
             </a:fld>
             <a:endParaRPr lang="en-US"/>
           </a:p>
@@ -2469,10 +2513,9 @@
           <a:lstStyle/>
           <a:p>
             <a:r>
-              <a:rPr lang="en-US" smtClean="0"/>
+              <a:rPr lang="en-US"/>
               <a:t>Click to edit Master title style</a:t>
             </a:r>
-            <a:endParaRPr lang="en-US"/>
           </a:p>
         </p:txBody>
       </p:sp>
@@ -2498,38 +2541,37 @@
           <a:p>
             <a:pPr lvl="0"/>
             <a:r>
-              <a:rPr lang="en-US" smtClean="0"/>
+              <a:rPr lang="en-US"/>
               <a:t>Click to edit Master text styles</a:t>
             </a:r>
           </a:p>
           <a:p>
             <a:pPr lvl="1"/>
             <a:r>
-              <a:rPr lang="en-US" smtClean="0"/>
+              <a:rPr lang="en-US"/>
               <a:t>Second level</a:t>
             </a:r>
           </a:p>
           <a:p>
             <a:pPr lvl="2"/>
             <a:r>
-              <a:rPr lang="en-US" smtClean="0"/>
+              <a:rPr lang="en-US"/>
               <a:t>Third level</a:t>
             </a:r>
           </a:p>
           <a:p>
             <a:pPr lvl="3"/>
             <a:r>
-              <a:rPr lang="en-US" smtClean="0"/>
+              <a:rPr lang="en-US"/>
               <a:t>Fourth level</a:t>
             </a:r>
           </a:p>
           <a:p>
             <a:pPr lvl="4"/>
             <a:r>
-              <a:rPr lang="en-US" smtClean="0"/>
+              <a:rPr lang="en-US"/>
               <a:t>Fifth level</a:t>
             </a:r>
-            <a:endParaRPr lang="en-US"/>
           </a:p>
         </p:txBody>
       </p:sp>
@@ -2550,7 +2592,7 @@
           <a:p>
             <a:fld id="{5BCAD085-E8A6-8845-BD4E-CB4CCA059FC4}" type="datetimeFigureOut">
               <a:rPr lang="en-US" smtClean="0"/>
-              <a:t>1/27/13</a:t>
+              <a:t>10/14/2026</a:t>
             </a:fld>
             <a:endParaRPr lang="en-US"/>
           </a:p>
@@ -2644,10 +2686,9 @@
           <a:lstStyle/>
           <a:p>
             <a:r>
-              <a:rPr lang="en-US" smtClean="0"/>
+              <a:rPr lang="en-US"/>
               <a:t>Click to edit Master title style</a:t>
             </a:r>
-            <a:endParaRPr lang="en-US"/>
           </a:p>
         </p:txBody>
       </p:sp>
@@ -2668,38 +2709,37 @@
           <a:p>
             <a:pPr lvl="0"/>
             <a:r>
-              <a:rPr lang="en-US" smtClean="0"/>
+              <a:rPr lang="en-US"/>
               <a:t>Click to edit Master text styles</a:t>
             </a:r>
           </a:p>
           <a:p>
             <a:pPr lvl="1"/>
             <a:r>
-              <a:rPr lang="en-US" smtClean="0"/>
+              <a:rPr lang="en-US"/>
               <a:t>Second level</a:t>
             </a:r>
           </a:p>
           <a:p>
             <a:pPr lvl="2"/>
             <a:r>
-              <a:rPr lang="en-US" smtClean="0"/>
+              <a:rPr lang="en-US"/>
               <a:t>Third level</a:t>
             </a:r>
           </a:p>
           <a:p>
             <a:pPr lvl="3"/>
             <a:r>
-              <a:rPr lang="en-US" smtClean="0"/>
+              <a:rPr lang="en-US"/>
               <a:t>Fourth level</a:t>
             </a:r>
           </a:p>
           <a:p>
             <a:pPr lvl="4"/>
             <a:r>
-              <a:rPr lang="en-US" smtClean="0"/>
+              <a:rPr lang="en-US"/>
               <a:t>Fifth level</a:t>
             </a:r>
-            <a:endParaRPr lang="en-US"/>
           </a:p>
         </p:txBody>
       </p:sp>
@@ -2720,7 +2760,7 @@
           <a:p>
             <a:fld id="{5BCAD085-E8A6-8845-BD4E-CB4CCA059FC4}" type="datetimeFigureOut">
               <a:rPr lang="en-US" smtClean="0"/>
-              <a:t>1/27/13</a:t>
+              <a:t>10/14/2026</a:t>
             </a:fld>
             <a:endParaRPr lang="en-US"/>
           </a:p>
@@ -2823,10 +2863,9 @@
           </a:lstStyle>
           <a:p>
             <a:r>
-              <a:rPr lang="en-US" smtClean="0"/>
+              <a:rPr lang="en-US"/>
               <a:t>Click to edit Master title style</a:t>
             </a:r>
-            <a:endParaRPr lang="en-US"/>
           </a:p>
         </p:txBody>
       </p:sp>
@@ -2943,7 +2982,7 @@
           <a:p>
             <a:pPr lvl="0"/>
             <a:r>
-              <a:rPr lang="en-US" smtClean="0"/>
+              <a:rPr lang="en-US"/>
               <a:t>Click to edit Master text styles</a:t>
             </a:r>
           </a:p>
@@ -2966,7 +3005,7 @@
           <a:p>
             <a:fld id="{5BCAD085-E8A6-8845-BD4E-CB4CCA059FC4}" type="datetimeFigureOut">
               <a:rPr lang="en-US" smtClean="0"/>
-              <a:t>1/27/13</a:t>
+              <a:t>10/14/2026</a:t>
             </a:fld>
             <a:endParaRPr lang="en-US"/>
           </a:p>
@@ -3060,10 +3099,9 @@
           <a:lstStyle/>
           <a:p>
             <a:r>
-              <a:rPr lang="en-US" smtClean="0"/>
+              <a:rPr lang="en-US"/>
               <a:t>Click to edit Master title style</a:t>
             </a:r>
-            <a:endParaRPr lang="en-US"/>
           </a:p>
         </p:txBody>
       </p:sp>
@@ -3117,38 +3155,37 @@
           <a:p>
             <a:pPr lvl="0"/>
             <a:r>
-              <a:rPr lang="en-US" smtClean="0"/>
+              <a:rPr lang="en-US"/>
               <a:t>Click to edit Master text styles</a:t>
             </a:r>
           </a:p>
           <a:p>
             <a:pPr lvl="1"/>
             <a:r>
-              <a:rPr lang="en-US" smtClean="0"/>
+              <a:rPr lang="en-US"/>
               <a:t>Second level</a:t>
             </a:r>
           </a:p>
           <a:p>
             <a:pPr lvl="2"/>
             <a:r>
-              <a:rPr lang="en-US" smtClean="0"/>
+              <a:rPr lang="en-US"/>
               <a:t>Third level</a:t>
             </a:r>
           </a:p>
           <a:p>
             <a:pPr lvl="3"/>
             <a:r>
-              <a:rPr lang="en-US" smtClean="0"/>
+              <a:rPr lang="en-US"/>
               <a:t>Fourth level</a:t>
             </a:r>
           </a:p>
           <a:p>
             <a:pPr lvl="4"/>
             <a:r>
-              <a:rPr lang="en-US" smtClean="0"/>
+              <a:rPr lang="en-US"/>
               <a:t>Fifth level</a:t>
             </a:r>
-            <a:endParaRPr lang="en-US"/>
           </a:p>
         </p:txBody>
       </p:sp>
@@ -3202,38 +3239,37 @@
           <a:p>
             <a:pPr lvl="0"/>
             <a:r>
-              <a:rPr lang="en-US" smtClean="0"/>
+              <a:rPr lang="en-US"/>
               <a:t>Click to edit Master text styles</a:t>
             </a:r>
           </a:p>
           <a:p>
             <a:pPr lvl="1"/>
             <a:r>
-              <a:rPr lang="en-US" smtClean="0"/>
+              <a:rPr lang="en-US"/>
               <a:t>Second level</a:t>
             </a:r>
           </a:p>
           <a:p>
             <a:pPr lvl="2"/>
             <a:r>
-              <a:rPr lang="en-US" smtClean="0"/>
+              <a:rPr lang="en-US"/>
               <a:t>Third level</a:t>
             </a:r>
           </a:p>
           <a:p>
             <a:pPr lvl="3"/>
             <a:r>
-              <a:rPr lang="en-US" smtClean="0"/>
+              <a:rPr lang="en-US"/>
               <a:t>Fourth level</a:t>
             </a:r>
           </a:p>
           <a:p>
             <a:pPr lvl="4"/>
             <a:r>
-              <a:rPr lang="en-US" smtClean="0"/>
+              <a:rPr lang="en-US"/>
               <a:t>Fifth level</a:t>
             </a:r>
-            <a:endParaRPr lang="en-US"/>
           </a:p>
         </p:txBody>
       </p:sp>
@@ -3254,7 +3290,7 @@
           <a:p>
             <a:fld id="{5BCAD085-E8A6-8845-BD4E-CB4CCA059FC4}" type="datetimeFigureOut">
               <a:rPr lang="en-US" smtClean="0"/>
-              <a:t>1/27/13</a:t>
+              <a:t>10/14/2026</a:t>
             </a:fld>
             <a:endParaRPr lang="en-US"/>
           </a:p>
@@ -3352,10 +3388,9 @@
           </a:lstStyle>
           <a:p>
             <a:r>
-              <a:rPr lang="en-US" smtClean="0"/>
+              <a:rPr lang="en-US"/>
               <a:t>Click to edit Master title style</a:t>
             </a:r>
-            <a:endParaRPr lang="en-US"/>
           </a:p>
         </p:txBody>
       </p:sp>
@@ -3418,7 +3453,7 @@
           <a:p>
             <a:pPr lvl="0"/>
             <a:r>
-              <a:rPr lang="en-US" smtClean="0"/>
+              <a:rPr lang="en-US"/>
               <a:t>Click to edit Master text styles</a:t>
             </a:r>
           </a:p>
@@ -3474,38 +3509,37 @@
           <a:p>
             <a:pPr lvl="0"/>
             <a:r>
-              <a:rPr lang="en-US" smtClean="0"/>
+              <a:rPr lang="en-US"/>
               <a:t>Click to edit Master text styles</a:t>
             </a:r>
           </a:p>
           <a:p>
             <a:pPr lvl="1"/>
             <a:r>
-              <a:rPr lang="en-US" smtClean="0"/>
+              <a:rPr lang="en-US"/>
               <a:t>Second level</a:t>
             </a:r>
           </a:p>
           <a:p>
             <a:pPr lvl="2"/>
             <a:r>
-              <a:rPr lang="en-US" smtClean="0"/>
+              <a:rPr lang="en-US"/>
               <a:t>Third level</a:t>
             </a:r>
           </a:p>
           <a:p>
             <a:pPr lvl="3"/>
             <a:r>
-              <a:rPr lang="en-US" smtClean="0"/>
+              <a:rPr lang="en-US"/>
               <a:t>Fourth level</a:t>
             </a:r>
           </a:p>
           <a:p>
             <a:pPr lvl="4"/>
             <a:r>
-              <a:rPr lang="en-US" smtClean="0"/>
+              <a:rPr lang="en-US"/>
               <a:t>Fifth level</a:t>
             </a:r>
-            <a:endParaRPr lang="en-US"/>
           </a:p>
         </p:txBody>
       </p:sp>
@@ -3568,7 +3602,7 @@
           <a:p>
             <a:pPr lvl="0"/>
             <a:r>
-              <a:rPr lang="en-US" smtClean="0"/>
+              <a:rPr lang="en-US"/>
               <a:t>Click to edit Master text styles</a:t>
             </a:r>
           </a:p>
@@ -3624,38 +3658,37 @@
           <a:p>
             <a:pPr lvl="0"/>
             <a:r>
-              <a:rPr lang="en-US" smtClean="0"/>
+              <a:rPr lang="en-US"/>
               <a:t>Click to edit Master text styles</a:t>
             </a:r>
           </a:p>
           <a:p>
             <a:pPr lvl="1"/>
             <a:r>
-              <a:rPr lang="en-US" smtClean="0"/>
+              <a:rPr lang="en-US"/>
               <a:t>Second level</a:t>
             </a:r>
           </a:p>
           <a:p>
             <a:pPr lvl="2"/>
             <a:r>
-              <a:rPr lang="en-US" smtClean="0"/>
+              <a:rPr lang="en-US"/>
               <a:t>Third level</a:t>
             </a:r>
           </a:p>
           <a:p>
             <a:pPr lvl="3"/>
             <a:r>
-              <a:rPr lang="en-US" smtClean="0"/>
+              <a:rPr lang="en-US"/>
               <a:t>Fourth level</a:t>
             </a:r>
           </a:p>
           <a:p>
             <a:pPr lvl="4"/>
             <a:r>
-              <a:rPr lang="en-US" smtClean="0"/>
+              <a:rPr lang="en-US"/>
               <a:t>Fifth level</a:t>
             </a:r>
-            <a:endParaRPr lang="en-US"/>
           </a:p>
         </p:txBody>
       </p:sp>
@@ -3676,7 +3709,7 @@
           <a:p>
             <a:fld id="{5BCAD085-E8A6-8845-BD4E-CB4CCA059FC4}" type="datetimeFigureOut">
               <a:rPr lang="en-US" smtClean="0"/>
-              <a:t>1/27/13</a:t>
+              <a:t>10/14/2026</a:t>
             </a:fld>
             <a:endParaRPr lang="en-US"/>
           </a:p>
@@ -3770,10 +3803,9 @@
           <a:lstStyle/>
           <a:p>
             <a:r>
-              <a:rPr lang="en-US" smtClean="0"/>
+              <a:rPr lang="en-US"/>
               <a:t>Click to edit Master title style</a:t>
             </a:r>
-            <a:endParaRPr lang="en-US"/>
           </a:p>
         </p:txBody>
       </p:sp>
@@ -3794,7 +3826,7 @@
           <a:p>
             <a:fld id="{5BCAD085-E8A6-8845-BD4E-CB4CCA059FC4}" type="datetimeFigureOut">
               <a:rPr lang="en-US" smtClean="0"/>
-              <a:t>1/27/13</a:t>
+              <a:t>10/14/2026</a:t>
             </a:fld>
             <a:endParaRPr lang="en-US"/>
           </a:p>
@@ -3889,7 +3921,7 @@
           <a:p>
             <a:fld id="{5BCAD085-E8A6-8845-BD4E-CB4CCA059FC4}" type="datetimeFigureOut">
               <a:rPr lang="en-US" smtClean="0"/>
-              <a:t>1/27/13</a:t>
+              <a:t>10/14/2026</a:t>
             </a:fld>
             <a:endParaRPr lang="en-US"/>
           </a:p>
@@ -3992,10 +4024,9 @@
           </a:lstStyle>
           <a:p>
             <a:r>
-              <a:rPr lang="en-US" smtClean="0"/>
+              <a:rPr lang="en-US"/>
               <a:t>Click to edit Master title style</a:t>
             </a:r>
-            <a:endParaRPr lang="en-US"/>
           </a:p>
         </p:txBody>
       </p:sp>
@@ -4049,38 +4080,37 @@
           <a:p>
             <a:pPr lvl="0"/>
             <a:r>
-              <a:rPr lang="en-US" smtClean="0"/>
+              <a:rPr lang="en-US"/>
               <a:t>Click to edit Master text styles</a:t>
             </a:r>
           </a:p>
           <a:p>
             <a:pPr lvl="1"/>
             <a:r>
-              <a:rPr lang="en-US" smtClean="0"/>
+              <a:rPr lang="en-US"/>
               <a:t>Second level</a:t>
             </a:r>
           </a:p>
           <a:p>
             <a:pPr lvl="2"/>
             <a:r>
-              <a:rPr lang="en-US" smtClean="0"/>
+              <a:rPr lang="en-US"/>
               <a:t>Third level</a:t>
             </a:r>
           </a:p>
           <a:p>
             <a:pPr lvl="3"/>
             <a:r>
-              <a:rPr lang="en-US" smtClean="0"/>
+              <a:rPr lang="en-US"/>
               <a:t>Fourth level</a:t>
             </a:r>
           </a:p>
           <a:p>
             <a:pPr lvl="4"/>
             <a:r>
-              <a:rPr lang="en-US" smtClean="0"/>
+              <a:rPr lang="en-US"/>
               <a:t>Fifth level</a:t>
             </a:r>
-            <a:endParaRPr lang="en-US"/>
           </a:p>
         </p:txBody>
       </p:sp>
@@ -4143,7 +4173,7 @@
           <a:p>
             <a:pPr lvl="0"/>
             <a:r>
-              <a:rPr lang="en-US" smtClean="0"/>
+              <a:rPr lang="en-US"/>
               <a:t>Click to edit Master text styles</a:t>
             </a:r>
           </a:p>
@@ -4166,7 +4196,7 @@
           <a:p>
             <a:fld id="{5BCAD085-E8A6-8845-BD4E-CB4CCA059FC4}" type="datetimeFigureOut">
               <a:rPr lang="en-US" smtClean="0"/>
-              <a:t>1/27/13</a:t>
+              <a:t>10/14/2026</a:t>
             </a:fld>
             <a:endParaRPr lang="en-US"/>
           </a:p>
@@ -4269,10 +4299,9 @@
           </a:lstStyle>
           <a:p>
             <a:r>
-              <a:rPr lang="en-US" smtClean="0"/>
+              <a:rPr lang="en-US"/>
               <a:t>Click to edit Master title style</a:t>
             </a:r>
-            <a:endParaRPr lang="en-US"/>
           </a:p>
         </p:txBody>
       </p:sp>
@@ -4396,7 +4425,7 @@
           <a:p>
             <a:pPr lvl="0"/>
             <a:r>
-              <a:rPr lang="en-US" smtClean="0"/>
+              <a:rPr lang="en-US"/>
               <a:t>Click to edit Master text styles</a:t>
             </a:r>
           </a:p>
@@ -4419,7 +4448,7 @@
           <a:p>
             <a:fld id="{5BCAD085-E8A6-8845-BD4E-CB4CCA059FC4}" type="datetimeFigureOut">
               <a:rPr lang="en-US" smtClean="0"/>
-              <a:t>1/27/13</a:t>
+              <a:t>10/14/2026</a:t>
             </a:fld>
             <a:endParaRPr lang="en-US"/>
           </a:p>
@@ -4528,10 +4557,9 @@
           <a:lstStyle/>
           <a:p>
             <a:r>
-              <a:rPr lang="en-US" smtClean="0"/>
+              <a:rPr lang="en-US"/>
               <a:t>Click to edit Master title style</a:t>
             </a:r>
-            <a:endParaRPr lang="en-US"/>
           </a:p>
         </p:txBody>
       </p:sp>
@@ -4562,38 +4590,37 @@
           <a:p>
             <a:pPr lvl="0"/>
             <a:r>
-              <a:rPr lang="en-US" smtClean="0"/>
+              <a:rPr lang="en-US"/>
               <a:t>Click to edit Master text styles</a:t>
             </a:r>
           </a:p>
           <a:p>
             <a:pPr lvl="1"/>
             <a:r>
-              <a:rPr lang="en-US" smtClean="0"/>
+              <a:rPr lang="en-US"/>
               <a:t>Second level</a:t>
             </a:r>
           </a:p>
           <a:p>
             <a:pPr lvl="2"/>
             <a:r>
-              <a:rPr lang="en-US" smtClean="0"/>
+              <a:rPr lang="en-US"/>
               <a:t>Third level</a:t>
             </a:r>
           </a:p>
           <a:p>
             <a:pPr lvl="3"/>
             <a:r>
-              <a:rPr lang="en-US" smtClean="0"/>
+              <a:rPr lang="en-US"/>
               <a:t>Fourth level</a:t>
             </a:r>
           </a:p>
           <a:p>
             <a:pPr lvl="4"/>
             <a:r>
-              <a:rPr lang="en-US" smtClean="0"/>
+              <a:rPr lang="en-US"/>
               <a:t>Fifth level</a:t>
             </a:r>
-            <a:endParaRPr lang="en-US"/>
           </a:p>
         </p:txBody>
       </p:sp>
@@ -4632,7 +4659,7 @@
           <a:p>
             <a:fld id="{5BCAD085-E8A6-8845-BD4E-CB4CCA059FC4}" type="datetimeFigureOut">
               <a:rPr lang="en-US" smtClean="0"/>
-              <a:t>1/27/13</a:t>
+              <a:t>10/14/2026</a:t>
             </a:fld>
             <a:endParaRPr lang="en-US"/>
           </a:p>
@@ -4991,7 +5018,7 @@
 </file>
 
 <file path=ppt/slides/slide1.xml><?xml version="1.0" encoding="utf-8"?>
-<p:sld xmlns:a="http://schemas.openxmlformats.org/drawingml/2006/main" xmlns:p="http://schemas.openxmlformats.org/presentationml/2006/main" xmlns:r="http://schemas.openxmlformats.org/officeDocument/2006/relationships">
+<p:sld xmlns:a="http://schemas.openxmlformats.org/drawingml/2006/main" xmlns:r="http://schemas.openxmlformats.org/officeDocument/2006/relationships" xmlns:p="http://schemas.openxmlformats.org/presentationml/2006/main">
   <p:cSld>
     <p:spTree>
       <p:nvGrpSpPr>
@@ -4999,7 +5026,14 @@
         <p:cNvGrpSpPr/>
         <p:nvPr/>
       </p:nvGrpSpPr>
-      <p:grpSpPr/>
+      <p:grpSpPr>
+        <a:xfrm>
+          <a:off x="0" y="0"/>
+          <a:ext cx="0" cy="0"/>
+          <a:chOff x="0" y="0"/>
+          <a:chExt cx="0" cy="0"/>
+        </a:xfrm>
+      </p:grpSpPr>
       <p:sp>
         <p:nvSpPr>
           <p:cNvPr id="2" name="Rectangle 1"/>
@@ -5039,7 +5073,9 @@
         <p:txBody>
           <a:bodyPr rtlCol="0" anchor="ctr"/>
           <a:lstStyle/>
-          <a:p/>
+          <a:p>
+            <a:endParaRPr/>
+          </a:p>
         </p:txBody>
       </p:sp>
       <p:sp>
@@ -5081,7 +5117,9 @@
         <p:txBody>
           <a:bodyPr rtlCol="0" anchor="ctr"/>
           <a:lstStyle/>
-          <a:p/>
+          <a:p>
+            <a:endParaRPr/>
+          </a:p>
         </p:txBody>
       </p:sp>
       <p:sp>
@@ -5101,7 +5139,7 @@
           <a:noFill/>
         </p:spPr>
         <p:txBody>
-          <a:bodyPr wrap="square" anchor="t" lIns="45720" rIns="45720">
+          <a:bodyPr wrap="square" lIns="45720" rIns="45720" anchor="t">
             <a:spAutoFit/>
           </a:bodyPr>
           <a:lstStyle/>
@@ -5136,7 +5174,7 @@
           <a:noFill/>
         </p:spPr>
         <p:txBody>
-          <a:bodyPr wrap="square" anchor="ctr" lIns="45720" rIns="45720">
+          <a:bodyPr wrap="square" lIns="45720" rIns="45720" anchor="ctr">
             <a:spAutoFit/>
           </a:bodyPr>
           <a:lstStyle/>
@@ -5171,7 +5209,7 @@
           <a:noFill/>
         </p:spPr>
         <p:txBody>
-          <a:bodyPr wrap="square" anchor="t" lIns="45720" rIns="45720">
+          <a:bodyPr wrap="square" lIns="45720" rIns="45720" anchor="t">
             <a:spAutoFit/>
           </a:bodyPr>
           <a:lstStyle/>
@@ -5218,7 +5256,7 @@
           <a:noFill/>
         </p:spPr>
         <p:txBody>
-          <a:bodyPr wrap="square" anchor="t" lIns="45720" rIns="45720">
+          <a:bodyPr wrap="square" lIns="45720" rIns="45720" anchor="t">
             <a:spAutoFit/>
           </a:bodyPr>
           <a:lstStyle/>
@@ -5245,7 +5283,7 @@
 </file>
 
 <file path=ppt/slides/slide10.xml><?xml version="1.0" encoding="utf-8"?>
-<p:sld xmlns:a="http://schemas.openxmlformats.org/drawingml/2006/main" xmlns:p="http://schemas.openxmlformats.org/presentationml/2006/main" xmlns:r="http://schemas.openxmlformats.org/officeDocument/2006/relationships">
+<p:sld xmlns:a="http://schemas.openxmlformats.org/drawingml/2006/main" xmlns:r="http://schemas.openxmlformats.org/officeDocument/2006/relationships" xmlns:p="http://schemas.openxmlformats.org/presentationml/2006/main">
   <p:cSld>
     <p:spTree>
       <p:nvGrpSpPr>
@@ -5253,7 +5291,14 @@
         <p:cNvGrpSpPr/>
         <p:nvPr/>
       </p:nvGrpSpPr>
-      <p:grpSpPr/>
+      <p:grpSpPr>
+        <a:xfrm>
+          <a:off x="0" y="0"/>
+          <a:ext cx="0" cy="0"/>
+          <a:chOff x="0" y="0"/>
+          <a:chExt cx="0" cy="0"/>
+        </a:xfrm>
+      </p:grpSpPr>
       <p:sp>
         <p:nvSpPr>
           <p:cNvPr id="2" name="TextBox 1"/>
@@ -5271,7 +5316,7 @@
           <a:noFill/>
         </p:spPr>
         <p:txBody>
-          <a:bodyPr wrap="square" anchor="t" lIns="45720" rIns="45720">
+          <a:bodyPr wrap="square" lIns="45720" rIns="45720" anchor="t">
             <a:spAutoFit/>
           </a:bodyPr>
           <a:lstStyle/>
@@ -5306,7 +5351,7 @@
           <a:noFill/>
         </p:spPr>
         <p:txBody>
-          <a:bodyPr wrap="square" anchor="ctr" lIns="45720" rIns="45720">
+          <a:bodyPr wrap="square" lIns="45720" rIns="45720" anchor="ctr">
             <a:spAutoFit/>
           </a:bodyPr>
           <a:lstStyle/>
@@ -5341,7 +5386,7 @@
           <a:noFill/>
         </p:spPr>
         <p:txBody>
-          <a:bodyPr wrap="square" anchor="t" lIns="45720" rIns="45720">
+          <a:bodyPr wrap="square" lIns="45720" rIns="45720" anchor="t">
             <a:spAutoFit/>
           </a:bodyPr>
           <a:lstStyle/>
@@ -5376,7 +5421,7 @@
           <a:noFill/>
         </p:spPr>
         <p:txBody>
-          <a:bodyPr wrap="square" anchor="t" lIns="45720" rIns="45720">
+          <a:bodyPr wrap="square" lIns="45720" rIns="45720" anchor="t">
             <a:spAutoFit/>
           </a:bodyPr>
           <a:lstStyle/>
@@ -5435,7 +5480,9 @@
         <p:txBody>
           <a:bodyPr rtlCol="0" anchor="ctr"/>
           <a:lstStyle/>
-          <a:p/>
+          <a:p>
+            <a:endParaRPr/>
+          </a:p>
         </p:txBody>
       </p:sp>
       <p:sp>
@@ -5455,7 +5502,7 @@
           <a:noFill/>
         </p:spPr>
         <p:txBody>
-          <a:bodyPr wrap="square" anchor="ctr" lIns="45720" rIns="45720">
+          <a:bodyPr wrap="square" lIns="45720" rIns="45720" anchor="ctr">
             <a:spAutoFit/>
           </a:bodyPr>
           <a:lstStyle/>
@@ -5667,7 +5714,9 @@
         <p:txBody>
           <a:bodyPr rtlCol="0" anchor="ctr"/>
           <a:lstStyle/>
-          <a:p/>
+          <a:p>
+            <a:endParaRPr/>
+          </a:p>
         </p:txBody>
       </p:sp>
       <p:sp>
@@ -5687,7 +5736,7 @@
           <a:noFill/>
         </p:spPr>
         <p:txBody>
-          <a:bodyPr wrap="square" anchor="ctr" lIns="45720" rIns="45720">
+          <a:bodyPr wrap="square" lIns="45720" rIns="45720" anchor="ctr">
             <a:spAutoFit/>
           </a:bodyPr>
           <a:lstStyle/>
@@ -5867,7 +5916,7 @@
 </file>
 
 <file path=ppt/slides/slide11.xml><?xml version="1.0" encoding="utf-8"?>
-<p:sld xmlns:a="http://schemas.openxmlformats.org/drawingml/2006/main" xmlns:p="http://schemas.openxmlformats.org/presentationml/2006/main" xmlns:r="http://schemas.openxmlformats.org/officeDocument/2006/relationships">
+<p:sld xmlns:a="http://schemas.openxmlformats.org/drawingml/2006/main" xmlns:r="http://schemas.openxmlformats.org/officeDocument/2006/relationships" xmlns:p="http://schemas.openxmlformats.org/presentationml/2006/main">
   <p:cSld>
     <p:spTree>
       <p:nvGrpSpPr>
@@ -5875,7 +5924,14 @@
         <p:cNvGrpSpPr/>
         <p:nvPr/>
       </p:nvGrpSpPr>
-      <p:grpSpPr/>
+      <p:grpSpPr>
+        <a:xfrm>
+          <a:off x="0" y="0"/>
+          <a:ext cx="0" cy="0"/>
+          <a:chOff x="0" y="0"/>
+          <a:chExt cx="0" cy="0"/>
+        </a:xfrm>
+      </p:grpSpPr>
       <p:sp>
         <p:nvSpPr>
           <p:cNvPr id="2" name="TextBox 1"/>
@@ -5893,7 +5949,7 @@
           <a:noFill/>
         </p:spPr>
         <p:txBody>
-          <a:bodyPr wrap="square" anchor="t" lIns="45720" rIns="45720">
+          <a:bodyPr wrap="square" lIns="45720" rIns="45720" anchor="t">
             <a:spAutoFit/>
           </a:bodyPr>
           <a:lstStyle/>
@@ -5928,7 +5984,7 @@
           <a:noFill/>
         </p:spPr>
         <p:txBody>
-          <a:bodyPr wrap="square" anchor="ctr" lIns="45720" rIns="45720">
+          <a:bodyPr wrap="square" lIns="45720" rIns="45720" anchor="ctr">
             <a:spAutoFit/>
           </a:bodyPr>
           <a:lstStyle/>
@@ -5963,7 +6019,7 @@
           <a:noFill/>
         </p:spPr>
         <p:txBody>
-          <a:bodyPr wrap="square" anchor="t" lIns="45720" rIns="45720">
+          <a:bodyPr wrap="square" lIns="45720" rIns="45720" anchor="t">
             <a:spAutoFit/>
           </a:bodyPr>
           <a:lstStyle/>
@@ -5998,7 +6054,7 @@
           <a:noFill/>
         </p:spPr>
         <p:txBody>
-          <a:bodyPr wrap="square" anchor="t" lIns="45720" rIns="45720">
+          <a:bodyPr wrap="square" lIns="45720" rIns="45720" anchor="t">
             <a:spAutoFit/>
           </a:bodyPr>
           <a:lstStyle/>
@@ -6057,7 +6113,9 @@
         <p:txBody>
           <a:bodyPr rtlCol="0" anchor="ctr"/>
           <a:lstStyle/>
-          <a:p/>
+          <a:p>
+            <a:endParaRPr/>
+          </a:p>
         </p:txBody>
       </p:sp>
       <p:sp>
@@ -6077,7 +6135,7 @@
           <a:noFill/>
         </p:spPr>
         <p:txBody>
-          <a:bodyPr wrap="square" anchor="t" lIns="45720" rIns="45720">
+          <a:bodyPr wrap="square" lIns="45720" rIns="45720" anchor="t">
             <a:spAutoFit/>
           </a:bodyPr>
           <a:lstStyle/>
@@ -6112,7 +6170,7 @@
           <a:noFill/>
         </p:spPr>
         <p:txBody>
-          <a:bodyPr wrap="square" anchor="t" lIns="45720" rIns="45720">
+          <a:bodyPr wrap="square" lIns="45720" rIns="45720" anchor="t">
             <a:spAutoFit/>
           </a:bodyPr>
           <a:lstStyle/>
@@ -6262,7 +6320,9 @@
         <p:txBody>
           <a:bodyPr rtlCol="0" anchor="ctr"/>
           <a:lstStyle/>
-          <a:p/>
+          <a:p>
+            <a:endParaRPr/>
+          </a:p>
         </p:txBody>
       </p:sp>
       <p:sp>
@@ -6282,7 +6342,7 @@
           <a:noFill/>
         </p:spPr>
         <p:txBody>
-          <a:bodyPr wrap="square" anchor="t" lIns="45720" rIns="45720">
+          <a:bodyPr wrap="square" lIns="45720" rIns="45720" anchor="t">
             <a:spAutoFit/>
           </a:bodyPr>
           <a:lstStyle/>
@@ -6317,7 +6377,7 @@
           <a:noFill/>
         </p:spPr>
         <p:txBody>
-          <a:bodyPr wrap="square" anchor="t" lIns="45720" rIns="45720">
+          <a:bodyPr wrap="square" lIns="45720" rIns="45720" anchor="t">
             <a:spAutoFit/>
           </a:bodyPr>
           <a:lstStyle/>
@@ -6467,7 +6527,9 @@
         <p:txBody>
           <a:bodyPr rtlCol="0" anchor="ctr"/>
           <a:lstStyle/>
-          <a:p/>
+          <a:p>
+            <a:endParaRPr/>
+          </a:p>
         </p:txBody>
       </p:sp>
       <p:sp>
@@ -6487,7 +6549,7 @@
           <a:noFill/>
         </p:spPr>
         <p:txBody>
-          <a:bodyPr wrap="square" anchor="t" lIns="45720" rIns="45720">
+          <a:bodyPr wrap="square" lIns="45720" rIns="45720" anchor="t">
             <a:spAutoFit/>
           </a:bodyPr>
           <a:lstStyle/>
@@ -6522,7 +6584,7 @@
           <a:noFill/>
         </p:spPr>
         <p:txBody>
-          <a:bodyPr wrap="square" anchor="t" lIns="45720" rIns="45720">
+          <a:bodyPr wrap="square" lIns="45720" rIns="45720" anchor="t">
             <a:spAutoFit/>
           </a:bodyPr>
           <a:lstStyle/>
@@ -6672,7 +6734,9 @@
         <p:txBody>
           <a:bodyPr rtlCol="0" anchor="ctr"/>
           <a:lstStyle/>
-          <a:p/>
+          <a:p>
+            <a:endParaRPr/>
+          </a:p>
         </p:txBody>
       </p:sp>
       <p:sp>
@@ -6692,7 +6756,7 @@
           <a:noFill/>
         </p:spPr>
         <p:txBody>
-          <a:bodyPr wrap="square" anchor="ctr" lIns="45720" rIns="45720">
+          <a:bodyPr wrap="square" lIns="45720" rIns="45720" anchor="ctr">
             <a:spAutoFit/>
           </a:bodyPr>
           <a:lstStyle/>
@@ -6719,7 +6783,7 @@
 </file>
 
 <file path=ppt/slides/slide12.xml><?xml version="1.0" encoding="utf-8"?>
-<p:sld xmlns:a="http://schemas.openxmlformats.org/drawingml/2006/main" xmlns:p="http://schemas.openxmlformats.org/presentationml/2006/main" xmlns:r="http://schemas.openxmlformats.org/officeDocument/2006/relationships">
+<p:sld xmlns:a="http://schemas.openxmlformats.org/drawingml/2006/main" xmlns:r="http://schemas.openxmlformats.org/officeDocument/2006/relationships" xmlns:p="http://schemas.openxmlformats.org/presentationml/2006/main">
   <p:cSld>
     <p:spTree>
       <p:nvGrpSpPr>
@@ -6727,7 +6791,14 @@
         <p:cNvGrpSpPr/>
         <p:nvPr/>
       </p:nvGrpSpPr>
-      <p:grpSpPr/>
+      <p:grpSpPr>
+        <a:xfrm>
+          <a:off x="0" y="0"/>
+          <a:ext cx="0" cy="0"/>
+          <a:chOff x="0" y="0"/>
+          <a:chExt cx="0" cy="0"/>
+        </a:xfrm>
+      </p:grpSpPr>
       <p:sp>
         <p:nvSpPr>
           <p:cNvPr id="2" name="TextBox 1"/>
@@ -6745,7 +6816,7 @@
           <a:noFill/>
         </p:spPr>
         <p:txBody>
-          <a:bodyPr wrap="square" anchor="t" lIns="45720" rIns="45720">
+          <a:bodyPr wrap="square" lIns="45720" rIns="45720" anchor="t">
             <a:spAutoFit/>
           </a:bodyPr>
           <a:lstStyle/>
@@ -6780,7 +6851,7 @@
           <a:noFill/>
         </p:spPr>
         <p:txBody>
-          <a:bodyPr wrap="square" anchor="ctr" lIns="45720" rIns="45720">
+          <a:bodyPr wrap="square" lIns="45720" rIns="45720" anchor="ctr">
             <a:spAutoFit/>
           </a:bodyPr>
           <a:lstStyle/>
@@ -6815,7 +6886,7 @@
           <a:noFill/>
         </p:spPr>
         <p:txBody>
-          <a:bodyPr wrap="square" anchor="t" lIns="45720" rIns="45720">
+          <a:bodyPr wrap="square" lIns="45720" rIns="45720" anchor="t">
             <a:spAutoFit/>
           </a:bodyPr>
           <a:lstStyle/>
@@ -6850,7 +6921,7 @@
           <a:noFill/>
         </p:spPr>
         <p:txBody>
-          <a:bodyPr wrap="square" anchor="t" lIns="45720" rIns="45720">
+          <a:bodyPr wrap="square" lIns="45720" rIns="45720" anchor="t">
             <a:spAutoFit/>
           </a:bodyPr>
           <a:lstStyle/>
@@ -6883,20 +6954,50 @@
         <a:graphic>
           <a:graphicData uri="http://schemas.openxmlformats.org/drawingml/2006/table">
             <a:tbl>
-              <a:tblPr firstRow="0" bandRow="0">
+              <a:tblPr>
                 <a:tableStyleId>{5C22544A-7EE6-4342-B048-85BDC9FD1C3A}</a:tableStyleId>
               </a:tblPr>
               <a:tblGrid>
-                <a:gridCol w="365760"/>
-                <a:gridCol w="1280160"/>
-                <a:gridCol w="3291840"/>
-                <a:gridCol w="3474720"/>
-                <a:gridCol w="2651760"/>
+                <a:gridCol w="365760">
+                  <a:extLst>
+                    <a:ext uri="{9D8B030D-6E8A-4147-A177-3AD203B41FA5}">
+                      <a16:colId xmlns:a16="http://schemas.microsoft.com/office/drawing/2014/main" val="20000"/>
+                    </a:ext>
+                  </a:extLst>
+                </a:gridCol>
+                <a:gridCol w="1280160">
+                  <a:extLst>
+                    <a:ext uri="{9D8B030D-6E8A-4147-A177-3AD203B41FA5}">
+                      <a16:colId xmlns:a16="http://schemas.microsoft.com/office/drawing/2014/main" val="20001"/>
+                    </a:ext>
+                  </a:extLst>
+                </a:gridCol>
+                <a:gridCol w="3291840">
+                  <a:extLst>
+                    <a:ext uri="{9D8B030D-6E8A-4147-A177-3AD203B41FA5}">
+                      <a16:colId xmlns:a16="http://schemas.microsoft.com/office/drawing/2014/main" val="20002"/>
+                    </a:ext>
+                  </a:extLst>
+                </a:gridCol>
+                <a:gridCol w="3474720">
+                  <a:extLst>
+                    <a:ext uri="{9D8B030D-6E8A-4147-A177-3AD203B41FA5}">
+                      <a16:colId xmlns:a16="http://schemas.microsoft.com/office/drawing/2014/main" val="20003"/>
+                    </a:ext>
+                  </a:extLst>
+                </a:gridCol>
+                <a:gridCol w="2651760">
+                  <a:extLst>
+                    <a:ext uri="{9D8B030D-6E8A-4147-A177-3AD203B41FA5}">
+                      <a16:colId xmlns:a16="http://schemas.microsoft.com/office/drawing/2014/main" val="20004"/>
+                    </a:ext>
+                  </a:extLst>
+                </a:gridCol>
               </a:tblGrid>
               <a:tr h="457200">
                 <a:tc>
                   <a:txBody>
-                    <a:bodyPr wrap="square"/>
+                    <a:bodyPr/>
                     <a:lstStyle/>
                     <a:p>
                       <a:r>
@@ -6918,7 +7019,7 @@
                 </a:tc>
                 <a:tc>
                   <a:txBody>
-                    <a:bodyPr wrap="square"/>
+                    <a:bodyPr/>
                     <a:lstStyle/>
                     <a:p>
                       <a:r>
@@ -6940,7 +7041,7 @@
                 </a:tc>
                 <a:tc>
                   <a:txBody>
-                    <a:bodyPr wrap="square"/>
+                    <a:bodyPr/>
                     <a:lstStyle/>
                     <a:p>
                       <a:r>
@@ -6962,7 +7063,7 @@
                 </a:tc>
                 <a:tc>
                   <a:txBody>
-                    <a:bodyPr wrap="square"/>
+                    <a:bodyPr/>
                     <a:lstStyle/>
                     <a:p>
                       <a:r>
@@ -6984,7 +7085,7 @@
                 </a:tc>
                 <a:tc>
                   <a:txBody>
-                    <a:bodyPr wrap="square"/>
+                    <a:bodyPr/>
                     <a:lstStyle/>
                     <a:p>
                       <a:r>
@@ -7004,11 +7105,16 @@
                     </a:solidFill>
                   </a:tcPr>
                 </a:tc>
+                <a:extLst>
+                  <a:ext uri="{0D108BD9-81ED-4DB2-BD59-A6C34878D82A}">
+                    <a16:rowId xmlns:a16="http://schemas.microsoft.com/office/drawing/2014/main" val="10000"/>
+                  </a:ext>
+                </a:extLst>
               </a:tr>
               <a:tr h="457200">
                 <a:tc>
                   <a:txBody>
-                    <a:bodyPr wrap="square"/>
+                    <a:bodyPr/>
                     <a:lstStyle/>
                     <a:p>
                       <a:r>
@@ -7030,7 +7136,7 @@
                 </a:tc>
                 <a:tc>
                   <a:txBody>
-                    <a:bodyPr wrap="square"/>
+                    <a:bodyPr/>
                     <a:lstStyle/>
                     <a:p>
                       <a:r>
@@ -7052,7 +7158,7 @@
                 </a:tc>
                 <a:tc>
                   <a:txBody>
-                    <a:bodyPr wrap="square"/>
+                    <a:bodyPr/>
                     <a:lstStyle/>
                     <a:p>
                       <a:r>
@@ -7074,7 +7180,7 @@
                 </a:tc>
                 <a:tc>
                   <a:txBody>
-                    <a:bodyPr wrap="square"/>
+                    <a:bodyPr/>
                     <a:lstStyle/>
                     <a:p>
                       <a:r>
@@ -7096,7 +7202,7 @@
                 </a:tc>
                 <a:tc>
                   <a:txBody>
-                    <a:bodyPr wrap="square"/>
+                    <a:bodyPr/>
                     <a:lstStyle/>
                     <a:p>
                       <a:r>
@@ -7116,11 +7222,16 @@
                     </a:solidFill>
                   </a:tcPr>
                 </a:tc>
+                <a:extLst>
+                  <a:ext uri="{0D108BD9-81ED-4DB2-BD59-A6C34878D82A}">
+                    <a16:rowId xmlns:a16="http://schemas.microsoft.com/office/drawing/2014/main" val="10001"/>
+                  </a:ext>
+                </a:extLst>
               </a:tr>
               <a:tr h="457200">
                 <a:tc>
                   <a:txBody>
-                    <a:bodyPr wrap="square"/>
+                    <a:bodyPr/>
                     <a:lstStyle/>
                     <a:p>
                       <a:r>
@@ -7142,7 +7253,7 @@
                 </a:tc>
                 <a:tc>
                   <a:txBody>
-                    <a:bodyPr wrap="square"/>
+                    <a:bodyPr/>
                     <a:lstStyle/>
                     <a:p>
                       <a:r>
@@ -7164,7 +7275,7 @@
                 </a:tc>
                 <a:tc>
                   <a:txBody>
-                    <a:bodyPr wrap="square"/>
+                    <a:bodyPr/>
                     <a:lstStyle/>
                     <a:p>
                       <a:r>
@@ -7186,7 +7297,7 @@
                 </a:tc>
                 <a:tc>
                   <a:txBody>
-                    <a:bodyPr wrap="square"/>
+                    <a:bodyPr/>
                     <a:lstStyle/>
                     <a:p>
                       <a:r>
@@ -7208,7 +7319,7 @@
                 </a:tc>
                 <a:tc>
                   <a:txBody>
-                    <a:bodyPr wrap="square"/>
+                    <a:bodyPr/>
                     <a:lstStyle/>
                     <a:p>
                       <a:r>
@@ -7228,11 +7339,16 @@
                     </a:solidFill>
                   </a:tcPr>
                 </a:tc>
+                <a:extLst>
+                  <a:ext uri="{0D108BD9-81ED-4DB2-BD59-A6C34878D82A}">
+                    <a16:rowId xmlns:a16="http://schemas.microsoft.com/office/drawing/2014/main" val="10002"/>
+                  </a:ext>
+                </a:extLst>
               </a:tr>
               <a:tr h="457200">
                 <a:tc>
                   <a:txBody>
-                    <a:bodyPr wrap="square"/>
+                    <a:bodyPr/>
                     <a:lstStyle/>
                     <a:p>
                       <a:r>
@@ -7254,7 +7370,7 @@
                 </a:tc>
                 <a:tc>
                   <a:txBody>
-                    <a:bodyPr wrap="square"/>
+                    <a:bodyPr/>
                     <a:lstStyle/>
                     <a:p>
                       <a:r>
@@ -7276,7 +7392,7 @@
                 </a:tc>
                 <a:tc>
                   <a:txBody>
-                    <a:bodyPr wrap="square"/>
+                    <a:bodyPr/>
                     <a:lstStyle/>
                     <a:p>
                       <a:r>
@@ -7298,7 +7414,7 @@
                 </a:tc>
                 <a:tc>
                   <a:txBody>
-                    <a:bodyPr wrap="square"/>
+                    <a:bodyPr/>
                     <a:lstStyle/>
                     <a:p>
                       <a:r>
@@ -7320,7 +7436,7 @@
                 </a:tc>
                 <a:tc>
                   <a:txBody>
-                    <a:bodyPr wrap="square"/>
+                    <a:bodyPr/>
                     <a:lstStyle/>
                     <a:p>
                       <a:r>
@@ -7340,11 +7456,16 @@
                     </a:solidFill>
                   </a:tcPr>
                 </a:tc>
+                <a:extLst>
+                  <a:ext uri="{0D108BD9-81ED-4DB2-BD59-A6C34878D82A}">
+                    <a16:rowId xmlns:a16="http://schemas.microsoft.com/office/drawing/2014/main" val="10003"/>
+                  </a:ext>
+                </a:extLst>
               </a:tr>
               <a:tr h="457200">
                 <a:tc>
                   <a:txBody>
-                    <a:bodyPr wrap="square"/>
+                    <a:bodyPr/>
                     <a:lstStyle/>
                     <a:p>
                       <a:r>
@@ -7366,7 +7487,7 @@
                 </a:tc>
                 <a:tc>
                   <a:txBody>
-                    <a:bodyPr wrap="square"/>
+                    <a:bodyPr/>
                     <a:lstStyle/>
                     <a:p>
                       <a:r>
@@ -7388,7 +7509,7 @@
                 </a:tc>
                 <a:tc>
                   <a:txBody>
-                    <a:bodyPr wrap="square"/>
+                    <a:bodyPr/>
                     <a:lstStyle/>
                     <a:p>
                       <a:r>
@@ -7410,7 +7531,7 @@
                 </a:tc>
                 <a:tc>
                   <a:txBody>
-                    <a:bodyPr wrap="square"/>
+                    <a:bodyPr/>
                     <a:lstStyle/>
                     <a:p>
                       <a:r>
@@ -7432,7 +7553,7 @@
                 </a:tc>
                 <a:tc>
                   <a:txBody>
-                    <a:bodyPr wrap="square"/>
+                    <a:bodyPr/>
                     <a:lstStyle/>
                     <a:p>
                       <a:r>
@@ -7452,11 +7573,16 @@
                     </a:solidFill>
                   </a:tcPr>
                 </a:tc>
+                <a:extLst>
+                  <a:ext uri="{0D108BD9-81ED-4DB2-BD59-A6C34878D82A}">
+                    <a16:rowId xmlns:a16="http://schemas.microsoft.com/office/drawing/2014/main" val="10004"/>
+                  </a:ext>
+                </a:extLst>
               </a:tr>
               <a:tr h="457200">
                 <a:tc>
                   <a:txBody>
-                    <a:bodyPr wrap="square"/>
+                    <a:bodyPr/>
                     <a:lstStyle/>
                     <a:p>
                       <a:r>
@@ -7478,7 +7604,7 @@
                 </a:tc>
                 <a:tc>
                   <a:txBody>
-                    <a:bodyPr wrap="square"/>
+                    <a:bodyPr/>
                     <a:lstStyle/>
                     <a:p>
                       <a:r>
@@ -7500,7 +7626,7 @@
                 </a:tc>
                 <a:tc>
                   <a:txBody>
-                    <a:bodyPr wrap="square"/>
+                    <a:bodyPr/>
                     <a:lstStyle/>
                     <a:p>
                       <a:r>
@@ -7522,7 +7648,7 @@
                 </a:tc>
                 <a:tc>
                   <a:txBody>
-                    <a:bodyPr wrap="square"/>
+                    <a:bodyPr/>
                     <a:lstStyle/>
                     <a:p>
                       <a:r>
@@ -7544,7 +7670,7 @@
                 </a:tc>
                 <a:tc>
                   <a:txBody>
-                    <a:bodyPr wrap="square"/>
+                    <a:bodyPr/>
                     <a:lstStyle/>
                     <a:p>
                       <a:r>
@@ -7564,11 +7690,16 @@
                     </a:solidFill>
                   </a:tcPr>
                 </a:tc>
+                <a:extLst>
+                  <a:ext uri="{0D108BD9-81ED-4DB2-BD59-A6C34878D82A}">
+                    <a16:rowId xmlns:a16="http://schemas.microsoft.com/office/drawing/2014/main" val="10005"/>
+                  </a:ext>
+                </a:extLst>
               </a:tr>
               <a:tr h="457200">
                 <a:tc>
                   <a:txBody>
-                    <a:bodyPr wrap="square"/>
+                    <a:bodyPr/>
                     <a:lstStyle/>
                     <a:p>
                       <a:r>
@@ -7590,7 +7721,7 @@
                 </a:tc>
                 <a:tc>
                   <a:txBody>
-                    <a:bodyPr wrap="square"/>
+                    <a:bodyPr/>
                     <a:lstStyle/>
                     <a:p>
                       <a:r>
@@ -7612,7 +7743,7 @@
                 </a:tc>
                 <a:tc>
                   <a:txBody>
-                    <a:bodyPr wrap="square"/>
+                    <a:bodyPr/>
                     <a:lstStyle/>
                     <a:p>
                       <a:r>
@@ -7634,7 +7765,7 @@
                 </a:tc>
                 <a:tc>
                   <a:txBody>
-                    <a:bodyPr wrap="square"/>
+                    <a:bodyPr/>
                     <a:lstStyle/>
                     <a:p>
                       <a:r>
@@ -7656,7 +7787,7 @@
                 </a:tc>
                 <a:tc>
                   <a:txBody>
-                    <a:bodyPr wrap="square"/>
+                    <a:bodyPr/>
                     <a:lstStyle/>
                     <a:p>
                       <a:r>
@@ -7676,11 +7807,16 @@
                     </a:solidFill>
                   </a:tcPr>
                 </a:tc>
+                <a:extLst>
+                  <a:ext uri="{0D108BD9-81ED-4DB2-BD59-A6C34878D82A}">
+                    <a16:rowId xmlns:a16="http://schemas.microsoft.com/office/drawing/2014/main" val="10006"/>
+                  </a:ext>
+                </a:extLst>
               </a:tr>
               <a:tr h="457200">
                 <a:tc>
                   <a:txBody>
-                    <a:bodyPr wrap="square"/>
+                    <a:bodyPr/>
                     <a:lstStyle/>
                     <a:p>
                       <a:r>
@@ -7702,7 +7838,7 @@
                 </a:tc>
                 <a:tc>
                   <a:txBody>
-                    <a:bodyPr wrap="square"/>
+                    <a:bodyPr/>
                     <a:lstStyle/>
                     <a:p>
                       <a:r>
@@ -7724,7 +7860,7 @@
                 </a:tc>
                 <a:tc>
                   <a:txBody>
-                    <a:bodyPr wrap="square"/>
+                    <a:bodyPr/>
                     <a:lstStyle/>
                     <a:p>
                       <a:r>
@@ -7746,7 +7882,7 @@
                 </a:tc>
                 <a:tc>
                   <a:txBody>
-                    <a:bodyPr wrap="square"/>
+                    <a:bodyPr/>
                     <a:lstStyle/>
                     <a:p>
                       <a:r>
@@ -7768,7 +7904,7 @@
                 </a:tc>
                 <a:tc>
                   <a:txBody>
-                    <a:bodyPr wrap="square"/>
+                    <a:bodyPr/>
                     <a:lstStyle/>
                     <a:p>
                       <a:r>
@@ -7788,11 +7924,16 @@
                     </a:solidFill>
                   </a:tcPr>
                 </a:tc>
+                <a:extLst>
+                  <a:ext uri="{0D108BD9-81ED-4DB2-BD59-A6C34878D82A}">
+                    <a16:rowId xmlns:a16="http://schemas.microsoft.com/office/drawing/2014/main" val="10007"/>
+                  </a:ext>
+                </a:extLst>
               </a:tr>
               <a:tr h="457200">
                 <a:tc>
                   <a:txBody>
-                    <a:bodyPr wrap="square"/>
+                    <a:bodyPr/>
                     <a:lstStyle/>
                     <a:p>
                       <a:r>
@@ -7814,7 +7955,7 @@
                 </a:tc>
                 <a:tc>
                   <a:txBody>
-                    <a:bodyPr wrap="square"/>
+                    <a:bodyPr/>
                     <a:lstStyle/>
                     <a:p>
                       <a:r>
@@ -7836,7 +7977,7 @@
                 </a:tc>
                 <a:tc>
                   <a:txBody>
-                    <a:bodyPr wrap="square"/>
+                    <a:bodyPr/>
                     <a:lstStyle/>
                     <a:p>
                       <a:r>
@@ -7858,7 +7999,7 @@
                 </a:tc>
                 <a:tc>
                   <a:txBody>
-                    <a:bodyPr wrap="square"/>
+                    <a:bodyPr/>
                     <a:lstStyle/>
                     <a:p>
                       <a:r>
@@ -7880,7 +8021,7 @@
                 </a:tc>
                 <a:tc>
                   <a:txBody>
-                    <a:bodyPr wrap="square"/>
+                    <a:bodyPr/>
                     <a:lstStyle/>
                     <a:p>
                       <a:r>
@@ -7900,6 +8041,11 @@
                     </a:solidFill>
                   </a:tcPr>
                 </a:tc>
+                <a:extLst>
+                  <a:ext uri="{0D108BD9-81ED-4DB2-BD59-A6C34878D82A}">
+                    <a16:rowId xmlns:a16="http://schemas.microsoft.com/office/drawing/2014/main" val="10008"/>
+                  </a:ext>
+                </a:extLst>
               </a:tr>
             </a:tbl>
           </a:graphicData>
@@ -7914,7 +8060,7 @@
 </file>
 
 <file path=ppt/slides/slide13.xml><?xml version="1.0" encoding="utf-8"?>
-<p:sld xmlns:a="http://schemas.openxmlformats.org/drawingml/2006/main" xmlns:p="http://schemas.openxmlformats.org/presentationml/2006/main" xmlns:r="http://schemas.openxmlformats.org/officeDocument/2006/relationships">
+<p:sld xmlns:a="http://schemas.openxmlformats.org/drawingml/2006/main" xmlns:r="http://schemas.openxmlformats.org/officeDocument/2006/relationships" xmlns:p="http://schemas.openxmlformats.org/presentationml/2006/main">
   <p:cSld>
     <p:spTree>
       <p:nvGrpSpPr>
@@ -7922,7 +8068,14 @@
         <p:cNvGrpSpPr/>
         <p:nvPr/>
       </p:nvGrpSpPr>
-      <p:grpSpPr/>
+      <p:grpSpPr>
+        <a:xfrm>
+          <a:off x="0" y="0"/>
+          <a:ext cx="0" cy="0"/>
+          <a:chOff x="0" y="0"/>
+          <a:chExt cx="0" cy="0"/>
+        </a:xfrm>
+      </p:grpSpPr>
       <p:sp>
         <p:nvSpPr>
           <p:cNvPr id="2" name="TextBox 1"/>
@@ -7940,7 +8093,7 @@
           <a:noFill/>
         </p:spPr>
         <p:txBody>
-          <a:bodyPr wrap="square" anchor="t" lIns="45720" rIns="45720">
+          <a:bodyPr wrap="square" lIns="45720" rIns="45720" anchor="t">
             <a:spAutoFit/>
           </a:bodyPr>
           <a:lstStyle/>
@@ -7975,7 +8128,7 @@
           <a:noFill/>
         </p:spPr>
         <p:txBody>
-          <a:bodyPr wrap="square" anchor="ctr" lIns="45720" rIns="45720">
+          <a:bodyPr wrap="square" lIns="45720" rIns="45720" anchor="ctr">
             <a:spAutoFit/>
           </a:bodyPr>
           <a:lstStyle/>
@@ -8010,7 +8163,7 @@
           <a:noFill/>
         </p:spPr>
         <p:txBody>
-          <a:bodyPr wrap="square" anchor="t" lIns="45720" rIns="45720">
+          <a:bodyPr wrap="square" lIns="45720" rIns="45720" anchor="t">
             <a:spAutoFit/>
           </a:bodyPr>
           <a:lstStyle/>
@@ -8045,7 +8198,7 @@
           <a:noFill/>
         </p:spPr>
         <p:txBody>
-          <a:bodyPr wrap="square" anchor="t" lIns="45720" rIns="45720">
+          <a:bodyPr wrap="square" lIns="45720" rIns="45720" anchor="t">
             <a:spAutoFit/>
           </a:bodyPr>
           <a:lstStyle/>
@@ -8104,7 +8257,9 @@
         <p:txBody>
           <a:bodyPr rtlCol="0" anchor="ctr"/>
           <a:lstStyle/>
-          <a:p/>
+          <a:p>
+            <a:endParaRPr/>
+          </a:p>
         </p:txBody>
       </p:sp>
       <p:sp>
@@ -8144,7 +8299,7 @@
           </a:fontRef>
         </p:style>
         <p:txBody>
-          <a:bodyPr rtlCol="0" anchor="ctr" lIns="0" rIns="0" tIns="0" bIns="0"/>
+          <a:bodyPr lIns="0" tIns="0" rIns="0" bIns="0" rtlCol="0" anchor="ctr"/>
           <a:lstStyle/>
           <a:p>
             <a:pPr algn="ctr"/>
@@ -8177,7 +8332,7 @@
           <a:noFill/>
         </p:spPr>
         <p:txBody>
-          <a:bodyPr wrap="square" anchor="ctr" lIns="45720" rIns="45720">
+          <a:bodyPr wrap="square" lIns="45720" rIns="45720" anchor="ctr">
             <a:spAutoFit/>
           </a:bodyPr>
           <a:lstStyle/>
@@ -8212,7 +8367,7 @@
           <a:noFill/>
         </p:spPr>
         <p:txBody>
-          <a:bodyPr wrap="square" anchor="t" lIns="45720" rIns="45720">
+          <a:bodyPr wrap="square" lIns="45720" rIns="45720" anchor="t">
             <a:spAutoFit/>
           </a:bodyPr>
           <a:lstStyle/>
@@ -8271,7 +8426,9 @@
         <p:txBody>
           <a:bodyPr rtlCol="0" anchor="ctr"/>
           <a:lstStyle/>
-          <a:p/>
+          <a:p>
+            <a:endParaRPr/>
+          </a:p>
         </p:txBody>
       </p:sp>
       <p:sp>
@@ -8311,7 +8468,7 @@
           </a:fontRef>
         </p:style>
         <p:txBody>
-          <a:bodyPr rtlCol="0" anchor="ctr" lIns="0" rIns="0" tIns="0" bIns="0"/>
+          <a:bodyPr lIns="0" tIns="0" rIns="0" bIns="0" rtlCol="0" anchor="ctr"/>
           <a:lstStyle/>
           <a:p>
             <a:pPr algn="ctr"/>
@@ -8344,7 +8501,7 @@
           <a:noFill/>
         </p:spPr>
         <p:txBody>
-          <a:bodyPr wrap="square" anchor="ctr" lIns="45720" rIns="45720">
+          <a:bodyPr wrap="square" lIns="45720" rIns="45720" anchor="ctr">
             <a:spAutoFit/>
           </a:bodyPr>
           <a:lstStyle/>
@@ -8379,7 +8536,7 @@
           <a:noFill/>
         </p:spPr>
         <p:txBody>
-          <a:bodyPr wrap="square" anchor="t" lIns="45720" rIns="45720">
+          <a:bodyPr wrap="square" lIns="45720" rIns="45720" anchor="t">
             <a:spAutoFit/>
           </a:bodyPr>
           <a:lstStyle/>
@@ -8438,7 +8595,9 @@
         <p:txBody>
           <a:bodyPr rtlCol="0" anchor="ctr"/>
           <a:lstStyle/>
-          <a:p/>
+          <a:p>
+            <a:endParaRPr/>
+          </a:p>
         </p:txBody>
       </p:sp>
       <p:sp>
@@ -8478,7 +8637,7 @@
           </a:fontRef>
         </p:style>
         <p:txBody>
-          <a:bodyPr rtlCol="0" anchor="ctr" lIns="0" rIns="0" tIns="0" bIns="0"/>
+          <a:bodyPr lIns="0" tIns="0" rIns="0" bIns="0" rtlCol="0" anchor="ctr"/>
           <a:lstStyle/>
           <a:p>
             <a:pPr algn="ctr"/>
@@ -8511,7 +8670,7 @@
           <a:noFill/>
         </p:spPr>
         <p:txBody>
-          <a:bodyPr wrap="square" anchor="ctr" lIns="45720" rIns="45720">
+          <a:bodyPr wrap="square" lIns="45720" rIns="45720" anchor="ctr">
             <a:spAutoFit/>
           </a:bodyPr>
           <a:lstStyle/>
@@ -8546,7 +8705,7 @@
           <a:noFill/>
         </p:spPr>
         <p:txBody>
-          <a:bodyPr wrap="square" anchor="t" lIns="45720" rIns="45720">
+          <a:bodyPr wrap="square" lIns="45720" rIns="45720" anchor="t">
             <a:spAutoFit/>
           </a:bodyPr>
           <a:lstStyle/>
@@ -8605,7 +8764,9 @@
         <p:txBody>
           <a:bodyPr rtlCol="0" anchor="ctr"/>
           <a:lstStyle/>
-          <a:p/>
+          <a:p>
+            <a:endParaRPr/>
+          </a:p>
         </p:txBody>
       </p:sp>
       <p:sp>
@@ -8625,7 +8786,7 @@
           <a:noFill/>
         </p:spPr>
         <p:txBody>
-          <a:bodyPr wrap="square" anchor="ctr" lIns="45720" rIns="45720">
+          <a:bodyPr wrap="square" lIns="45720" rIns="45720" anchor="ctr">
             <a:spAutoFit/>
           </a:bodyPr>
           <a:lstStyle/>
@@ -8792,7 +8953,9 @@
         <p:txBody>
           <a:bodyPr rtlCol="0" anchor="ctr"/>
           <a:lstStyle/>
-          <a:p/>
+          <a:p>
+            <a:endParaRPr/>
+          </a:p>
         </p:txBody>
       </p:sp>
       <p:sp>
@@ -8812,7 +8975,7 @@
           <a:noFill/>
         </p:spPr>
         <p:txBody>
-          <a:bodyPr wrap="square" anchor="ctr" lIns="45720" rIns="45720">
+          <a:bodyPr wrap="square" lIns="45720" rIns="45720" anchor="ctr">
             <a:spAutoFit/>
           </a:bodyPr>
           <a:lstStyle/>
@@ -8966,7 +9129,7 @@
 </file>
 
 <file path=ppt/slides/slide14.xml><?xml version="1.0" encoding="utf-8"?>
-<p:sld xmlns:a="http://schemas.openxmlformats.org/drawingml/2006/main" xmlns:p="http://schemas.openxmlformats.org/presentationml/2006/main" xmlns:r="http://schemas.openxmlformats.org/officeDocument/2006/relationships">
+<p:sld xmlns:a="http://schemas.openxmlformats.org/drawingml/2006/main" xmlns:r="http://schemas.openxmlformats.org/officeDocument/2006/relationships" xmlns:p="http://schemas.openxmlformats.org/presentationml/2006/main">
   <p:cSld>
     <p:spTree>
       <p:nvGrpSpPr>
@@ -8974,7 +9137,14 @@
         <p:cNvGrpSpPr/>
         <p:nvPr/>
       </p:nvGrpSpPr>
-      <p:grpSpPr/>
+      <p:grpSpPr>
+        <a:xfrm>
+          <a:off x="0" y="0"/>
+          <a:ext cx="0" cy="0"/>
+          <a:chOff x="0" y="0"/>
+          <a:chExt cx="0" cy="0"/>
+        </a:xfrm>
+      </p:grpSpPr>
       <p:sp>
         <p:nvSpPr>
           <p:cNvPr id="2" name="TextBox 1"/>
@@ -8992,7 +9162,7 @@
           <a:noFill/>
         </p:spPr>
         <p:txBody>
-          <a:bodyPr wrap="square" anchor="t" lIns="45720" rIns="45720">
+          <a:bodyPr wrap="square" lIns="45720" rIns="45720" anchor="t">
             <a:spAutoFit/>
           </a:bodyPr>
           <a:lstStyle/>
@@ -9027,7 +9197,7 @@
           <a:noFill/>
         </p:spPr>
         <p:txBody>
-          <a:bodyPr wrap="square" anchor="ctr" lIns="45720" rIns="45720">
+          <a:bodyPr wrap="square" lIns="45720" rIns="45720" anchor="ctr">
             <a:spAutoFit/>
           </a:bodyPr>
           <a:lstStyle/>
@@ -9062,7 +9232,7 @@
           <a:noFill/>
         </p:spPr>
         <p:txBody>
-          <a:bodyPr wrap="square" anchor="t" lIns="45720" rIns="45720">
+          <a:bodyPr wrap="square" lIns="45720" rIns="45720" anchor="t">
             <a:spAutoFit/>
           </a:bodyPr>
           <a:lstStyle/>
@@ -9097,7 +9267,7 @@
           <a:noFill/>
         </p:spPr>
         <p:txBody>
-          <a:bodyPr wrap="square" anchor="t" lIns="45720" rIns="45720">
+          <a:bodyPr wrap="square" lIns="45720" rIns="45720" anchor="t">
             <a:spAutoFit/>
           </a:bodyPr>
           <a:lstStyle/>
@@ -9156,7 +9326,9 @@
         <p:txBody>
           <a:bodyPr rtlCol="0" anchor="ctr"/>
           <a:lstStyle/>
-          <a:p/>
+          <a:p>
+            <a:endParaRPr/>
+          </a:p>
         </p:txBody>
       </p:sp>
       <p:sp>
@@ -9196,7 +9368,7 @@
           </a:fontRef>
         </p:style>
         <p:txBody>
-          <a:bodyPr rtlCol="0" anchor="ctr" lIns="0" rIns="0" tIns="0" bIns="0"/>
+          <a:bodyPr lIns="0" tIns="0" rIns="0" bIns="0" rtlCol="0" anchor="ctr"/>
           <a:lstStyle/>
           <a:p>
             <a:pPr algn="ctr"/>
@@ -9229,7 +9401,7 @@
           <a:noFill/>
         </p:spPr>
         <p:txBody>
-          <a:bodyPr wrap="square" anchor="ctr" lIns="45720" rIns="45720">
+          <a:bodyPr wrap="square" lIns="45720" rIns="45720" anchor="ctr">
             <a:spAutoFit/>
           </a:bodyPr>
           <a:lstStyle/>
@@ -9264,7 +9436,7 @@
           <a:noFill/>
         </p:spPr>
         <p:txBody>
-          <a:bodyPr wrap="square" anchor="t" lIns="45720" rIns="45720">
+          <a:bodyPr wrap="square" lIns="45720" rIns="45720" anchor="t">
             <a:spAutoFit/>
           </a:bodyPr>
           <a:lstStyle/>
@@ -9397,7 +9569,9 @@
         <p:txBody>
           <a:bodyPr rtlCol="0" anchor="ctr"/>
           <a:lstStyle/>
-          <a:p/>
+          <a:p>
+            <a:endParaRPr/>
+          </a:p>
         </p:txBody>
       </p:sp>
       <p:sp>
@@ -9437,7 +9611,7 @@
           </a:fontRef>
         </p:style>
         <p:txBody>
-          <a:bodyPr rtlCol="0" anchor="ctr" lIns="0" rIns="0" tIns="0" bIns="0"/>
+          <a:bodyPr lIns="0" tIns="0" rIns="0" bIns="0" rtlCol="0" anchor="ctr"/>
           <a:lstStyle/>
           <a:p>
             <a:pPr algn="ctr"/>
@@ -9470,7 +9644,7 @@
           <a:noFill/>
         </p:spPr>
         <p:txBody>
-          <a:bodyPr wrap="square" anchor="ctr" lIns="45720" rIns="45720">
+          <a:bodyPr wrap="square" lIns="45720" rIns="45720" anchor="ctr">
             <a:spAutoFit/>
           </a:bodyPr>
           <a:lstStyle/>
@@ -9505,7 +9679,7 @@
           <a:noFill/>
         </p:spPr>
         <p:txBody>
-          <a:bodyPr wrap="square" anchor="t" lIns="45720" rIns="45720">
+          <a:bodyPr wrap="square" lIns="45720" rIns="45720" anchor="t">
             <a:spAutoFit/>
           </a:bodyPr>
           <a:lstStyle/>
@@ -9638,7 +9812,9 @@
         <p:txBody>
           <a:bodyPr rtlCol="0" anchor="ctr"/>
           <a:lstStyle/>
-          <a:p/>
+          <a:p>
+            <a:endParaRPr/>
+          </a:p>
         </p:txBody>
       </p:sp>
       <p:sp>
@@ -9678,7 +9854,7 @@
           </a:fontRef>
         </p:style>
         <p:txBody>
-          <a:bodyPr rtlCol="0" anchor="ctr" lIns="0" rIns="0" tIns="0" bIns="0"/>
+          <a:bodyPr lIns="0" tIns="0" rIns="0" bIns="0" rtlCol="0" anchor="ctr"/>
           <a:lstStyle/>
           <a:p>
             <a:pPr algn="ctr"/>
@@ -9711,7 +9887,7 @@
           <a:noFill/>
         </p:spPr>
         <p:txBody>
-          <a:bodyPr wrap="square" anchor="ctr" lIns="45720" rIns="45720">
+          <a:bodyPr wrap="square" lIns="45720" rIns="45720" anchor="ctr">
             <a:spAutoFit/>
           </a:bodyPr>
           <a:lstStyle/>
@@ -9746,7 +9922,7 @@
           <a:noFill/>
         </p:spPr>
         <p:txBody>
-          <a:bodyPr wrap="square" anchor="t" lIns="45720" rIns="45720">
+          <a:bodyPr wrap="square" lIns="45720" rIns="45720" anchor="t">
             <a:spAutoFit/>
           </a:bodyPr>
           <a:lstStyle/>
@@ -9877,7 +10053,7 @@
           </a:fontRef>
         </p:style>
         <p:txBody>
-          <a:bodyPr rtlCol="0" anchor="ctr" wrap="square" lIns="73152" rIns="73152"/>
+          <a:bodyPr wrap="square" lIns="73152" rIns="73152" rtlCol="0" anchor="ctr"/>
           <a:lstStyle/>
           <a:p>
             <a:pPr algn="ctr"/>
@@ -9946,6 +10122,7 @@
           <a:lstStyle/>
           <a:p>
             <a:pPr algn="ctr"/>
+            <a:endParaRPr/>
           </a:p>
         </p:txBody>
       </p:sp>
@@ -9988,7 +10165,7 @@
           </a:fontRef>
         </p:style>
         <p:txBody>
-          <a:bodyPr rtlCol="0" anchor="ctr" wrap="square" lIns="73152" rIns="73152"/>
+          <a:bodyPr wrap="square" lIns="73152" rIns="73152" rtlCol="0" anchor="ctr"/>
           <a:lstStyle/>
           <a:p>
             <a:pPr algn="ctr"/>
@@ -10057,6 +10234,7 @@
           <a:lstStyle/>
           <a:p>
             <a:pPr algn="ctr"/>
+            <a:endParaRPr/>
           </a:p>
         </p:txBody>
       </p:sp>
@@ -10099,7 +10277,7 @@
           </a:fontRef>
         </p:style>
         <p:txBody>
-          <a:bodyPr rtlCol="0" anchor="ctr" wrap="square" lIns="73152" rIns="73152"/>
+          <a:bodyPr wrap="square" lIns="73152" rIns="73152" rtlCol="0" anchor="ctr"/>
           <a:lstStyle/>
           <a:p>
             <a:pPr algn="ctr"/>
@@ -10168,6 +10346,7 @@
           <a:lstStyle/>
           <a:p>
             <a:pPr algn="ctr"/>
+            <a:endParaRPr/>
           </a:p>
         </p:txBody>
       </p:sp>
@@ -10210,7 +10389,7 @@
           </a:fontRef>
         </p:style>
         <p:txBody>
-          <a:bodyPr rtlCol="0" anchor="ctr" wrap="square" lIns="73152" rIns="73152"/>
+          <a:bodyPr wrap="square" lIns="73152" rIns="73152" rtlCol="0" anchor="ctr"/>
           <a:lstStyle/>
           <a:p>
             <a:pPr algn="ctr"/>
@@ -10247,7 +10426,7 @@
 </file>
 
 <file path=ppt/slides/slide15.xml><?xml version="1.0" encoding="utf-8"?>
-<p:sld xmlns:a="http://schemas.openxmlformats.org/drawingml/2006/main" xmlns:p="http://schemas.openxmlformats.org/presentationml/2006/main" xmlns:r="http://schemas.openxmlformats.org/officeDocument/2006/relationships">
+<p:sld xmlns:a="http://schemas.openxmlformats.org/drawingml/2006/main" xmlns:r="http://schemas.openxmlformats.org/officeDocument/2006/relationships" xmlns:p="http://schemas.openxmlformats.org/presentationml/2006/main">
   <p:cSld>
     <p:spTree>
       <p:nvGrpSpPr>
@@ -10255,7 +10434,14 @@
         <p:cNvGrpSpPr/>
         <p:nvPr/>
       </p:nvGrpSpPr>
-      <p:grpSpPr/>
+      <p:grpSpPr>
+        <a:xfrm>
+          <a:off x="0" y="0"/>
+          <a:ext cx="0" cy="0"/>
+          <a:chOff x="0" y="0"/>
+          <a:chExt cx="0" cy="0"/>
+        </a:xfrm>
+      </p:grpSpPr>
       <p:sp>
         <p:nvSpPr>
           <p:cNvPr id="2" name="TextBox 1"/>
@@ -10273,7 +10459,7 @@
           <a:noFill/>
         </p:spPr>
         <p:txBody>
-          <a:bodyPr wrap="square" anchor="t" lIns="45720" rIns="45720">
+          <a:bodyPr wrap="square" lIns="45720" rIns="45720" anchor="t">
             <a:spAutoFit/>
           </a:bodyPr>
           <a:lstStyle/>
@@ -10308,7 +10494,7 @@
           <a:noFill/>
         </p:spPr>
         <p:txBody>
-          <a:bodyPr wrap="square" anchor="ctr" lIns="45720" rIns="45720">
+          <a:bodyPr wrap="square" lIns="45720" rIns="45720" anchor="ctr">
             <a:spAutoFit/>
           </a:bodyPr>
           <a:lstStyle/>
@@ -10343,7 +10529,7 @@
           <a:noFill/>
         </p:spPr>
         <p:txBody>
-          <a:bodyPr wrap="square" anchor="t" lIns="45720" rIns="45720">
+          <a:bodyPr wrap="square" lIns="45720" rIns="45720" anchor="t">
             <a:spAutoFit/>
           </a:bodyPr>
           <a:lstStyle/>
@@ -10378,7 +10564,7 @@
           <a:noFill/>
         </p:spPr>
         <p:txBody>
-          <a:bodyPr wrap="square" anchor="t" lIns="45720" rIns="45720">
+          <a:bodyPr wrap="square" lIns="45720" rIns="45720" anchor="t">
             <a:spAutoFit/>
           </a:bodyPr>
           <a:lstStyle/>
@@ -10435,7 +10621,7 @@
           </a:fontRef>
         </p:style>
         <p:txBody>
-          <a:bodyPr rtlCol="0" anchor="ctr" wrap="square" lIns="73152" rIns="73152"/>
+          <a:bodyPr wrap="square" lIns="73152" rIns="73152" rtlCol="0" anchor="ctr"/>
           <a:lstStyle/>
           <a:p>
             <a:pPr algn="ctr"/>
@@ -10504,6 +10690,7 @@
           <a:lstStyle/>
           <a:p>
             <a:pPr algn="ctr"/>
+            <a:endParaRPr/>
           </a:p>
         </p:txBody>
       </p:sp>
@@ -10546,7 +10733,7 @@
           </a:fontRef>
         </p:style>
         <p:txBody>
-          <a:bodyPr rtlCol="0" anchor="ctr" wrap="square" lIns="73152" rIns="73152"/>
+          <a:bodyPr wrap="square" lIns="73152" rIns="73152" rtlCol="0" anchor="ctr"/>
           <a:lstStyle/>
           <a:p>
             <a:pPr algn="ctr"/>
@@ -10615,6 +10802,7 @@
           <a:lstStyle/>
           <a:p>
             <a:pPr algn="ctr"/>
+            <a:endParaRPr/>
           </a:p>
         </p:txBody>
       </p:sp>
@@ -10657,7 +10845,7 @@
           </a:fontRef>
         </p:style>
         <p:txBody>
-          <a:bodyPr rtlCol="0" anchor="ctr" wrap="square" lIns="73152" rIns="73152"/>
+          <a:bodyPr wrap="square" lIns="73152" rIns="73152" rtlCol="0" anchor="ctr"/>
           <a:lstStyle/>
           <a:p>
             <a:pPr algn="ctr"/>
@@ -10726,6 +10914,7 @@
           <a:lstStyle/>
           <a:p>
             <a:pPr algn="ctr"/>
+            <a:endParaRPr/>
           </a:p>
         </p:txBody>
       </p:sp>
@@ -10768,7 +10957,7 @@
           </a:fontRef>
         </p:style>
         <p:txBody>
-          <a:bodyPr rtlCol="0" anchor="ctr" wrap="square" lIns="73152" rIns="73152"/>
+          <a:bodyPr wrap="square" lIns="73152" rIns="73152" rtlCol="0" anchor="ctr"/>
           <a:lstStyle/>
           <a:p>
             <a:pPr algn="ctr"/>
@@ -10811,18 +11000,36 @@
         <a:graphic>
           <a:graphicData uri="http://schemas.openxmlformats.org/drawingml/2006/table">
             <a:tbl>
-              <a:tblPr firstRow="0" bandRow="0">
+              <a:tblPr>
                 <a:tableStyleId>{5C22544A-7EE6-4342-B048-85BDC9FD1C3A}</a:tableStyleId>
               </a:tblPr>
               <a:tblGrid>
-                <a:gridCol w="2011680"/>
-                <a:gridCol w="2377440"/>
-                <a:gridCol w="6675120"/>
+                <a:gridCol w="2011680">
+                  <a:extLst>
+                    <a:ext uri="{9D8B030D-6E8A-4147-A177-3AD203B41FA5}">
+                      <a16:colId xmlns:a16="http://schemas.microsoft.com/office/drawing/2014/main" val="20000"/>
+                    </a:ext>
+                  </a:extLst>
+                </a:gridCol>
+                <a:gridCol w="2377440">
+                  <a:extLst>
+                    <a:ext uri="{9D8B030D-6E8A-4147-A177-3AD203B41FA5}">
+                      <a16:colId xmlns:a16="http://schemas.microsoft.com/office/drawing/2014/main" val="20001"/>
+                    </a:ext>
+                  </a:extLst>
+                </a:gridCol>
+                <a:gridCol w="6675120">
+                  <a:extLst>
+                    <a:ext uri="{9D8B030D-6E8A-4147-A177-3AD203B41FA5}">
+                      <a16:colId xmlns:a16="http://schemas.microsoft.com/office/drawing/2014/main" val="20002"/>
+                    </a:ext>
+                  </a:extLst>
+                </a:gridCol>
               </a:tblGrid>
               <a:tr h="475488">
                 <a:tc>
                   <a:txBody>
-                    <a:bodyPr wrap="square"/>
+                    <a:bodyPr/>
                     <a:lstStyle/>
                     <a:p>
                       <a:r>
@@ -10844,7 +11051,7 @@
                 </a:tc>
                 <a:tc>
                   <a:txBody>
-                    <a:bodyPr wrap="square"/>
+                    <a:bodyPr/>
                     <a:lstStyle/>
                     <a:p>
                       <a:r>
@@ -10866,7 +11073,7 @@
                 </a:tc>
                 <a:tc>
                   <a:txBody>
-                    <a:bodyPr wrap="square"/>
+                    <a:bodyPr/>
                     <a:lstStyle/>
                     <a:p>
                       <a:r>
@@ -10886,11 +11093,16 @@
                     </a:solidFill>
                   </a:tcPr>
                 </a:tc>
+                <a:extLst>
+                  <a:ext uri="{0D108BD9-81ED-4DB2-BD59-A6C34878D82A}">
+                    <a16:rowId xmlns:a16="http://schemas.microsoft.com/office/drawing/2014/main" val="10000"/>
+                  </a:ext>
+                </a:extLst>
               </a:tr>
               <a:tr h="475488">
                 <a:tc>
                   <a:txBody>
-                    <a:bodyPr wrap="square"/>
+                    <a:bodyPr/>
                     <a:lstStyle/>
                     <a:p>
                       <a:r>
@@ -10912,7 +11124,7 @@
                 </a:tc>
                 <a:tc>
                   <a:txBody>
-                    <a:bodyPr wrap="square"/>
+                    <a:bodyPr/>
                     <a:lstStyle/>
                     <a:p>
                       <a:r>
@@ -10934,7 +11146,7 @@
                 </a:tc>
                 <a:tc>
                   <a:txBody>
-                    <a:bodyPr wrap="square"/>
+                    <a:bodyPr/>
                     <a:lstStyle/>
                     <a:p>
                       <a:r>
@@ -10954,11 +11166,16 @@
                     </a:solidFill>
                   </a:tcPr>
                 </a:tc>
+                <a:extLst>
+                  <a:ext uri="{0D108BD9-81ED-4DB2-BD59-A6C34878D82A}">
+                    <a16:rowId xmlns:a16="http://schemas.microsoft.com/office/drawing/2014/main" val="10001"/>
+                  </a:ext>
+                </a:extLst>
               </a:tr>
               <a:tr h="475488">
                 <a:tc>
                   <a:txBody>
-                    <a:bodyPr wrap="square"/>
+                    <a:bodyPr/>
                     <a:lstStyle/>
                     <a:p>
                       <a:r>
@@ -10980,7 +11197,7 @@
                 </a:tc>
                 <a:tc>
                   <a:txBody>
-                    <a:bodyPr wrap="square"/>
+                    <a:bodyPr/>
                     <a:lstStyle/>
                     <a:p>
                       <a:r>
@@ -11002,7 +11219,7 @@
                 </a:tc>
                 <a:tc>
                   <a:txBody>
-                    <a:bodyPr wrap="square"/>
+                    <a:bodyPr/>
                     <a:lstStyle/>
                     <a:p>
                       <a:r>
@@ -11022,11 +11239,16 @@
                     </a:solidFill>
                   </a:tcPr>
                 </a:tc>
+                <a:extLst>
+                  <a:ext uri="{0D108BD9-81ED-4DB2-BD59-A6C34878D82A}">
+                    <a16:rowId xmlns:a16="http://schemas.microsoft.com/office/drawing/2014/main" val="10002"/>
+                  </a:ext>
+                </a:extLst>
               </a:tr>
               <a:tr h="475488">
                 <a:tc>
                   <a:txBody>
-                    <a:bodyPr wrap="square"/>
+                    <a:bodyPr/>
                     <a:lstStyle/>
                     <a:p>
                       <a:r>
@@ -11048,7 +11270,7 @@
                 </a:tc>
                 <a:tc>
                   <a:txBody>
-                    <a:bodyPr wrap="square"/>
+                    <a:bodyPr/>
                     <a:lstStyle/>
                     <a:p>
                       <a:r>
@@ -11070,7 +11292,7 @@
                 </a:tc>
                 <a:tc>
                   <a:txBody>
-                    <a:bodyPr wrap="square"/>
+                    <a:bodyPr/>
                     <a:lstStyle/>
                     <a:p>
                       <a:r>
@@ -11090,11 +11312,16 @@
                     </a:solidFill>
                   </a:tcPr>
                 </a:tc>
+                <a:extLst>
+                  <a:ext uri="{0D108BD9-81ED-4DB2-BD59-A6C34878D82A}">
+                    <a16:rowId xmlns:a16="http://schemas.microsoft.com/office/drawing/2014/main" val="10003"/>
+                  </a:ext>
+                </a:extLst>
               </a:tr>
               <a:tr h="475488">
                 <a:tc>
                   <a:txBody>
-                    <a:bodyPr wrap="square"/>
+                    <a:bodyPr/>
                     <a:lstStyle/>
                     <a:p>
                       <a:r>
@@ -11116,7 +11343,7 @@
                 </a:tc>
                 <a:tc>
                   <a:txBody>
-                    <a:bodyPr wrap="square"/>
+                    <a:bodyPr/>
                     <a:lstStyle/>
                     <a:p>
                       <a:r>
@@ -11138,7 +11365,7 @@
                 </a:tc>
                 <a:tc>
                   <a:txBody>
-                    <a:bodyPr wrap="square"/>
+                    <a:bodyPr/>
                     <a:lstStyle/>
                     <a:p>
                       <a:r>
@@ -11158,11 +11385,16 @@
                     </a:solidFill>
                   </a:tcPr>
                 </a:tc>
+                <a:extLst>
+                  <a:ext uri="{0D108BD9-81ED-4DB2-BD59-A6C34878D82A}">
+                    <a16:rowId xmlns:a16="http://schemas.microsoft.com/office/drawing/2014/main" val="10004"/>
+                  </a:ext>
+                </a:extLst>
               </a:tr>
               <a:tr h="475488">
                 <a:tc>
                   <a:txBody>
-                    <a:bodyPr wrap="square"/>
+                    <a:bodyPr/>
                     <a:lstStyle/>
                     <a:p>
                       <a:r>
@@ -11184,7 +11416,7 @@
                 </a:tc>
                 <a:tc>
                   <a:txBody>
-                    <a:bodyPr wrap="square"/>
+                    <a:bodyPr/>
                     <a:lstStyle/>
                     <a:p>
                       <a:r>
@@ -11206,7 +11438,7 @@
                 </a:tc>
                 <a:tc>
                   <a:txBody>
-                    <a:bodyPr wrap="square"/>
+                    <a:bodyPr/>
                     <a:lstStyle/>
                     <a:p>
                       <a:r>
@@ -11226,6 +11458,11 @@
                     </a:solidFill>
                   </a:tcPr>
                 </a:tc>
+                <a:extLst>
+                  <a:ext uri="{0D108BD9-81ED-4DB2-BD59-A6C34878D82A}">
+                    <a16:rowId xmlns:a16="http://schemas.microsoft.com/office/drawing/2014/main" val="10005"/>
+                  </a:ext>
+                </a:extLst>
               </a:tr>
             </a:tbl>
           </a:graphicData>
@@ -11240,7 +11477,7 @@
 </file>
 
 <file path=ppt/slides/slide16.xml><?xml version="1.0" encoding="utf-8"?>
-<p:sld xmlns:a="http://schemas.openxmlformats.org/drawingml/2006/main" xmlns:p="http://schemas.openxmlformats.org/presentationml/2006/main" xmlns:r="http://schemas.openxmlformats.org/officeDocument/2006/relationships">
+<p:sld xmlns:a="http://schemas.openxmlformats.org/drawingml/2006/main" xmlns:r="http://schemas.openxmlformats.org/officeDocument/2006/relationships" xmlns:p="http://schemas.openxmlformats.org/presentationml/2006/main">
   <p:cSld>
     <p:spTree>
       <p:nvGrpSpPr>
@@ -11248,7 +11485,14 @@
         <p:cNvGrpSpPr/>
         <p:nvPr/>
       </p:nvGrpSpPr>
-      <p:grpSpPr/>
+      <p:grpSpPr>
+        <a:xfrm>
+          <a:off x="0" y="0"/>
+          <a:ext cx="0" cy="0"/>
+          <a:chOff x="0" y="0"/>
+          <a:chExt cx="0" cy="0"/>
+        </a:xfrm>
+      </p:grpSpPr>
       <p:sp>
         <p:nvSpPr>
           <p:cNvPr id="2" name="TextBox 1"/>
@@ -11266,7 +11510,7 @@
           <a:noFill/>
         </p:spPr>
         <p:txBody>
-          <a:bodyPr wrap="square" anchor="t" lIns="45720" rIns="45720">
+          <a:bodyPr wrap="square" lIns="45720" rIns="45720" anchor="t">
             <a:spAutoFit/>
           </a:bodyPr>
           <a:lstStyle/>
@@ -11301,7 +11545,7 @@
           <a:noFill/>
         </p:spPr>
         <p:txBody>
-          <a:bodyPr wrap="square" anchor="ctr" lIns="45720" rIns="45720">
+          <a:bodyPr wrap="square" lIns="45720" rIns="45720" anchor="ctr">
             <a:spAutoFit/>
           </a:bodyPr>
           <a:lstStyle/>
@@ -11336,7 +11580,7 @@
           <a:noFill/>
         </p:spPr>
         <p:txBody>
-          <a:bodyPr wrap="square" anchor="t" lIns="45720" rIns="45720">
+          <a:bodyPr wrap="square" lIns="45720" rIns="45720" anchor="t">
             <a:spAutoFit/>
           </a:bodyPr>
           <a:lstStyle/>
@@ -11371,7 +11615,7 @@
           <a:noFill/>
         </p:spPr>
         <p:txBody>
-          <a:bodyPr wrap="square" anchor="t" lIns="45720" rIns="45720">
+          <a:bodyPr wrap="square" lIns="45720" rIns="45720" anchor="t">
             <a:spAutoFit/>
           </a:bodyPr>
           <a:lstStyle/>
@@ -11399,23 +11643,41 @@
         </p:nvGraphicFramePr>
         <p:xfrm>
           <a:off x="548640" y="1554480"/>
-          <a:ext cx="5760720" cy="3200400"/>
+          <a:ext cx="5760720" cy="3273552"/>
         </p:xfrm>
         <a:graphic>
           <a:graphicData uri="http://schemas.openxmlformats.org/drawingml/2006/table">
             <a:tbl>
-              <a:tblPr firstRow="0" bandRow="0">
+              <a:tblPr>
                 <a:tableStyleId>{5C22544A-7EE6-4342-B048-85BDC9FD1C3A}</a:tableStyleId>
               </a:tblPr>
               <a:tblGrid>
-                <a:gridCol w="2377440"/>
-                <a:gridCol w="2377440"/>
-                <a:gridCol w="1005840"/>
+                <a:gridCol w="2377440">
+                  <a:extLst>
+                    <a:ext uri="{9D8B030D-6E8A-4147-A177-3AD203B41FA5}">
+                      <a16:colId xmlns:a16="http://schemas.microsoft.com/office/drawing/2014/main" val="20000"/>
+                    </a:ext>
+                  </a:extLst>
+                </a:gridCol>
+                <a:gridCol w="2377440">
+                  <a:extLst>
+                    <a:ext uri="{9D8B030D-6E8A-4147-A177-3AD203B41FA5}">
+                      <a16:colId xmlns:a16="http://schemas.microsoft.com/office/drawing/2014/main" val="20001"/>
+                    </a:ext>
+                  </a:extLst>
+                </a:gridCol>
+                <a:gridCol w="1005840">
+                  <a:extLst>
+                    <a:ext uri="{9D8B030D-6E8A-4147-A177-3AD203B41FA5}">
+                      <a16:colId xmlns:a16="http://schemas.microsoft.com/office/drawing/2014/main" val="20002"/>
+                    </a:ext>
+                  </a:extLst>
+                </a:gridCol>
               </a:tblGrid>
               <a:tr h="457200">
                 <a:tc>
                   <a:txBody>
-                    <a:bodyPr wrap="square"/>
+                    <a:bodyPr/>
                     <a:lstStyle/>
                     <a:p>
                       <a:r>
@@ -11437,7 +11699,7 @@
                 </a:tc>
                 <a:tc>
                   <a:txBody>
-                    <a:bodyPr wrap="square"/>
+                    <a:bodyPr/>
                     <a:lstStyle/>
                     <a:p>
                       <a:r>
@@ -11459,7 +11721,7 @@
                 </a:tc>
                 <a:tc>
                   <a:txBody>
-                    <a:bodyPr wrap="square"/>
+                    <a:bodyPr/>
                     <a:lstStyle/>
                     <a:p>
                       <a:r>
@@ -11479,11 +11741,16 @@
                     </a:solidFill>
                   </a:tcPr>
                 </a:tc>
+                <a:extLst>
+                  <a:ext uri="{0D108BD9-81ED-4DB2-BD59-A6C34878D82A}">
+                    <a16:rowId xmlns:a16="http://schemas.microsoft.com/office/drawing/2014/main" val="10000"/>
+                  </a:ext>
+                </a:extLst>
               </a:tr>
               <a:tr h="457200">
                 <a:tc>
                   <a:txBody>
-                    <a:bodyPr wrap="square"/>
+                    <a:bodyPr/>
                     <a:lstStyle/>
                     <a:p>
                       <a:r>
@@ -11505,7 +11772,7 @@
                 </a:tc>
                 <a:tc>
                   <a:txBody>
-                    <a:bodyPr wrap="square"/>
+                    <a:bodyPr/>
                     <a:lstStyle/>
                     <a:p>
                       <a:r>
@@ -11527,7 +11794,7 @@
                 </a:tc>
                 <a:tc>
                   <a:txBody>
-                    <a:bodyPr wrap="square"/>
+                    <a:bodyPr/>
                     <a:lstStyle/>
                     <a:p>
                       <a:r>
@@ -11547,11 +11814,16 @@
                     </a:solidFill>
                   </a:tcPr>
                 </a:tc>
+                <a:extLst>
+                  <a:ext uri="{0D108BD9-81ED-4DB2-BD59-A6C34878D82A}">
+                    <a16:rowId xmlns:a16="http://schemas.microsoft.com/office/drawing/2014/main" val="10001"/>
+                  </a:ext>
+                </a:extLst>
               </a:tr>
               <a:tr h="457200">
                 <a:tc>
                   <a:txBody>
-                    <a:bodyPr wrap="square"/>
+                    <a:bodyPr/>
                     <a:lstStyle/>
                     <a:p>
                       <a:r>
@@ -11573,7 +11845,7 @@
                 </a:tc>
                 <a:tc>
                   <a:txBody>
-                    <a:bodyPr wrap="square"/>
+                    <a:bodyPr/>
                     <a:lstStyle/>
                     <a:p>
                       <a:r>
@@ -11595,7 +11867,7 @@
                 </a:tc>
                 <a:tc>
                   <a:txBody>
-                    <a:bodyPr wrap="square"/>
+                    <a:bodyPr/>
                     <a:lstStyle/>
                     <a:p>
                       <a:r>
@@ -11615,11 +11887,16 @@
                     </a:solidFill>
                   </a:tcPr>
                 </a:tc>
+                <a:extLst>
+                  <a:ext uri="{0D108BD9-81ED-4DB2-BD59-A6C34878D82A}">
+                    <a16:rowId xmlns:a16="http://schemas.microsoft.com/office/drawing/2014/main" val="10002"/>
+                  </a:ext>
+                </a:extLst>
               </a:tr>
               <a:tr h="457200">
                 <a:tc>
                   <a:txBody>
-                    <a:bodyPr wrap="square"/>
+                    <a:bodyPr/>
                     <a:lstStyle/>
                     <a:p>
                       <a:r>
@@ -11641,7 +11918,7 @@
                 </a:tc>
                 <a:tc>
                   <a:txBody>
-                    <a:bodyPr wrap="square"/>
+                    <a:bodyPr/>
                     <a:lstStyle/>
                     <a:p>
                       <a:r>
@@ -11663,7 +11940,7 @@
                 </a:tc>
                 <a:tc>
                   <a:txBody>
-                    <a:bodyPr wrap="square"/>
+                    <a:bodyPr/>
                     <a:lstStyle/>
                     <a:p>
                       <a:r>
@@ -11683,11 +11960,16 @@
                     </a:solidFill>
                   </a:tcPr>
                 </a:tc>
+                <a:extLst>
+                  <a:ext uri="{0D108BD9-81ED-4DB2-BD59-A6C34878D82A}">
+                    <a16:rowId xmlns:a16="http://schemas.microsoft.com/office/drawing/2014/main" val="10003"/>
+                  </a:ext>
+                </a:extLst>
               </a:tr>
               <a:tr h="457200">
                 <a:tc>
                   <a:txBody>
-                    <a:bodyPr wrap="square"/>
+                    <a:bodyPr/>
                     <a:lstStyle/>
                     <a:p>
                       <a:r>
@@ -11709,7 +11991,7 @@
                 </a:tc>
                 <a:tc>
                   <a:txBody>
-                    <a:bodyPr wrap="square"/>
+                    <a:bodyPr/>
                     <a:lstStyle/>
                     <a:p>
                       <a:r>
@@ -11731,7 +12013,7 @@
                 </a:tc>
                 <a:tc>
                   <a:txBody>
-                    <a:bodyPr wrap="square"/>
+                    <a:bodyPr/>
                     <a:lstStyle/>
                     <a:p>
                       <a:r>
@@ -11751,11 +12033,16 @@
                     </a:solidFill>
                   </a:tcPr>
                 </a:tc>
+                <a:extLst>
+                  <a:ext uri="{0D108BD9-81ED-4DB2-BD59-A6C34878D82A}">
+                    <a16:rowId xmlns:a16="http://schemas.microsoft.com/office/drawing/2014/main" val="10004"/>
+                  </a:ext>
+                </a:extLst>
               </a:tr>
               <a:tr h="457200">
                 <a:tc>
                   <a:txBody>
-                    <a:bodyPr wrap="square"/>
+                    <a:bodyPr/>
                     <a:lstStyle/>
                     <a:p>
                       <a:r>
@@ -11777,7 +12064,7 @@
                 </a:tc>
                 <a:tc>
                   <a:txBody>
-                    <a:bodyPr wrap="square"/>
+                    <a:bodyPr/>
                     <a:lstStyle/>
                     <a:p>
                       <a:r>
@@ -11799,7 +12086,7 @@
                 </a:tc>
                 <a:tc>
                   <a:txBody>
-                    <a:bodyPr wrap="square"/>
+                    <a:bodyPr/>
                     <a:lstStyle/>
                     <a:p>
                       <a:r>
@@ -11819,11 +12106,16 @@
                     </a:solidFill>
                   </a:tcPr>
                 </a:tc>
+                <a:extLst>
+                  <a:ext uri="{0D108BD9-81ED-4DB2-BD59-A6C34878D82A}">
+                    <a16:rowId xmlns:a16="http://schemas.microsoft.com/office/drawing/2014/main" val="10005"/>
+                  </a:ext>
+                </a:extLst>
               </a:tr>
               <a:tr h="457200">
                 <a:tc>
                   <a:txBody>
-                    <a:bodyPr wrap="square"/>
+                    <a:bodyPr/>
                     <a:lstStyle/>
                     <a:p>
                       <a:r>
@@ -11845,7 +12137,7 @@
                 </a:tc>
                 <a:tc>
                   <a:txBody>
-                    <a:bodyPr wrap="square"/>
+                    <a:bodyPr/>
                     <a:lstStyle/>
                     <a:p>
                       <a:r>
@@ -11867,7 +12159,7 @@
                 </a:tc>
                 <a:tc>
                   <a:txBody>
-                    <a:bodyPr wrap="square"/>
+                    <a:bodyPr/>
                     <a:lstStyle/>
                     <a:p>
                       <a:r>
@@ -11887,6 +12179,11 @@
                     </a:solidFill>
                   </a:tcPr>
                 </a:tc>
+                <a:extLst>
+                  <a:ext uri="{0D108BD9-81ED-4DB2-BD59-A6C34878D82A}">
+                    <a16:rowId xmlns:a16="http://schemas.microsoft.com/office/drawing/2014/main" val="10006"/>
+                  </a:ext>
+                </a:extLst>
               </a:tr>
             </a:tbl>
           </a:graphicData>
@@ -11933,7 +12230,9 @@
         <p:txBody>
           <a:bodyPr rtlCol="0" anchor="ctr"/>
           <a:lstStyle/>
-          <a:p/>
+          <a:p>
+            <a:endParaRPr/>
+          </a:p>
         </p:txBody>
       </p:sp>
       <p:sp>
@@ -11953,7 +12252,7 @@
           <a:noFill/>
         </p:spPr>
         <p:txBody>
-          <a:bodyPr wrap="square" anchor="ctr" lIns="45720" rIns="45720">
+          <a:bodyPr wrap="square" lIns="45720" rIns="45720" anchor="ctr">
             <a:spAutoFit/>
           </a:bodyPr>
           <a:lstStyle/>
@@ -12141,7 +12440,7 @@
           <a:noFill/>
         </p:spPr>
         <p:txBody>
-          <a:bodyPr wrap="square" anchor="t" lIns="45720" rIns="45720">
+          <a:bodyPr wrap="square" lIns="45720" rIns="45720" anchor="t">
             <a:spAutoFit/>
           </a:bodyPr>
           <a:lstStyle/>
@@ -12168,7 +12467,7 @@
 </file>
 
 <file path=ppt/slides/slide17.xml><?xml version="1.0" encoding="utf-8"?>
-<p:sld xmlns:a="http://schemas.openxmlformats.org/drawingml/2006/main" xmlns:p="http://schemas.openxmlformats.org/presentationml/2006/main" xmlns:r="http://schemas.openxmlformats.org/officeDocument/2006/relationships">
+<p:sld xmlns:a="http://schemas.openxmlformats.org/drawingml/2006/main" xmlns:r="http://schemas.openxmlformats.org/officeDocument/2006/relationships" xmlns:p="http://schemas.openxmlformats.org/presentationml/2006/main">
   <p:cSld>
     <p:spTree>
       <p:nvGrpSpPr>
@@ -12176,7 +12475,14 @@
         <p:cNvGrpSpPr/>
         <p:nvPr/>
       </p:nvGrpSpPr>
-      <p:grpSpPr/>
+      <p:grpSpPr>
+        <a:xfrm>
+          <a:off x="0" y="0"/>
+          <a:ext cx="0" cy="0"/>
+          <a:chOff x="0" y="0"/>
+          <a:chExt cx="0" cy="0"/>
+        </a:xfrm>
+      </p:grpSpPr>
       <p:sp>
         <p:nvSpPr>
           <p:cNvPr id="2" name="TextBox 1"/>
@@ -12194,7 +12500,7 @@
           <a:noFill/>
         </p:spPr>
         <p:txBody>
-          <a:bodyPr wrap="square" anchor="t" lIns="45720" rIns="45720">
+          <a:bodyPr wrap="square" lIns="45720" rIns="45720" anchor="t">
             <a:spAutoFit/>
           </a:bodyPr>
           <a:lstStyle/>
@@ -12229,7 +12535,7 @@
           <a:noFill/>
         </p:spPr>
         <p:txBody>
-          <a:bodyPr wrap="square" anchor="ctr" lIns="45720" rIns="45720">
+          <a:bodyPr wrap="square" lIns="45720" rIns="45720" anchor="ctr">
             <a:spAutoFit/>
           </a:bodyPr>
           <a:lstStyle/>
@@ -12264,7 +12570,7 @@
           <a:noFill/>
         </p:spPr>
         <p:txBody>
-          <a:bodyPr wrap="square" anchor="t" lIns="45720" rIns="45720">
+          <a:bodyPr wrap="square" lIns="45720" rIns="45720" anchor="t">
             <a:spAutoFit/>
           </a:bodyPr>
           <a:lstStyle/>
@@ -12299,7 +12605,7 @@
           <a:noFill/>
         </p:spPr>
         <p:txBody>
-          <a:bodyPr wrap="square" anchor="t" lIns="45720" rIns="45720">
+          <a:bodyPr wrap="square" lIns="45720" rIns="45720" anchor="t">
             <a:spAutoFit/>
           </a:bodyPr>
           <a:lstStyle/>
@@ -12332,20 +12638,50 @@
         <a:graphic>
           <a:graphicData uri="http://schemas.openxmlformats.org/drawingml/2006/table">
             <a:tbl>
-              <a:tblPr firstRow="0" bandRow="0">
+              <a:tblPr>
                 <a:tableStyleId>{5C22544A-7EE6-4342-B048-85BDC9FD1C3A}</a:tableStyleId>
               </a:tblPr>
               <a:tblGrid>
-                <a:gridCol w="365760"/>
-                <a:gridCol w="1188720"/>
-                <a:gridCol w="2743200"/>
-                <a:gridCol w="3840480"/>
-                <a:gridCol w="2926080"/>
+                <a:gridCol w="365760">
+                  <a:extLst>
+                    <a:ext uri="{9D8B030D-6E8A-4147-A177-3AD203B41FA5}">
+                      <a16:colId xmlns:a16="http://schemas.microsoft.com/office/drawing/2014/main" val="20000"/>
+                    </a:ext>
+                  </a:extLst>
+                </a:gridCol>
+                <a:gridCol w="1188720">
+                  <a:extLst>
+                    <a:ext uri="{9D8B030D-6E8A-4147-A177-3AD203B41FA5}">
+                      <a16:colId xmlns:a16="http://schemas.microsoft.com/office/drawing/2014/main" val="20001"/>
+                    </a:ext>
+                  </a:extLst>
+                </a:gridCol>
+                <a:gridCol w="2743200">
+                  <a:extLst>
+                    <a:ext uri="{9D8B030D-6E8A-4147-A177-3AD203B41FA5}">
+                      <a16:colId xmlns:a16="http://schemas.microsoft.com/office/drawing/2014/main" val="20002"/>
+                    </a:ext>
+                  </a:extLst>
+                </a:gridCol>
+                <a:gridCol w="3840480">
+                  <a:extLst>
+                    <a:ext uri="{9D8B030D-6E8A-4147-A177-3AD203B41FA5}">
+                      <a16:colId xmlns:a16="http://schemas.microsoft.com/office/drawing/2014/main" val="20003"/>
+                    </a:ext>
+                  </a:extLst>
+                </a:gridCol>
+                <a:gridCol w="2926080">
+                  <a:extLst>
+                    <a:ext uri="{9D8B030D-6E8A-4147-A177-3AD203B41FA5}">
+                      <a16:colId xmlns:a16="http://schemas.microsoft.com/office/drawing/2014/main" val="20004"/>
+                    </a:ext>
+                  </a:extLst>
+                </a:gridCol>
               </a:tblGrid>
               <a:tr h="457200">
                 <a:tc>
                   <a:txBody>
-                    <a:bodyPr wrap="square"/>
+                    <a:bodyPr/>
                     <a:lstStyle/>
                     <a:p>
                       <a:r>
@@ -12367,7 +12703,7 @@
                 </a:tc>
                 <a:tc>
                   <a:txBody>
-                    <a:bodyPr wrap="square"/>
+                    <a:bodyPr/>
                     <a:lstStyle/>
                     <a:p>
                       <a:r>
@@ -12389,7 +12725,7 @@
                 </a:tc>
                 <a:tc>
                   <a:txBody>
-                    <a:bodyPr wrap="square"/>
+                    <a:bodyPr/>
                     <a:lstStyle/>
                     <a:p>
                       <a:r>
@@ -12411,7 +12747,7 @@
                 </a:tc>
                 <a:tc>
                   <a:txBody>
-                    <a:bodyPr wrap="square"/>
+                    <a:bodyPr/>
                     <a:lstStyle/>
                     <a:p>
                       <a:r>
@@ -12433,7 +12769,7 @@
                 </a:tc>
                 <a:tc>
                   <a:txBody>
-                    <a:bodyPr wrap="square"/>
+                    <a:bodyPr/>
                     <a:lstStyle/>
                     <a:p>
                       <a:r>
@@ -12453,11 +12789,16 @@
                     </a:solidFill>
                   </a:tcPr>
                 </a:tc>
+                <a:extLst>
+                  <a:ext uri="{0D108BD9-81ED-4DB2-BD59-A6C34878D82A}">
+                    <a16:rowId xmlns:a16="http://schemas.microsoft.com/office/drawing/2014/main" val="10000"/>
+                  </a:ext>
+                </a:extLst>
               </a:tr>
               <a:tr h="457200">
                 <a:tc>
                   <a:txBody>
-                    <a:bodyPr wrap="square"/>
+                    <a:bodyPr/>
                     <a:lstStyle/>
                     <a:p>
                       <a:r>
@@ -12479,7 +12820,7 @@
                 </a:tc>
                 <a:tc>
                   <a:txBody>
-                    <a:bodyPr wrap="square"/>
+                    <a:bodyPr/>
                     <a:lstStyle/>
                     <a:p>
                       <a:r>
@@ -12501,7 +12842,7 @@
                 </a:tc>
                 <a:tc>
                   <a:txBody>
-                    <a:bodyPr wrap="square"/>
+                    <a:bodyPr/>
                     <a:lstStyle/>
                     <a:p>
                       <a:r>
@@ -12523,7 +12864,7 @@
                 </a:tc>
                 <a:tc>
                   <a:txBody>
-                    <a:bodyPr wrap="square"/>
+                    <a:bodyPr/>
                     <a:lstStyle/>
                     <a:p>
                       <a:r>
@@ -12545,7 +12886,7 @@
                 </a:tc>
                 <a:tc>
                   <a:txBody>
-                    <a:bodyPr wrap="square"/>
+                    <a:bodyPr/>
                     <a:lstStyle/>
                     <a:p>
                       <a:r>
@@ -12565,11 +12906,16 @@
                     </a:solidFill>
                   </a:tcPr>
                 </a:tc>
+                <a:extLst>
+                  <a:ext uri="{0D108BD9-81ED-4DB2-BD59-A6C34878D82A}">
+                    <a16:rowId xmlns:a16="http://schemas.microsoft.com/office/drawing/2014/main" val="10001"/>
+                  </a:ext>
+                </a:extLst>
               </a:tr>
               <a:tr h="457200">
                 <a:tc>
                   <a:txBody>
-                    <a:bodyPr wrap="square"/>
+                    <a:bodyPr/>
                     <a:lstStyle/>
                     <a:p>
                       <a:r>
@@ -12591,7 +12937,7 @@
                 </a:tc>
                 <a:tc>
                   <a:txBody>
-                    <a:bodyPr wrap="square"/>
+                    <a:bodyPr/>
                     <a:lstStyle/>
                     <a:p>
                       <a:r>
@@ -12613,7 +12959,7 @@
                 </a:tc>
                 <a:tc>
                   <a:txBody>
-                    <a:bodyPr wrap="square"/>
+                    <a:bodyPr/>
                     <a:lstStyle/>
                     <a:p>
                       <a:r>
@@ -12635,7 +12981,7 @@
                 </a:tc>
                 <a:tc>
                   <a:txBody>
-                    <a:bodyPr wrap="square"/>
+                    <a:bodyPr/>
                     <a:lstStyle/>
                     <a:p>
                       <a:r>
@@ -12657,7 +13003,7 @@
                 </a:tc>
                 <a:tc>
                   <a:txBody>
-                    <a:bodyPr wrap="square"/>
+                    <a:bodyPr/>
                     <a:lstStyle/>
                     <a:p>
                       <a:r>
@@ -12677,11 +13023,16 @@
                     </a:solidFill>
                   </a:tcPr>
                 </a:tc>
+                <a:extLst>
+                  <a:ext uri="{0D108BD9-81ED-4DB2-BD59-A6C34878D82A}">
+                    <a16:rowId xmlns:a16="http://schemas.microsoft.com/office/drawing/2014/main" val="10002"/>
+                  </a:ext>
+                </a:extLst>
               </a:tr>
               <a:tr h="457200">
                 <a:tc>
                   <a:txBody>
-                    <a:bodyPr wrap="square"/>
+                    <a:bodyPr/>
                     <a:lstStyle/>
                     <a:p>
                       <a:r>
@@ -12703,7 +13054,7 @@
                 </a:tc>
                 <a:tc>
                   <a:txBody>
-                    <a:bodyPr wrap="square"/>
+                    <a:bodyPr/>
                     <a:lstStyle/>
                     <a:p>
                       <a:r>
@@ -12725,7 +13076,7 @@
                 </a:tc>
                 <a:tc>
                   <a:txBody>
-                    <a:bodyPr wrap="square"/>
+                    <a:bodyPr/>
                     <a:lstStyle/>
                     <a:p>
                       <a:r>
@@ -12747,7 +13098,7 @@
                 </a:tc>
                 <a:tc>
                   <a:txBody>
-                    <a:bodyPr wrap="square"/>
+                    <a:bodyPr/>
                     <a:lstStyle/>
                     <a:p>
                       <a:r>
@@ -12769,7 +13120,7 @@
                 </a:tc>
                 <a:tc>
                   <a:txBody>
-                    <a:bodyPr wrap="square"/>
+                    <a:bodyPr/>
                     <a:lstStyle/>
                     <a:p>
                       <a:r>
@@ -12789,11 +13140,16 @@
                     </a:solidFill>
                   </a:tcPr>
                 </a:tc>
+                <a:extLst>
+                  <a:ext uri="{0D108BD9-81ED-4DB2-BD59-A6C34878D82A}">
+                    <a16:rowId xmlns:a16="http://schemas.microsoft.com/office/drawing/2014/main" val="10003"/>
+                  </a:ext>
+                </a:extLst>
               </a:tr>
               <a:tr h="457200">
                 <a:tc>
                   <a:txBody>
-                    <a:bodyPr wrap="square"/>
+                    <a:bodyPr/>
                     <a:lstStyle/>
                     <a:p>
                       <a:r>
@@ -12815,7 +13171,7 @@
                 </a:tc>
                 <a:tc>
                   <a:txBody>
-                    <a:bodyPr wrap="square"/>
+                    <a:bodyPr/>
                     <a:lstStyle/>
                     <a:p>
                       <a:r>
@@ -12837,7 +13193,7 @@
                 </a:tc>
                 <a:tc>
                   <a:txBody>
-                    <a:bodyPr wrap="square"/>
+                    <a:bodyPr/>
                     <a:lstStyle/>
                     <a:p>
                       <a:r>
@@ -12859,7 +13215,7 @@
                 </a:tc>
                 <a:tc>
                   <a:txBody>
-                    <a:bodyPr wrap="square"/>
+                    <a:bodyPr/>
                     <a:lstStyle/>
                     <a:p>
                       <a:r>
@@ -12881,7 +13237,7 @@
                 </a:tc>
                 <a:tc>
                   <a:txBody>
-                    <a:bodyPr wrap="square"/>
+                    <a:bodyPr/>
                     <a:lstStyle/>
                     <a:p>
                       <a:r>
@@ -12901,11 +13257,16 @@
                     </a:solidFill>
                   </a:tcPr>
                 </a:tc>
+                <a:extLst>
+                  <a:ext uri="{0D108BD9-81ED-4DB2-BD59-A6C34878D82A}">
+                    <a16:rowId xmlns:a16="http://schemas.microsoft.com/office/drawing/2014/main" val="10004"/>
+                  </a:ext>
+                </a:extLst>
               </a:tr>
               <a:tr h="457200">
                 <a:tc>
                   <a:txBody>
-                    <a:bodyPr wrap="square"/>
+                    <a:bodyPr/>
                     <a:lstStyle/>
                     <a:p>
                       <a:r>
@@ -12927,7 +13288,7 @@
                 </a:tc>
                 <a:tc>
                   <a:txBody>
-                    <a:bodyPr wrap="square"/>
+                    <a:bodyPr/>
                     <a:lstStyle/>
                     <a:p>
                       <a:r>
@@ -12949,7 +13310,7 @@
                 </a:tc>
                 <a:tc>
                   <a:txBody>
-                    <a:bodyPr wrap="square"/>
+                    <a:bodyPr/>
                     <a:lstStyle/>
                     <a:p>
                       <a:r>
@@ -12971,7 +13332,7 @@
                 </a:tc>
                 <a:tc>
                   <a:txBody>
-                    <a:bodyPr wrap="square"/>
+                    <a:bodyPr/>
                     <a:lstStyle/>
                     <a:p>
                       <a:r>
@@ -12993,7 +13354,7 @@
                 </a:tc>
                 <a:tc>
                   <a:txBody>
-                    <a:bodyPr wrap="square"/>
+                    <a:bodyPr/>
                     <a:lstStyle/>
                     <a:p>
                       <a:r>
@@ -13013,11 +13374,16 @@
                     </a:solidFill>
                   </a:tcPr>
                 </a:tc>
+                <a:extLst>
+                  <a:ext uri="{0D108BD9-81ED-4DB2-BD59-A6C34878D82A}">
+                    <a16:rowId xmlns:a16="http://schemas.microsoft.com/office/drawing/2014/main" val="10005"/>
+                  </a:ext>
+                </a:extLst>
               </a:tr>
               <a:tr h="457200">
                 <a:tc>
                   <a:txBody>
-                    <a:bodyPr wrap="square"/>
+                    <a:bodyPr/>
                     <a:lstStyle/>
                     <a:p>
                       <a:r>
@@ -13039,7 +13405,7 @@
                 </a:tc>
                 <a:tc>
                   <a:txBody>
-                    <a:bodyPr wrap="square"/>
+                    <a:bodyPr/>
                     <a:lstStyle/>
                     <a:p>
                       <a:r>
@@ -13061,7 +13427,7 @@
                 </a:tc>
                 <a:tc>
                   <a:txBody>
-                    <a:bodyPr wrap="square"/>
+                    <a:bodyPr/>
                     <a:lstStyle/>
                     <a:p>
                       <a:r>
@@ -13083,7 +13449,7 @@
                 </a:tc>
                 <a:tc>
                   <a:txBody>
-                    <a:bodyPr wrap="square"/>
+                    <a:bodyPr/>
                     <a:lstStyle/>
                     <a:p>
                       <a:r>
@@ -13105,7 +13471,7 @@
                 </a:tc>
                 <a:tc>
                   <a:txBody>
-                    <a:bodyPr wrap="square"/>
+                    <a:bodyPr/>
                     <a:lstStyle/>
                     <a:p>
                       <a:r>
@@ -13125,11 +13491,16 @@
                     </a:solidFill>
                   </a:tcPr>
                 </a:tc>
+                <a:extLst>
+                  <a:ext uri="{0D108BD9-81ED-4DB2-BD59-A6C34878D82A}">
+                    <a16:rowId xmlns:a16="http://schemas.microsoft.com/office/drawing/2014/main" val="10006"/>
+                  </a:ext>
+                </a:extLst>
               </a:tr>
               <a:tr h="457200">
                 <a:tc>
                   <a:txBody>
-                    <a:bodyPr wrap="square"/>
+                    <a:bodyPr/>
                     <a:lstStyle/>
                     <a:p>
                       <a:r>
@@ -13151,7 +13522,7 @@
                 </a:tc>
                 <a:tc>
                   <a:txBody>
-                    <a:bodyPr wrap="square"/>
+                    <a:bodyPr/>
                     <a:lstStyle/>
                     <a:p>
                       <a:r>
@@ -13173,7 +13544,7 @@
                 </a:tc>
                 <a:tc>
                   <a:txBody>
-                    <a:bodyPr wrap="square"/>
+                    <a:bodyPr/>
                     <a:lstStyle/>
                     <a:p>
                       <a:r>
@@ -13195,7 +13566,7 @@
                 </a:tc>
                 <a:tc>
                   <a:txBody>
-                    <a:bodyPr wrap="square"/>
+                    <a:bodyPr/>
                     <a:lstStyle/>
                     <a:p>
                       <a:r>
@@ -13217,7 +13588,7 @@
                 </a:tc>
                 <a:tc>
                   <a:txBody>
-                    <a:bodyPr wrap="square"/>
+                    <a:bodyPr/>
                     <a:lstStyle/>
                     <a:p>
                       <a:r>
@@ -13237,11 +13608,16 @@
                     </a:solidFill>
                   </a:tcPr>
                 </a:tc>
+                <a:extLst>
+                  <a:ext uri="{0D108BD9-81ED-4DB2-BD59-A6C34878D82A}">
+                    <a16:rowId xmlns:a16="http://schemas.microsoft.com/office/drawing/2014/main" val="10007"/>
+                  </a:ext>
+                </a:extLst>
               </a:tr>
               <a:tr h="457200">
                 <a:tc>
                   <a:txBody>
-                    <a:bodyPr wrap="square"/>
+                    <a:bodyPr/>
                     <a:lstStyle/>
                     <a:p>
                       <a:r>
@@ -13263,7 +13639,7 @@
                 </a:tc>
                 <a:tc>
                   <a:txBody>
-                    <a:bodyPr wrap="square"/>
+                    <a:bodyPr/>
                     <a:lstStyle/>
                     <a:p>
                       <a:r>
@@ -13285,7 +13661,7 @@
                 </a:tc>
                 <a:tc>
                   <a:txBody>
-                    <a:bodyPr wrap="square"/>
+                    <a:bodyPr/>
                     <a:lstStyle/>
                     <a:p>
                       <a:r>
@@ -13307,7 +13683,7 @@
                 </a:tc>
                 <a:tc>
                   <a:txBody>
-                    <a:bodyPr wrap="square"/>
+                    <a:bodyPr/>
                     <a:lstStyle/>
                     <a:p>
                       <a:r>
@@ -13329,7 +13705,7 @@
                 </a:tc>
                 <a:tc>
                   <a:txBody>
-                    <a:bodyPr wrap="square"/>
+                    <a:bodyPr/>
                     <a:lstStyle/>
                     <a:p>
                       <a:r>
@@ -13349,6 +13725,11 @@
                     </a:solidFill>
                   </a:tcPr>
                 </a:tc>
+                <a:extLst>
+                  <a:ext uri="{0D108BD9-81ED-4DB2-BD59-A6C34878D82A}">
+                    <a16:rowId xmlns:a16="http://schemas.microsoft.com/office/drawing/2014/main" val="10008"/>
+                  </a:ext>
+                </a:extLst>
               </a:tr>
             </a:tbl>
           </a:graphicData>
@@ -13363,7 +13744,7 @@
 </file>
 
 <file path=ppt/slides/slide18.xml><?xml version="1.0" encoding="utf-8"?>
-<p:sld xmlns:a="http://schemas.openxmlformats.org/drawingml/2006/main" xmlns:p="http://schemas.openxmlformats.org/presentationml/2006/main" xmlns:r="http://schemas.openxmlformats.org/officeDocument/2006/relationships">
+<p:sld xmlns:a="http://schemas.openxmlformats.org/drawingml/2006/main" xmlns:r="http://schemas.openxmlformats.org/officeDocument/2006/relationships" xmlns:p="http://schemas.openxmlformats.org/presentationml/2006/main">
   <p:cSld>
     <p:spTree>
       <p:nvGrpSpPr>
@@ -13371,7 +13752,14 @@
         <p:cNvGrpSpPr/>
         <p:nvPr/>
       </p:nvGrpSpPr>
-      <p:grpSpPr/>
+      <p:grpSpPr>
+        <a:xfrm>
+          <a:off x="0" y="0"/>
+          <a:ext cx="0" cy="0"/>
+          <a:chOff x="0" y="0"/>
+          <a:chExt cx="0" cy="0"/>
+        </a:xfrm>
+      </p:grpSpPr>
       <p:sp>
         <p:nvSpPr>
           <p:cNvPr id="2" name="TextBox 1"/>
@@ -13389,7 +13777,7 @@
           <a:noFill/>
         </p:spPr>
         <p:txBody>
-          <a:bodyPr wrap="square" anchor="t" lIns="45720" rIns="45720">
+          <a:bodyPr wrap="square" lIns="45720" rIns="45720" anchor="t">
             <a:spAutoFit/>
           </a:bodyPr>
           <a:lstStyle/>
@@ -13424,7 +13812,7 @@
           <a:noFill/>
         </p:spPr>
         <p:txBody>
-          <a:bodyPr wrap="square" anchor="ctr" lIns="45720" rIns="45720">
+          <a:bodyPr wrap="square" lIns="45720" rIns="45720" anchor="ctr">
             <a:spAutoFit/>
           </a:bodyPr>
           <a:lstStyle/>
@@ -13459,7 +13847,7 @@
           <a:noFill/>
         </p:spPr>
         <p:txBody>
-          <a:bodyPr wrap="square" anchor="t" lIns="45720" rIns="45720">
+          <a:bodyPr wrap="square" lIns="45720" rIns="45720" anchor="t">
             <a:spAutoFit/>
           </a:bodyPr>
           <a:lstStyle/>
@@ -13494,7 +13882,7 @@
           <a:noFill/>
         </p:spPr>
         <p:txBody>
-          <a:bodyPr wrap="square" anchor="t" lIns="45720" rIns="45720">
+          <a:bodyPr wrap="square" lIns="45720" rIns="45720" anchor="t">
             <a:spAutoFit/>
           </a:bodyPr>
           <a:lstStyle/>
@@ -13553,7 +13941,9 @@
         <p:txBody>
           <a:bodyPr rtlCol="0" anchor="ctr"/>
           <a:lstStyle/>
-          <a:p/>
+          <a:p>
+            <a:endParaRPr/>
+          </a:p>
         </p:txBody>
       </p:sp>
       <p:sp>
@@ -13573,7 +13963,7 @@
           <a:noFill/>
         </p:spPr>
         <p:txBody>
-          <a:bodyPr wrap="square" anchor="ctr" lIns="45720" rIns="45720">
+          <a:bodyPr wrap="square" lIns="45720" rIns="45720" anchor="ctr">
             <a:spAutoFit/>
           </a:bodyPr>
           <a:lstStyle/>
@@ -13608,7 +13998,7 @@
           <a:noFill/>
         </p:spPr>
         <p:txBody>
-          <a:bodyPr wrap="square" anchor="t" lIns="45720" rIns="45720">
+          <a:bodyPr wrap="square" lIns="45720" rIns="45720" anchor="t">
             <a:spAutoFit/>
           </a:bodyPr>
           <a:lstStyle/>
@@ -13667,7 +14057,9 @@
         <p:txBody>
           <a:bodyPr rtlCol="0" anchor="ctr"/>
           <a:lstStyle/>
-          <a:p/>
+          <a:p>
+            <a:endParaRPr/>
+          </a:p>
         </p:txBody>
       </p:sp>
       <p:sp>
@@ -13687,7 +14079,7 @@
           <a:noFill/>
         </p:spPr>
         <p:txBody>
-          <a:bodyPr wrap="square" anchor="ctr" lIns="45720" rIns="45720">
+          <a:bodyPr wrap="square" lIns="45720" rIns="45720" anchor="ctr">
             <a:spAutoFit/>
           </a:bodyPr>
           <a:lstStyle/>
@@ -13722,7 +14114,7 @@
           <a:noFill/>
         </p:spPr>
         <p:txBody>
-          <a:bodyPr wrap="square" anchor="t" lIns="45720" rIns="45720">
+          <a:bodyPr wrap="square" lIns="45720" rIns="45720" anchor="t">
             <a:spAutoFit/>
           </a:bodyPr>
           <a:lstStyle/>
@@ -13781,7 +14173,9 @@
         <p:txBody>
           <a:bodyPr rtlCol="0" anchor="ctr"/>
           <a:lstStyle/>
-          <a:p/>
+          <a:p>
+            <a:endParaRPr/>
+          </a:p>
         </p:txBody>
       </p:sp>
       <p:sp>
@@ -13801,7 +14195,7 @@
           <a:noFill/>
         </p:spPr>
         <p:txBody>
-          <a:bodyPr wrap="square" anchor="ctr" lIns="45720" rIns="45720">
+          <a:bodyPr wrap="square" lIns="45720" rIns="45720" anchor="ctr">
             <a:spAutoFit/>
           </a:bodyPr>
           <a:lstStyle/>
@@ -13836,7 +14230,7 @@
           <a:noFill/>
         </p:spPr>
         <p:txBody>
-          <a:bodyPr wrap="square" anchor="t" lIns="45720" rIns="45720">
+          <a:bodyPr wrap="square" lIns="45720" rIns="45720" anchor="t">
             <a:spAutoFit/>
           </a:bodyPr>
           <a:lstStyle/>
@@ -13893,7 +14287,7 @@
           </a:fontRef>
         </p:style>
         <p:txBody>
-          <a:bodyPr rtlCol="0" anchor="ctr" wrap="square" lIns="73152" rIns="73152"/>
+          <a:bodyPr wrap="square" lIns="73152" rIns="73152" rtlCol="0" anchor="ctr"/>
           <a:lstStyle/>
           <a:p>
             <a:pPr algn="ctr"/>
@@ -13962,6 +14356,7 @@
           <a:lstStyle/>
           <a:p>
             <a:pPr algn="ctr"/>
+            <a:endParaRPr/>
           </a:p>
         </p:txBody>
       </p:sp>
@@ -14004,7 +14399,7 @@
           </a:fontRef>
         </p:style>
         <p:txBody>
-          <a:bodyPr rtlCol="0" anchor="ctr" wrap="square" lIns="73152" rIns="73152"/>
+          <a:bodyPr wrap="square" lIns="73152" rIns="73152" rtlCol="0" anchor="ctr"/>
           <a:lstStyle/>
           <a:p>
             <a:pPr algn="ctr"/>
@@ -14073,6 +14468,7 @@
           <a:lstStyle/>
           <a:p>
             <a:pPr algn="ctr"/>
+            <a:endParaRPr/>
           </a:p>
         </p:txBody>
       </p:sp>
@@ -14115,7 +14511,7 @@
           </a:fontRef>
         </p:style>
         <p:txBody>
-          <a:bodyPr rtlCol="0" anchor="ctr" wrap="square" lIns="73152" rIns="73152"/>
+          <a:bodyPr wrap="square" lIns="73152" rIns="73152" rtlCol="0" anchor="ctr"/>
           <a:lstStyle/>
           <a:p>
             <a:pPr algn="ctr"/>
@@ -14184,6 +14580,7 @@
           <a:lstStyle/>
           <a:p>
             <a:pPr algn="ctr"/>
+            <a:endParaRPr/>
           </a:p>
         </p:txBody>
       </p:sp>
@@ -14226,7 +14623,7 @@
           </a:fontRef>
         </p:style>
         <p:txBody>
-          <a:bodyPr rtlCol="0" anchor="ctr" wrap="square" lIns="73152" rIns="73152"/>
+          <a:bodyPr wrap="square" lIns="73152" rIns="73152" rtlCol="0" anchor="ctr"/>
           <a:lstStyle/>
           <a:p>
             <a:pPr algn="ctr"/>
@@ -14295,7 +14692,9 @@
         <p:txBody>
           <a:bodyPr rtlCol="0" anchor="ctr"/>
           <a:lstStyle/>
-          <a:p/>
+          <a:p>
+            <a:endParaRPr/>
+          </a:p>
         </p:txBody>
       </p:sp>
       <p:sp>
@@ -14408,7 +14807,7 @@
 </file>
 
 <file path=ppt/slides/slide19.xml><?xml version="1.0" encoding="utf-8"?>
-<p:sld xmlns:a="http://schemas.openxmlformats.org/drawingml/2006/main" xmlns:p="http://schemas.openxmlformats.org/presentationml/2006/main" xmlns:r="http://schemas.openxmlformats.org/officeDocument/2006/relationships">
+<p:sld xmlns:a="http://schemas.openxmlformats.org/drawingml/2006/main" xmlns:r="http://schemas.openxmlformats.org/officeDocument/2006/relationships" xmlns:p="http://schemas.openxmlformats.org/presentationml/2006/main">
   <p:cSld>
     <p:spTree>
       <p:nvGrpSpPr>
@@ -14416,7 +14815,14 @@
         <p:cNvGrpSpPr/>
         <p:nvPr/>
       </p:nvGrpSpPr>
-      <p:grpSpPr/>
+      <p:grpSpPr>
+        <a:xfrm>
+          <a:off x="0" y="0"/>
+          <a:ext cx="0" cy="0"/>
+          <a:chOff x="0" y="0"/>
+          <a:chExt cx="0" cy="0"/>
+        </a:xfrm>
+      </p:grpSpPr>
       <p:sp>
         <p:nvSpPr>
           <p:cNvPr id="2" name="TextBox 1"/>
@@ -14434,7 +14840,7 @@
           <a:noFill/>
         </p:spPr>
         <p:txBody>
-          <a:bodyPr wrap="square" anchor="t" lIns="45720" rIns="45720">
+          <a:bodyPr wrap="square" lIns="45720" rIns="45720" anchor="t">
             <a:spAutoFit/>
           </a:bodyPr>
           <a:lstStyle/>
@@ -14469,7 +14875,7 @@
           <a:noFill/>
         </p:spPr>
         <p:txBody>
-          <a:bodyPr wrap="square" anchor="ctr" lIns="45720" rIns="45720">
+          <a:bodyPr wrap="square" lIns="45720" rIns="45720" anchor="ctr">
             <a:spAutoFit/>
           </a:bodyPr>
           <a:lstStyle/>
@@ -14504,7 +14910,7 @@
           <a:noFill/>
         </p:spPr>
         <p:txBody>
-          <a:bodyPr wrap="square" anchor="t" lIns="45720" rIns="45720">
+          <a:bodyPr wrap="square" lIns="45720" rIns="45720" anchor="t">
             <a:spAutoFit/>
           </a:bodyPr>
           <a:lstStyle/>
@@ -14539,7 +14945,7 @@
           <a:noFill/>
         </p:spPr>
         <p:txBody>
-          <a:bodyPr wrap="square" anchor="t" lIns="45720" rIns="45720">
+          <a:bodyPr wrap="square" lIns="45720" rIns="45720" anchor="t">
             <a:spAutoFit/>
           </a:bodyPr>
           <a:lstStyle/>
@@ -14598,7 +15004,9 @@
         <p:txBody>
           <a:bodyPr rtlCol="0" anchor="ctr"/>
           <a:lstStyle/>
-          <a:p/>
+          <a:p>
+            <a:endParaRPr/>
+          </a:p>
         </p:txBody>
       </p:sp>
       <p:sp>
@@ -14618,7 +15026,7 @@
           <a:noFill/>
         </p:spPr>
         <p:txBody>
-          <a:bodyPr wrap="square" anchor="ctr" lIns="45720" rIns="45720">
+          <a:bodyPr wrap="square" lIns="45720" rIns="45720" anchor="ctr">
             <a:spAutoFit/>
           </a:bodyPr>
           <a:lstStyle/>
@@ -14830,19 +15238,43 @@
         <a:graphic>
           <a:graphicData uri="http://schemas.openxmlformats.org/drawingml/2006/table">
             <a:tbl>
-              <a:tblPr firstRow="0" bandRow="0">
+              <a:tblPr>
                 <a:tableStyleId>{5C22544A-7EE6-4342-B048-85BDC9FD1C3A}</a:tableStyleId>
               </a:tblPr>
               <a:tblGrid>
-                <a:gridCol w="1188720"/>
-                <a:gridCol w="2651760"/>
-                <a:gridCol w="731520"/>
-                <a:gridCol w="2057400"/>
+                <a:gridCol w="1188720">
+                  <a:extLst>
+                    <a:ext uri="{9D8B030D-6E8A-4147-A177-3AD203B41FA5}">
+                      <a16:colId xmlns:a16="http://schemas.microsoft.com/office/drawing/2014/main" val="20000"/>
+                    </a:ext>
+                  </a:extLst>
+                </a:gridCol>
+                <a:gridCol w="2651760">
+                  <a:extLst>
+                    <a:ext uri="{9D8B030D-6E8A-4147-A177-3AD203B41FA5}">
+                      <a16:colId xmlns:a16="http://schemas.microsoft.com/office/drawing/2014/main" val="20001"/>
+                    </a:ext>
+                  </a:extLst>
+                </a:gridCol>
+                <a:gridCol w="731520">
+                  <a:extLst>
+                    <a:ext uri="{9D8B030D-6E8A-4147-A177-3AD203B41FA5}">
+                      <a16:colId xmlns:a16="http://schemas.microsoft.com/office/drawing/2014/main" val="20002"/>
+                    </a:ext>
+                  </a:extLst>
+                </a:gridCol>
+                <a:gridCol w="2057400">
+                  <a:extLst>
+                    <a:ext uri="{9D8B030D-6E8A-4147-A177-3AD203B41FA5}">
+                      <a16:colId xmlns:a16="http://schemas.microsoft.com/office/drawing/2014/main" val="20003"/>
+                    </a:ext>
+                  </a:extLst>
+                </a:gridCol>
               </a:tblGrid>
               <a:tr h="457200">
                 <a:tc>
                   <a:txBody>
-                    <a:bodyPr wrap="square"/>
+                    <a:bodyPr/>
                     <a:lstStyle/>
                     <a:p>
                       <a:r>
@@ -14864,7 +15296,7 @@
                 </a:tc>
                 <a:tc>
                   <a:txBody>
-                    <a:bodyPr wrap="square"/>
+                    <a:bodyPr/>
                     <a:lstStyle/>
                     <a:p>
                       <a:r>
@@ -14886,7 +15318,7 @@
                 </a:tc>
                 <a:tc>
                   <a:txBody>
-                    <a:bodyPr wrap="square"/>
+                    <a:bodyPr/>
                     <a:lstStyle/>
                     <a:p>
                       <a:r>
@@ -14908,7 +15340,7 @@
                 </a:tc>
                 <a:tc>
                   <a:txBody>
-                    <a:bodyPr wrap="square"/>
+                    <a:bodyPr/>
                     <a:lstStyle/>
                     <a:p>
                       <a:r>
@@ -14928,11 +15360,16 @@
                     </a:solidFill>
                   </a:tcPr>
                 </a:tc>
+                <a:extLst>
+                  <a:ext uri="{0D108BD9-81ED-4DB2-BD59-A6C34878D82A}">
+                    <a16:rowId xmlns:a16="http://schemas.microsoft.com/office/drawing/2014/main" val="10000"/>
+                  </a:ext>
+                </a:extLst>
               </a:tr>
               <a:tr h="457200">
                 <a:tc>
                   <a:txBody>
-                    <a:bodyPr wrap="square"/>
+                    <a:bodyPr/>
                     <a:lstStyle/>
                     <a:p>
                       <a:r>
@@ -14954,7 +15391,7 @@
                 </a:tc>
                 <a:tc>
                   <a:txBody>
-                    <a:bodyPr wrap="square"/>
+                    <a:bodyPr/>
                     <a:lstStyle/>
                     <a:p>
                       <a:r>
@@ -14976,7 +15413,7 @@
                 </a:tc>
                 <a:tc>
                   <a:txBody>
-                    <a:bodyPr wrap="square"/>
+                    <a:bodyPr/>
                     <a:lstStyle/>
                     <a:p>
                       <a:r>
@@ -14998,7 +15435,7 @@
                 </a:tc>
                 <a:tc>
                   <a:txBody>
-                    <a:bodyPr wrap="square"/>
+                    <a:bodyPr/>
                     <a:lstStyle/>
                     <a:p>
                       <a:r>
@@ -15018,11 +15455,16 @@
                     </a:solidFill>
                   </a:tcPr>
                 </a:tc>
+                <a:extLst>
+                  <a:ext uri="{0D108BD9-81ED-4DB2-BD59-A6C34878D82A}">
+                    <a16:rowId xmlns:a16="http://schemas.microsoft.com/office/drawing/2014/main" val="10001"/>
+                  </a:ext>
+                </a:extLst>
               </a:tr>
               <a:tr h="457200">
                 <a:tc>
                   <a:txBody>
-                    <a:bodyPr wrap="square"/>
+                    <a:bodyPr/>
                     <a:lstStyle/>
                     <a:p>
                       <a:r>
@@ -15044,7 +15486,7 @@
                 </a:tc>
                 <a:tc>
                   <a:txBody>
-                    <a:bodyPr wrap="square"/>
+                    <a:bodyPr/>
                     <a:lstStyle/>
                     <a:p>
                       <a:r>
@@ -15066,7 +15508,7 @@
                 </a:tc>
                 <a:tc>
                   <a:txBody>
-                    <a:bodyPr wrap="square"/>
+                    <a:bodyPr/>
                     <a:lstStyle/>
                     <a:p>
                       <a:r>
@@ -15088,7 +15530,7 @@
                 </a:tc>
                 <a:tc>
                   <a:txBody>
-                    <a:bodyPr wrap="square"/>
+                    <a:bodyPr/>
                     <a:lstStyle/>
                     <a:p>
                       <a:r>
@@ -15108,11 +15550,16 @@
                     </a:solidFill>
                   </a:tcPr>
                 </a:tc>
+                <a:extLst>
+                  <a:ext uri="{0D108BD9-81ED-4DB2-BD59-A6C34878D82A}">
+                    <a16:rowId xmlns:a16="http://schemas.microsoft.com/office/drawing/2014/main" val="10002"/>
+                  </a:ext>
+                </a:extLst>
               </a:tr>
               <a:tr h="457200">
                 <a:tc>
                   <a:txBody>
-                    <a:bodyPr wrap="square"/>
+                    <a:bodyPr/>
                     <a:lstStyle/>
                     <a:p>
                       <a:r>
@@ -15134,7 +15581,7 @@
                 </a:tc>
                 <a:tc>
                   <a:txBody>
-                    <a:bodyPr wrap="square"/>
+                    <a:bodyPr/>
                     <a:lstStyle/>
                     <a:p>
                       <a:r>
@@ -15156,7 +15603,7 @@
                 </a:tc>
                 <a:tc>
                   <a:txBody>
-                    <a:bodyPr wrap="square"/>
+                    <a:bodyPr/>
                     <a:lstStyle/>
                     <a:p>
                       <a:r>
@@ -15178,7 +15625,7 @@
                 </a:tc>
                 <a:tc>
                   <a:txBody>
-                    <a:bodyPr wrap="square"/>
+                    <a:bodyPr/>
                     <a:lstStyle/>
                     <a:p>
                       <a:r>
@@ -15198,11 +15645,16 @@
                     </a:solidFill>
                   </a:tcPr>
                 </a:tc>
+                <a:extLst>
+                  <a:ext uri="{0D108BD9-81ED-4DB2-BD59-A6C34878D82A}">
+                    <a16:rowId xmlns:a16="http://schemas.microsoft.com/office/drawing/2014/main" val="10003"/>
+                  </a:ext>
+                </a:extLst>
               </a:tr>
               <a:tr h="457200">
                 <a:tc>
                   <a:txBody>
-                    <a:bodyPr wrap="square"/>
+                    <a:bodyPr/>
                     <a:lstStyle/>
                     <a:p>
                       <a:r>
@@ -15224,7 +15676,7 @@
                 </a:tc>
                 <a:tc>
                   <a:txBody>
-                    <a:bodyPr wrap="square"/>
+                    <a:bodyPr/>
                     <a:lstStyle/>
                     <a:p>
                       <a:r>
@@ -15246,7 +15698,7 @@
                 </a:tc>
                 <a:tc>
                   <a:txBody>
-                    <a:bodyPr wrap="square"/>
+                    <a:bodyPr/>
                     <a:lstStyle/>
                     <a:p>
                       <a:r>
@@ -15268,7 +15720,7 @@
                 </a:tc>
                 <a:tc>
                   <a:txBody>
-                    <a:bodyPr wrap="square"/>
+                    <a:bodyPr/>
                     <a:lstStyle/>
                     <a:p>
                       <a:r>
@@ -15288,6 +15740,11 @@
                     </a:solidFill>
                   </a:tcPr>
                 </a:tc>
+                <a:extLst>
+                  <a:ext uri="{0D108BD9-81ED-4DB2-BD59-A6C34878D82A}">
+                    <a16:rowId xmlns:a16="http://schemas.microsoft.com/office/drawing/2014/main" val="10004"/>
+                  </a:ext>
+                </a:extLst>
               </a:tr>
             </a:tbl>
           </a:graphicData>
@@ -15334,7 +15791,9 @@
         <p:txBody>
           <a:bodyPr rtlCol="0" anchor="ctr"/>
           <a:lstStyle/>
-          <a:p/>
+          <a:p>
+            <a:endParaRPr/>
+          </a:p>
         </p:txBody>
       </p:sp>
       <p:sp>
@@ -15447,7 +15906,7 @@
 </file>
 
 <file path=ppt/slides/slide2.xml><?xml version="1.0" encoding="utf-8"?>
-<p:sld xmlns:a="http://schemas.openxmlformats.org/drawingml/2006/main" xmlns:p="http://schemas.openxmlformats.org/presentationml/2006/main" xmlns:r="http://schemas.openxmlformats.org/officeDocument/2006/relationships">
+<p:sld xmlns:a="http://schemas.openxmlformats.org/drawingml/2006/main" xmlns:r="http://schemas.openxmlformats.org/officeDocument/2006/relationships" xmlns:p="http://schemas.openxmlformats.org/presentationml/2006/main">
   <p:cSld>
     <p:spTree>
       <p:nvGrpSpPr>
@@ -15455,7 +15914,14 @@
         <p:cNvGrpSpPr/>
         <p:nvPr/>
       </p:nvGrpSpPr>
-      <p:grpSpPr/>
+      <p:grpSpPr>
+        <a:xfrm>
+          <a:off x="0" y="0"/>
+          <a:ext cx="0" cy="0"/>
+          <a:chOff x="0" y="0"/>
+          <a:chExt cx="0" cy="0"/>
+        </a:xfrm>
+      </p:grpSpPr>
       <p:sp>
         <p:nvSpPr>
           <p:cNvPr id="2" name="TextBox 1"/>
@@ -15473,7 +15939,7 @@
           <a:noFill/>
         </p:spPr>
         <p:txBody>
-          <a:bodyPr wrap="square" anchor="t" lIns="45720" rIns="45720">
+          <a:bodyPr wrap="square" lIns="45720" rIns="45720" anchor="t">
             <a:spAutoFit/>
           </a:bodyPr>
           <a:lstStyle/>
@@ -15508,7 +15974,7 @@
           <a:noFill/>
         </p:spPr>
         <p:txBody>
-          <a:bodyPr wrap="square" anchor="ctr" lIns="45720" rIns="45720">
+          <a:bodyPr wrap="square" lIns="45720" rIns="45720" anchor="ctr">
             <a:spAutoFit/>
           </a:bodyPr>
           <a:lstStyle/>
@@ -15543,7 +16009,7 @@
           <a:noFill/>
         </p:spPr>
         <p:txBody>
-          <a:bodyPr wrap="square" anchor="t" lIns="45720" rIns="45720">
+          <a:bodyPr wrap="square" lIns="45720" rIns="45720" anchor="t">
             <a:spAutoFit/>
           </a:bodyPr>
           <a:lstStyle/>
@@ -15578,7 +16044,7 @@
           <a:noFill/>
         </p:spPr>
         <p:txBody>
-          <a:bodyPr wrap="square" anchor="t" lIns="45720" rIns="45720">
+          <a:bodyPr wrap="square" lIns="45720" rIns="45720" anchor="t">
             <a:spAutoFit/>
           </a:bodyPr>
           <a:lstStyle/>
@@ -15637,7 +16103,9 @@
         <p:txBody>
           <a:bodyPr rtlCol="0" anchor="ctr"/>
           <a:lstStyle/>
-          <a:p/>
+          <a:p>
+            <a:endParaRPr/>
+          </a:p>
         </p:txBody>
       </p:sp>
       <p:sp>
@@ -15657,7 +16125,7 @@
           <a:noFill/>
         </p:spPr>
         <p:txBody>
-          <a:bodyPr wrap="square" anchor="t" lIns="45720" rIns="45720">
+          <a:bodyPr wrap="square" lIns="45720" rIns="45720" anchor="t">
             <a:spAutoFit/>
           </a:bodyPr>
           <a:lstStyle/>
@@ -15692,7 +16160,7 @@
           <a:noFill/>
         </p:spPr>
         <p:txBody>
-          <a:bodyPr wrap="square" anchor="t" lIns="45720" rIns="45720">
+          <a:bodyPr wrap="square" lIns="45720" rIns="45720" anchor="t">
             <a:spAutoFit/>
           </a:bodyPr>
           <a:lstStyle/>
@@ -15727,7 +16195,7 @@
           <a:noFill/>
         </p:spPr>
         <p:txBody>
-          <a:bodyPr wrap="square" anchor="t" lIns="45720" rIns="45720">
+          <a:bodyPr wrap="square" lIns="45720" rIns="45720" anchor="t">
             <a:spAutoFit/>
           </a:bodyPr>
           <a:lstStyle/>
@@ -15786,7 +16254,9 @@
         <p:txBody>
           <a:bodyPr rtlCol="0" anchor="ctr"/>
           <a:lstStyle/>
-          <a:p/>
+          <a:p>
+            <a:endParaRPr/>
+          </a:p>
         </p:txBody>
       </p:sp>
       <p:sp>
@@ -15806,7 +16276,7 @@
           <a:noFill/>
         </p:spPr>
         <p:txBody>
-          <a:bodyPr wrap="square" anchor="t" lIns="45720" rIns="45720">
+          <a:bodyPr wrap="square" lIns="45720" rIns="45720" anchor="t">
             <a:spAutoFit/>
           </a:bodyPr>
           <a:lstStyle/>
@@ -15841,7 +16311,7 @@
           <a:noFill/>
         </p:spPr>
         <p:txBody>
-          <a:bodyPr wrap="square" anchor="t" lIns="45720" rIns="45720">
+          <a:bodyPr wrap="square" lIns="45720" rIns="45720" anchor="t">
             <a:spAutoFit/>
           </a:bodyPr>
           <a:lstStyle/>
@@ -15876,7 +16346,7 @@
           <a:noFill/>
         </p:spPr>
         <p:txBody>
-          <a:bodyPr wrap="square" anchor="t" lIns="45720" rIns="45720">
+          <a:bodyPr wrap="square" lIns="45720" rIns="45720" anchor="t">
             <a:spAutoFit/>
           </a:bodyPr>
           <a:lstStyle/>
@@ -15935,7 +16405,9 @@
         <p:txBody>
           <a:bodyPr rtlCol="0" anchor="ctr"/>
           <a:lstStyle/>
-          <a:p/>
+          <a:p>
+            <a:endParaRPr/>
+          </a:p>
         </p:txBody>
       </p:sp>
       <p:sp>
@@ -15955,7 +16427,7 @@
           <a:noFill/>
         </p:spPr>
         <p:txBody>
-          <a:bodyPr wrap="square" anchor="t" lIns="45720" rIns="45720">
+          <a:bodyPr wrap="square" lIns="45720" rIns="45720" anchor="t">
             <a:spAutoFit/>
           </a:bodyPr>
           <a:lstStyle/>
@@ -15990,7 +16462,7 @@
           <a:noFill/>
         </p:spPr>
         <p:txBody>
-          <a:bodyPr wrap="square" anchor="t" lIns="45720" rIns="45720">
+          <a:bodyPr wrap="square" lIns="45720" rIns="45720" anchor="t">
             <a:spAutoFit/>
           </a:bodyPr>
           <a:lstStyle/>
@@ -16025,7 +16497,7 @@
           <a:noFill/>
         </p:spPr>
         <p:txBody>
-          <a:bodyPr wrap="square" anchor="t" lIns="45720" rIns="45720">
+          <a:bodyPr wrap="square" lIns="45720" rIns="45720" anchor="t">
             <a:spAutoFit/>
           </a:bodyPr>
           <a:lstStyle/>
@@ -16084,7 +16556,9 @@
         <p:txBody>
           <a:bodyPr rtlCol="0" anchor="ctr"/>
           <a:lstStyle/>
-          <a:p/>
+          <a:p>
+            <a:endParaRPr/>
+          </a:p>
         </p:txBody>
       </p:sp>
       <p:sp>
@@ -16104,7 +16578,7 @@
           <a:noFill/>
         </p:spPr>
         <p:txBody>
-          <a:bodyPr wrap="square" anchor="t" lIns="45720" rIns="45720">
+          <a:bodyPr wrap="square" lIns="45720" rIns="45720" anchor="t">
             <a:spAutoFit/>
           </a:bodyPr>
           <a:lstStyle/>
@@ -16139,7 +16613,7 @@
           <a:noFill/>
         </p:spPr>
         <p:txBody>
-          <a:bodyPr wrap="square" anchor="t" lIns="45720" rIns="45720">
+          <a:bodyPr wrap="square" lIns="45720" rIns="45720" anchor="t">
             <a:spAutoFit/>
           </a:bodyPr>
           <a:lstStyle/>
@@ -16174,7 +16648,7 @@
           <a:noFill/>
         </p:spPr>
         <p:txBody>
-          <a:bodyPr wrap="square" anchor="t" lIns="45720" rIns="45720">
+          <a:bodyPr wrap="square" lIns="45720" rIns="45720" anchor="t">
             <a:spAutoFit/>
           </a:bodyPr>
           <a:lstStyle/>
@@ -16209,7 +16683,7 @@
           <a:noFill/>
         </p:spPr>
         <p:txBody>
-          <a:bodyPr wrap="square" anchor="t" lIns="45720" rIns="45720">
+          <a:bodyPr wrap="square" lIns="45720" rIns="45720" anchor="t">
             <a:spAutoFit/>
           </a:bodyPr>
           <a:lstStyle/>
@@ -16248,7 +16722,7 @@
 </file>
 
 <file path=ppt/slides/slide20.xml><?xml version="1.0" encoding="utf-8"?>
-<p:sld xmlns:a="http://schemas.openxmlformats.org/drawingml/2006/main" xmlns:p="http://schemas.openxmlformats.org/presentationml/2006/main" xmlns:r="http://schemas.openxmlformats.org/officeDocument/2006/relationships">
+<p:sld xmlns:a="http://schemas.openxmlformats.org/drawingml/2006/main" xmlns:r="http://schemas.openxmlformats.org/officeDocument/2006/relationships" xmlns:p="http://schemas.openxmlformats.org/presentationml/2006/main">
   <p:cSld>
     <p:spTree>
       <p:nvGrpSpPr>
@@ -16256,7 +16730,14 @@
         <p:cNvGrpSpPr/>
         <p:nvPr/>
       </p:nvGrpSpPr>
-      <p:grpSpPr/>
+      <p:grpSpPr>
+        <a:xfrm>
+          <a:off x="0" y="0"/>
+          <a:ext cx="0" cy="0"/>
+          <a:chOff x="0" y="0"/>
+          <a:chExt cx="0" cy="0"/>
+        </a:xfrm>
+      </p:grpSpPr>
       <p:sp>
         <p:nvSpPr>
           <p:cNvPr id="2" name="TextBox 1"/>
@@ -16274,7 +16755,7 @@
           <a:noFill/>
         </p:spPr>
         <p:txBody>
-          <a:bodyPr wrap="square" anchor="t" lIns="45720" rIns="45720">
+          <a:bodyPr wrap="square" lIns="45720" rIns="45720" anchor="t">
             <a:spAutoFit/>
           </a:bodyPr>
           <a:lstStyle/>
@@ -16309,7 +16790,7 @@
           <a:noFill/>
         </p:spPr>
         <p:txBody>
-          <a:bodyPr wrap="square" anchor="ctr" lIns="45720" rIns="45720">
+          <a:bodyPr wrap="square" lIns="45720" rIns="45720" anchor="ctr">
             <a:spAutoFit/>
           </a:bodyPr>
           <a:lstStyle/>
@@ -16344,7 +16825,7 @@
           <a:noFill/>
         </p:spPr>
         <p:txBody>
-          <a:bodyPr wrap="square" anchor="t" lIns="45720" rIns="45720">
+          <a:bodyPr wrap="square" lIns="45720" rIns="45720" anchor="t">
             <a:spAutoFit/>
           </a:bodyPr>
           <a:lstStyle/>
@@ -16379,7 +16860,7 @@
           <a:noFill/>
         </p:spPr>
         <p:txBody>
-          <a:bodyPr wrap="square" anchor="t" lIns="45720" rIns="45720">
+          <a:bodyPr wrap="square" lIns="45720" rIns="45720" anchor="t">
             <a:spAutoFit/>
           </a:bodyPr>
           <a:lstStyle/>
@@ -16436,7 +16917,7 @@
           </a:fontRef>
         </p:style>
         <p:txBody>
-          <a:bodyPr rtlCol="0" anchor="ctr" wrap="square" lIns="73152" rIns="73152"/>
+          <a:bodyPr wrap="square" lIns="73152" rIns="73152" rtlCol="0" anchor="ctr"/>
           <a:lstStyle/>
           <a:p>
             <a:pPr algn="ctr"/>
@@ -16493,7 +16974,9 @@
         <p:txBody>
           <a:bodyPr rtlCol="0" anchor="ctr"/>
           <a:lstStyle/>
-          <a:p/>
+          <a:p>
+            <a:endParaRPr/>
+          </a:p>
         </p:txBody>
       </p:sp>
       <p:sp>
@@ -16513,7 +16996,7 @@
           <a:noFill/>
         </p:spPr>
         <p:txBody>
-          <a:bodyPr wrap="square" anchor="t" lIns="45720" rIns="45720">
+          <a:bodyPr wrap="square" lIns="45720" rIns="45720" anchor="t">
             <a:spAutoFit/>
           </a:bodyPr>
           <a:lstStyle/>
@@ -16570,7 +17053,7 @@
           </a:fontRef>
         </p:style>
         <p:txBody>
-          <a:bodyPr rtlCol="0" anchor="ctr" wrap="square" lIns="73152" rIns="73152"/>
+          <a:bodyPr wrap="square" lIns="73152" rIns="73152" rtlCol="0" anchor="ctr"/>
           <a:lstStyle/>
           <a:p>
             <a:pPr algn="ctr"/>
@@ -16627,7 +17110,9 @@
         <p:txBody>
           <a:bodyPr rtlCol="0" anchor="ctr"/>
           <a:lstStyle/>
-          <a:p/>
+          <a:p>
+            <a:endParaRPr/>
+          </a:p>
         </p:txBody>
       </p:sp>
       <p:sp>
@@ -16647,7 +17132,7 @@
           <a:noFill/>
         </p:spPr>
         <p:txBody>
-          <a:bodyPr wrap="square" anchor="t" lIns="45720" rIns="45720">
+          <a:bodyPr wrap="square" lIns="45720" rIns="45720" anchor="t">
             <a:spAutoFit/>
           </a:bodyPr>
           <a:lstStyle/>
@@ -16704,7 +17189,7 @@
           </a:fontRef>
         </p:style>
         <p:txBody>
-          <a:bodyPr rtlCol="0" anchor="ctr" wrap="square" lIns="73152" rIns="73152"/>
+          <a:bodyPr wrap="square" lIns="73152" rIns="73152" rtlCol="0" anchor="ctr"/>
           <a:lstStyle/>
           <a:p>
             <a:pPr algn="ctr"/>
@@ -16761,7 +17246,9 @@
         <p:txBody>
           <a:bodyPr rtlCol="0" anchor="ctr"/>
           <a:lstStyle/>
-          <a:p/>
+          <a:p>
+            <a:endParaRPr/>
+          </a:p>
         </p:txBody>
       </p:sp>
       <p:sp>
@@ -16781,7 +17268,7 @@
           <a:noFill/>
         </p:spPr>
         <p:txBody>
-          <a:bodyPr wrap="square" anchor="t" lIns="45720" rIns="45720">
+          <a:bodyPr wrap="square" lIns="45720" rIns="45720" anchor="t">
             <a:spAutoFit/>
           </a:bodyPr>
           <a:lstStyle/>
@@ -16838,7 +17325,7 @@
           </a:fontRef>
         </p:style>
         <p:txBody>
-          <a:bodyPr rtlCol="0" anchor="ctr" wrap="square" lIns="73152" rIns="73152"/>
+          <a:bodyPr wrap="square" lIns="73152" rIns="73152" rtlCol="0" anchor="ctr"/>
           <a:lstStyle/>
           <a:p>
             <a:pPr algn="ctr"/>
@@ -16895,7 +17382,9 @@
         <p:txBody>
           <a:bodyPr rtlCol="0" anchor="ctr"/>
           <a:lstStyle/>
-          <a:p/>
+          <a:p>
+            <a:endParaRPr/>
+          </a:p>
         </p:txBody>
       </p:sp>
       <p:sp>
@@ -16915,7 +17404,7 @@
           <a:noFill/>
         </p:spPr>
         <p:txBody>
-          <a:bodyPr wrap="square" anchor="t" lIns="45720" rIns="45720">
+          <a:bodyPr wrap="square" lIns="45720" rIns="45720" anchor="t">
             <a:spAutoFit/>
           </a:bodyPr>
           <a:lstStyle/>
@@ -16972,7 +17461,7 @@
           </a:fontRef>
         </p:style>
         <p:txBody>
-          <a:bodyPr rtlCol="0" anchor="ctr" wrap="square" lIns="73152" rIns="73152"/>
+          <a:bodyPr wrap="square" lIns="73152" rIns="73152" rtlCol="0" anchor="ctr"/>
           <a:lstStyle/>
           <a:p>
             <a:pPr algn="ctr"/>
@@ -17029,7 +17518,9 @@
         <p:txBody>
           <a:bodyPr rtlCol="0" anchor="ctr"/>
           <a:lstStyle/>
-          <a:p/>
+          <a:p>
+            <a:endParaRPr/>
+          </a:p>
         </p:txBody>
       </p:sp>
       <p:sp>
@@ -17049,7 +17540,7 @@
           <a:noFill/>
         </p:spPr>
         <p:txBody>
-          <a:bodyPr wrap="square" anchor="t" lIns="45720" rIns="45720">
+          <a:bodyPr wrap="square" lIns="45720" rIns="45720" anchor="t">
             <a:spAutoFit/>
           </a:bodyPr>
           <a:lstStyle/>
@@ -17108,7 +17599,9 @@
         <p:txBody>
           <a:bodyPr rtlCol="0" anchor="ctr"/>
           <a:lstStyle/>
-          <a:p/>
+          <a:p>
+            <a:endParaRPr/>
+          </a:p>
         </p:txBody>
       </p:sp>
       <p:sp>
@@ -17128,7 +17621,7 @@
           <a:noFill/>
         </p:spPr>
         <p:txBody>
-          <a:bodyPr wrap="square" anchor="ctr" lIns="45720" rIns="45720">
+          <a:bodyPr wrap="square" lIns="45720" rIns="45720" anchor="ctr">
             <a:spAutoFit/>
           </a:bodyPr>
           <a:lstStyle/>
@@ -17314,7 +17807,9 @@
         <p:txBody>
           <a:bodyPr rtlCol="0" anchor="ctr"/>
           <a:lstStyle/>
-          <a:p/>
+          <a:p>
+            <a:endParaRPr/>
+          </a:p>
         </p:txBody>
       </p:sp>
       <p:sp>
@@ -17334,7 +17829,7 @@
           <a:noFill/>
         </p:spPr>
         <p:txBody>
-          <a:bodyPr wrap="square" anchor="ctr" lIns="45720" rIns="45720">
+          <a:bodyPr wrap="square" lIns="45720" rIns="45720" anchor="ctr">
             <a:spAutoFit/>
           </a:bodyPr>
           <a:lstStyle/>
@@ -17469,7 +17964,7 @@
 </file>
 
 <file path=ppt/slides/slide21.xml><?xml version="1.0" encoding="utf-8"?>
-<p:sld xmlns:a="http://schemas.openxmlformats.org/drawingml/2006/main" xmlns:p="http://schemas.openxmlformats.org/presentationml/2006/main" xmlns:r="http://schemas.openxmlformats.org/officeDocument/2006/relationships">
+<p:sld xmlns:a="http://schemas.openxmlformats.org/drawingml/2006/main" xmlns:r="http://schemas.openxmlformats.org/officeDocument/2006/relationships" xmlns:p="http://schemas.openxmlformats.org/presentationml/2006/main">
   <p:cSld>
     <p:spTree>
       <p:nvGrpSpPr>
@@ -17477,7 +17972,14 @@
         <p:cNvGrpSpPr/>
         <p:nvPr/>
       </p:nvGrpSpPr>
-      <p:grpSpPr/>
+      <p:grpSpPr>
+        <a:xfrm>
+          <a:off x="0" y="0"/>
+          <a:ext cx="0" cy="0"/>
+          <a:chOff x="0" y="0"/>
+          <a:chExt cx="0" cy="0"/>
+        </a:xfrm>
+      </p:grpSpPr>
       <p:sp>
         <p:nvSpPr>
           <p:cNvPr id="2" name="TextBox 1"/>
@@ -17495,7 +17997,7 @@
           <a:noFill/>
         </p:spPr>
         <p:txBody>
-          <a:bodyPr wrap="square" anchor="t" lIns="45720" rIns="45720">
+          <a:bodyPr wrap="square" lIns="45720" rIns="45720" anchor="t">
             <a:spAutoFit/>
           </a:bodyPr>
           <a:lstStyle/>
@@ -17530,7 +18032,7 @@
           <a:noFill/>
         </p:spPr>
         <p:txBody>
-          <a:bodyPr wrap="square" anchor="ctr" lIns="45720" rIns="45720">
+          <a:bodyPr wrap="square" lIns="45720" rIns="45720" anchor="ctr">
             <a:spAutoFit/>
           </a:bodyPr>
           <a:lstStyle/>
@@ -17565,7 +18067,7 @@
           <a:noFill/>
         </p:spPr>
         <p:txBody>
-          <a:bodyPr wrap="square" anchor="t" lIns="45720" rIns="45720">
+          <a:bodyPr wrap="square" lIns="45720" rIns="45720" anchor="t">
             <a:spAutoFit/>
           </a:bodyPr>
           <a:lstStyle/>
@@ -17600,7 +18102,7 @@
           <a:noFill/>
         </p:spPr>
         <p:txBody>
-          <a:bodyPr wrap="square" anchor="t" lIns="45720" rIns="45720">
+          <a:bodyPr wrap="square" lIns="45720" rIns="45720" anchor="t">
             <a:spAutoFit/>
           </a:bodyPr>
           <a:lstStyle/>
@@ -17633,18 +18135,36 @@
         <a:graphic>
           <a:graphicData uri="http://schemas.openxmlformats.org/drawingml/2006/table">
             <a:tbl>
-              <a:tblPr firstRow="0" bandRow="0">
+              <a:tblPr>
                 <a:tableStyleId>{5C22544A-7EE6-4342-B048-85BDC9FD1C3A}</a:tableStyleId>
               </a:tblPr>
               <a:tblGrid>
-                <a:gridCol w="1554480"/>
-                <a:gridCol w="4389120"/>
-                <a:gridCol w="5120640"/>
+                <a:gridCol w="1554480">
+                  <a:extLst>
+                    <a:ext uri="{9D8B030D-6E8A-4147-A177-3AD203B41FA5}">
+                      <a16:colId xmlns:a16="http://schemas.microsoft.com/office/drawing/2014/main" val="20000"/>
+                    </a:ext>
+                  </a:extLst>
+                </a:gridCol>
+                <a:gridCol w="4389120">
+                  <a:extLst>
+                    <a:ext uri="{9D8B030D-6E8A-4147-A177-3AD203B41FA5}">
+                      <a16:colId xmlns:a16="http://schemas.microsoft.com/office/drawing/2014/main" val="20001"/>
+                    </a:ext>
+                  </a:extLst>
+                </a:gridCol>
+                <a:gridCol w="5120640">
+                  <a:extLst>
+                    <a:ext uri="{9D8B030D-6E8A-4147-A177-3AD203B41FA5}">
+                      <a16:colId xmlns:a16="http://schemas.microsoft.com/office/drawing/2014/main" val="20002"/>
+                    </a:ext>
+                  </a:extLst>
+                </a:gridCol>
               </a:tblGrid>
               <a:tr h="420624">
                 <a:tc>
                   <a:txBody>
-                    <a:bodyPr wrap="square"/>
+                    <a:bodyPr/>
                     <a:lstStyle/>
                     <a:p>
                       <a:r>
@@ -17666,7 +18186,7 @@
                 </a:tc>
                 <a:tc>
                   <a:txBody>
-                    <a:bodyPr wrap="square"/>
+                    <a:bodyPr/>
                     <a:lstStyle/>
                     <a:p>
                       <a:r>
@@ -17688,7 +18208,7 @@
                 </a:tc>
                 <a:tc>
                   <a:txBody>
-                    <a:bodyPr wrap="square"/>
+                    <a:bodyPr/>
                     <a:lstStyle/>
                     <a:p>
                       <a:r>
@@ -17708,11 +18228,16 @@
                     </a:solidFill>
                   </a:tcPr>
                 </a:tc>
+                <a:extLst>
+                  <a:ext uri="{0D108BD9-81ED-4DB2-BD59-A6C34878D82A}">
+                    <a16:rowId xmlns:a16="http://schemas.microsoft.com/office/drawing/2014/main" val="10000"/>
+                  </a:ext>
+                </a:extLst>
               </a:tr>
               <a:tr h="420624">
                 <a:tc>
                   <a:txBody>
-                    <a:bodyPr wrap="square"/>
+                    <a:bodyPr/>
                     <a:lstStyle/>
                     <a:p>
                       <a:r>
@@ -17734,7 +18259,7 @@
                 </a:tc>
                 <a:tc>
                   <a:txBody>
-                    <a:bodyPr wrap="square"/>
+                    <a:bodyPr/>
                     <a:lstStyle/>
                     <a:p>
                       <a:r>
@@ -17756,7 +18281,7 @@
                 </a:tc>
                 <a:tc>
                   <a:txBody>
-                    <a:bodyPr wrap="square"/>
+                    <a:bodyPr/>
                     <a:lstStyle/>
                     <a:p>
                       <a:r>
@@ -17776,11 +18301,16 @@
                     </a:solidFill>
                   </a:tcPr>
                 </a:tc>
+                <a:extLst>
+                  <a:ext uri="{0D108BD9-81ED-4DB2-BD59-A6C34878D82A}">
+                    <a16:rowId xmlns:a16="http://schemas.microsoft.com/office/drawing/2014/main" val="10001"/>
+                  </a:ext>
+                </a:extLst>
               </a:tr>
               <a:tr h="420624">
                 <a:tc>
                   <a:txBody>
-                    <a:bodyPr wrap="square"/>
+                    <a:bodyPr/>
                     <a:lstStyle/>
                     <a:p>
                       <a:r>
@@ -17802,7 +18332,7 @@
                 </a:tc>
                 <a:tc>
                   <a:txBody>
-                    <a:bodyPr wrap="square"/>
+                    <a:bodyPr/>
                     <a:lstStyle/>
                     <a:p>
                       <a:r>
@@ -17824,7 +18354,7 @@
                 </a:tc>
                 <a:tc>
                   <a:txBody>
-                    <a:bodyPr wrap="square"/>
+                    <a:bodyPr/>
                     <a:lstStyle/>
                     <a:p>
                       <a:r>
@@ -17844,11 +18374,16 @@
                     </a:solidFill>
                   </a:tcPr>
                 </a:tc>
+                <a:extLst>
+                  <a:ext uri="{0D108BD9-81ED-4DB2-BD59-A6C34878D82A}">
+                    <a16:rowId xmlns:a16="http://schemas.microsoft.com/office/drawing/2014/main" val="10002"/>
+                  </a:ext>
+                </a:extLst>
               </a:tr>
               <a:tr h="420624">
                 <a:tc>
                   <a:txBody>
-                    <a:bodyPr wrap="square"/>
+                    <a:bodyPr/>
                     <a:lstStyle/>
                     <a:p>
                       <a:r>
@@ -17870,7 +18405,7 @@
                 </a:tc>
                 <a:tc>
                   <a:txBody>
-                    <a:bodyPr wrap="square"/>
+                    <a:bodyPr/>
                     <a:lstStyle/>
                     <a:p>
                       <a:r>
@@ -17892,7 +18427,7 @@
                 </a:tc>
                 <a:tc>
                   <a:txBody>
-                    <a:bodyPr wrap="square"/>
+                    <a:bodyPr/>
                     <a:lstStyle/>
                     <a:p>
                       <a:r>
@@ -17912,11 +18447,16 @@
                     </a:solidFill>
                   </a:tcPr>
                 </a:tc>
+                <a:extLst>
+                  <a:ext uri="{0D108BD9-81ED-4DB2-BD59-A6C34878D82A}">
+                    <a16:rowId xmlns:a16="http://schemas.microsoft.com/office/drawing/2014/main" val="10003"/>
+                  </a:ext>
+                </a:extLst>
               </a:tr>
               <a:tr h="420624">
                 <a:tc>
                   <a:txBody>
-                    <a:bodyPr wrap="square"/>
+                    <a:bodyPr/>
                     <a:lstStyle/>
                     <a:p>
                       <a:r>
@@ -17938,7 +18478,7 @@
                 </a:tc>
                 <a:tc>
                   <a:txBody>
-                    <a:bodyPr wrap="square"/>
+                    <a:bodyPr/>
                     <a:lstStyle/>
                     <a:p>
                       <a:r>
@@ -17960,7 +18500,7 @@
                 </a:tc>
                 <a:tc>
                   <a:txBody>
-                    <a:bodyPr wrap="square"/>
+                    <a:bodyPr/>
                     <a:lstStyle/>
                     <a:p>
                       <a:r>
@@ -17980,11 +18520,16 @@
                     </a:solidFill>
                   </a:tcPr>
                 </a:tc>
+                <a:extLst>
+                  <a:ext uri="{0D108BD9-81ED-4DB2-BD59-A6C34878D82A}">
+                    <a16:rowId xmlns:a16="http://schemas.microsoft.com/office/drawing/2014/main" val="10004"/>
+                  </a:ext>
+                </a:extLst>
               </a:tr>
               <a:tr h="420624">
                 <a:tc>
                   <a:txBody>
-                    <a:bodyPr wrap="square"/>
+                    <a:bodyPr/>
                     <a:lstStyle/>
                     <a:p>
                       <a:r>
@@ -18006,7 +18551,7 @@
                 </a:tc>
                 <a:tc>
                   <a:txBody>
-                    <a:bodyPr wrap="square"/>
+                    <a:bodyPr/>
                     <a:lstStyle/>
                     <a:p>
                       <a:r>
@@ -18028,7 +18573,7 @@
                 </a:tc>
                 <a:tc>
                   <a:txBody>
-                    <a:bodyPr wrap="square"/>
+                    <a:bodyPr/>
                     <a:lstStyle/>
                     <a:p>
                       <a:r>
@@ -18048,11 +18593,16 @@
                     </a:solidFill>
                   </a:tcPr>
                 </a:tc>
+                <a:extLst>
+                  <a:ext uri="{0D108BD9-81ED-4DB2-BD59-A6C34878D82A}">
+                    <a16:rowId xmlns:a16="http://schemas.microsoft.com/office/drawing/2014/main" val="10005"/>
+                  </a:ext>
+                </a:extLst>
               </a:tr>
               <a:tr h="420624">
                 <a:tc>
                   <a:txBody>
-                    <a:bodyPr wrap="square"/>
+                    <a:bodyPr/>
                     <a:lstStyle/>
                     <a:p>
                       <a:r>
@@ -18074,7 +18624,7 @@
                 </a:tc>
                 <a:tc>
                   <a:txBody>
-                    <a:bodyPr wrap="square"/>
+                    <a:bodyPr/>
                     <a:lstStyle/>
                     <a:p>
                       <a:r>
@@ -18096,7 +18646,7 @@
                 </a:tc>
                 <a:tc>
                   <a:txBody>
-                    <a:bodyPr wrap="square"/>
+                    <a:bodyPr/>
                     <a:lstStyle/>
                     <a:p>
                       <a:r>
@@ -18116,11 +18666,16 @@
                     </a:solidFill>
                   </a:tcPr>
                 </a:tc>
+                <a:extLst>
+                  <a:ext uri="{0D108BD9-81ED-4DB2-BD59-A6C34878D82A}">
+                    <a16:rowId xmlns:a16="http://schemas.microsoft.com/office/drawing/2014/main" val="10006"/>
+                  </a:ext>
+                </a:extLst>
               </a:tr>
               <a:tr h="420624">
                 <a:tc>
                   <a:txBody>
-                    <a:bodyPr wrap="square"/>
+                    <a:bodyPr/>
                     <a:lstStyle/>
                     <a:p>
                       <a:r>
@@ -18142,7 +18697,7 @@
                 </a:tc>
                 <a:tc>
                   <a:txBody>
-                    <a:bodyPr wrap="square"/>
+                    <a:bodyPr/>
                     <a:lstStyle/>
                     <a:p>
                       <a:r>
@@ -18164,7 +18719,7 @@
                 </a:tc>
                 <a:tc>
                   <a:txBody>
-                    <a:bodyPr wrap="square"/>
+                    <a:bodyPr/>
                     <a:lstStyle/>
                     <a:p>
                       <a:r>
@@ -18184,11 +18739,16 @@
                     </a:solidFill>
                   </a:tcPr>
                 </a:tc>
+                <a:extLst>
+                  <a:ext uri="{0D108BD9-81ED-4DB2-BD59-A6C34878D82A}">
+                    <a16:rowId xmlns:a16="http://schemas.microsoft.com/office/drawing/2014/main" val="10007"/>
+                  </a:ext>
+                </a:extLst>
               </a:tr>
               <a:tr h="420624">
                 <a:tc>
                   <a:txBody>
-                    <a:bodyPr wrap="square"/>
+                    <a:bodyPr/>
                     <a:lstStyle/>
                     <a:p>
                       <a:r>
@@ -18210,7 +18770,7 @@
                 </a:tc>
                 <a:tc>
                   <a:txBody>
-                    <a:bodyPr wrap="square"/>
+                    <a:bodyPr/>
                     <a:lstStyle/>
                     <a:p>
                       <a:r>
@@ -18232,7 +18792,7 @@
                 </a:tc>
                 <a:tc>
                   <a:txBody>
-                    <a:bodyPr wrap="square"/>
+                    <a:bodyPr/>
                     <a:lstStyle/>
                     <a:p>
                       <a:r>
@@ -18252,6 +18812,11 @@
                     </a:solidFill>
                   </a:tcPr>
                 </a:tc>
+                <a:extLst>
+                  <a:ext uri="{0D108BD9-81ED-4DB2-BD59-A6C34878D82A}">
+                    <a16:rowId xmlns:a16="http://schemas.microsoft.com/office/drawing/2014/main" val="10008"/>
+                  </a:ext>
+                </a:extLst>
               </a:tr>
             </a:tbl>
           </a:graphicData>
@@ -18274,7 +18839,7 @@
           <a:noFill/>
         </p:spPr>
         <p:txBody>
-          <a:bodyPr wrap="square" anchor="t" lIns="45720" rIns="45720">
+          <a:bodyPr wrap="square" lIns="45720" rIns="45720" anchor="t">
             <a:spAutoFit/>
           </a:bodyPr>
           <a:lstStyle/>
@@ -18301,7 +18866,7 @@
 </file>
 
 <file path=ppt/slides/slide22.xml><?xml version="1.0" encoding="utf-8"?>
-<p:sld xmlns:a="http://schemas.openxmlformats.org/drawingml/2006/main" xmlns:p="http://schemas.openxmlformats.org/presentationml/2006/main" xmlns:r="http://schemas.openxmlformats.org/officeDocument/2006/relationships">
+<p:sld xmlns:a="http://schemas.openxmlformats.org/drawingml/2006/main" xmlns:r="http://schemas.openxmlformats.org/officeDocument/2006/relationships" xmlns:p="http://schemas.openxmlformats.org/presentationml/2006/main">
   <p:cSld>
     <p:spTree>
       <p:nvGrpSpPr>
@@ -18309,7 +18874,14 @@
         <p:cNvGrpSpPr/>
         <p:nvPr/>
       </p:nvGrpSpPr>
-      <p:grpSpPr/>
+      <p:grpSpPr>
+        <a:xfrm>
+          <a:off x="0" y="0"/>
+          <a:ext cx="0" cy="0"/>
+          <a:chOff x="0" y="0"/>
+          <a:chExt cx="0" cy="0"/>
+        </a:xfrm>
+      </p:grpSpPr>
       <p:sp>
         <p:nvSpPr>
           <p:cNvPr id="2" name="TextBox 1"/>
@@ -18327,7 +18899,7 @@
           <a:noFill/>
         </p:spPr>
         <p:txBody>
-          <a:bodyPr wrap="square" anchor="t" lIns="45720" rIns="45720">
+          <a:bodyPr wrap="square" lIns="45720" rIns="45720" anchor="t">
             <a:spAutoFit/>
           </a:bodyPr>
           <a:lstStyle/>
@@ -18362,7 +18934,7 @@
           <a:noFill/>
         </p:spPr>
         <p:txBody>
-          <a:bodyPr wrap="square" anchor="ctr" lIns="45720" rIns="45720">
+          <a:bodyPr wrap="square" lIns="45720" rIns="45720" anchor="ctr">
             <a:spAutoFit/>
           </a:bodyPr>
           <a:lstStyle/>
@@ -18397,7 +18969,7 @@
           <a:noFill/>
         </p:spPr>
         <p:txBody>
-          <a:bodyPr wrap="square" anchor="t" lIns="45720" rIns="45720">
+          <a:bodyPr wrap="square" lIns="45720" rIns="45720" anchor="t">
             <a:spAutoFit/>
           </a:bodyPr>
           <a:lstStyle/>
@@ -18432,7 +19004,7 @@
           <a:noFill/>
         </p:spPr>
         <p:txBody>
-          <a:bodyPr wrap="square" anchor="t" lIns="45720" rIns="45720">
+          <a:bodyPr wrap="square" lIns="45720" rIns="45720" anchor="t">
             <a:spAutoFit/>
           </a:bodyPr>
           <a:lstStyle/>
@@ -18489,7 +19061,7 @@
           </a:fontRef>
         </p:style>
         <p:txBody>
-          <a:bodyPr rtlCol="0" anchor="ctr" wrap="square" lIns="73152" rIns="73152"/>
+          <a:bodyPr wrap="square" lIns="73152" rIns="73152" rtlCol="0" anchor="ctr"/>
           <a:lstStyle/>
           <a:p>
             <a:pPr algn="ctr"/>
@@ -18558,6 +19130,7 @@
           <a:lstStyle/>
           <a:p>
             <a:pPr algn="ctr"/>
+            <a:endParaRPr/>
           </a:p>
         </p:txBody>
       </p:sp>
@@ -18600,7 +19173,7 @@
           </a:fontRef>
         </p:style>
         <p:txBody>
-          <a:bodyPr rtlCol="0" anchor="ctr" wrap="square" lIns="73152" rIns="73152"/>
+          <a:bodyPr wrap="square" lIns="73152" rIns="73152" rtlCol="0" anchor="ctr"/>
           <a:lstStyle/>
           <a:p>
             <a:pPr algn="ctr"/>
@@ -18669,6 +19242,7 @@
           <a:lstStyle/>
           <a:p>
             <a:pPr algn="ctr"/>
+            <a:endParaRPr/>
           </a:p>
         </p:txBody>
       </p:sp>
@@ -18711,7 +19285,7 @@
           </a:fontRef>
         </p:style>
         <p:txBody>
-          <a:bodyPr rtlCol="0" anchor="ctr" wrap="square" lIns="73152" rIns="73152"/>
+          <a:bodyPr wrap="square" lIns="73152" rIns="73152" rtlCol="0" anchor="ctr"/>
           <a:lstStyle/>
           <a:p>
             <a:pPr algn="ctr"/>
@@ -18780,6 +19354,7 @@
           <a:lstStyle/>
           <a:p>
             <a:pPr algn="ctr"/>
+            <a:endParaRPr/>
           </a:p>
         </p:txBody>
       </p:sp>
@@ -18822,7 +19397,7 @@
           </a:fontRef>
         </p:style>
         <p:txBody>
-          <a:bodyPr rtlCol="0" anchor="ctr" wrap="square" lIns="73152" rIns="73152"/>
+          <a:bodyPr wrap="square" lIns="73152" rIns="73152" rtlCol="0" anchor="ctr"/>
           <a:lstStyle/>
           <a:p>
             <a:pPr algn="ctr"/>
@@ -18891,7 +19466,9 @@
         <p:txBody>
           <a:bodyPr rtlCol="0" anchor="ctr"/>
           <a:lstStyle/>
-          <a:p/>
+          <a:p>
+            <a:endParaRPr/>
+          </a:p>
         </p:txBody>
       </p:sp>
       <p:sp>
@@ -18911,7 +19488,7 @@
           <a:noFill/>
         </p:spPr>
         <p:txBody>
-          <a:bodyPr wrap="square" anchor="ctr" lIns="45720" rIns="45720">
+          <a:bodyPr wrap="square" lIns="45720" rIns="45720" anchor="ctr">
             <a:spAutoFit/>
           </a:bodyPr>
           <a:lstStyle/>
@@ -19044,7 +19621,9 @@
         <p:txBody>
           <a:bodyPr rtlCol="0" anchor="ctr"/>
           <a:lstStyle/>
-          <a:p/>
+          <a:p>
+            <a:endParaRPr/>
+          </a:p>
         </p:txBody>
       </p:sp>
       <p:sp>
@@ -19064,7 +19643,7 @@
           <a:noFill/>
         </p:spPr>
         <p:txBody>
-          <a:bodyPr wrap="square" anchor="ctr" lIns="45720" rIns="45720">
+          <a:bodyPr wrap="square" lIns="45720" rIns="45720" anchor="ctr">
             <a:spAutoFit/>
           </a:bodyPr>
           <a:lstStyle/>
@@ -19197,7 +19776,9 @@
         <p:txBody>
           <a:bodyPr rtlCol="0" anchor="ctr"/>
           <a:lstStyle/>
-          <a:p/>
+          <a:p>
+            <a:endParaRPr/>
+          </a:p>
         </p:txBody>
       </p:sp>
       <p:sp>
@@ -19217,7 +19798,7 @@
           <a:noFill/>
         </p:spPr>
         <p:txBody>
-          <a:bodyPr wrap="square" anchor="ctr" lIns="45720" rIns="45720">
+          <a:bodyPr wrap="square" lIns="45720" rIns="45720" anchor="ctr">
             <a:spAutoFit/>
           </a:bodyPr>
           <a:lstStyle/>
@@ -19318,7 +19899,7 @@
 </file>
 
 <file path=ppt/slides/slide23.xml><?xml version="1.0" encoding="utf-8"?>
-<p:sld xmlns:a="http://schemas.openxmlformats.org/drawingml/2006/main" xmlns:p="http://schemas.openxmlformats.org/presentationml/2006/main" xmlns:r="http://schemas.openxmlformats.org/officeDocument/2006/relationships">
+<p:sld xmlns:a="http://schemas.openxmlformats.org/drawingml/2006/main" xmlns:r="http://schemas.openxmlformats.org/officeDocument/2006/relationships" xmlns:p="http://schemas.openxmlformats.org/presentationml/2006/main">
   <p:cSld>
     <p:spTree>
       <p:nvGrpSpPr>
@@ -19326,7 +19907,14 @@
         <p:cNvGrpSpPr/>
         <p:nvPr/>
       </p:nvGrpSpPr>
-      <p:grpSpPr/>
+      <p:grpSpPr>
+        <a:xfrm>
+          <a:off x="0" y="0"/>
+          <a:ext cx="0" cy="0"/>
+          <a:chOff x="0" y="0"/>
+          <a:chExt cx="0" cy="0"/>
+        </a:xfrm>
+      </p:grpSpPr>
       <p:sp>
         <p:nvSpPr>
           <p:cNvPr id="2" name="TextBox 1"/>
@@ -19344,7 +19932,7 @@
           <a:noFill/>
         </p:spPr>
         <p:txBody>
-          <a:bodyPr wrap="square" anchor="t" lIns="45720" rIns="45720">
+          <a:bodyPr wrap="square" lIns="45720" rIns="45720" anchor="t">
             <a:spAutoFit/>
           </a:bodyPr>
           <a:lstStyle/>
@@ -19379,7 +19967,7 @@
           <a:noFill/>
         </p:spPr>
         <p:txBody>
-          <a:bodyPr wrap="square" anchor="ctr" lIns="45720" rIns="45720">
+          <a:bodyPr wrap="square" lIns="45720" rIns="45720" anchor="ctr">
             <a:spAutoFit/>
           </a:bodyPr>
           <a:lstStyle/>
@@ -19414,7 +20002,7 @@
           <a:noFill/>
         </p:spPr>
         <p:txBody>
-          <a:bodyPr wrap="square" anchor="t" lIns="45720" rIns="45720">
+          <a:bodyPr wrap="square" lIns="45720" rIns="45720" anchor="t">
             <a:spAutoFit/>
           </a:bodyPr>
           <a:lstStyle/>
@@ -19449,7 +20037,7 @@
           <a:noFill/>
         </p:spPr>
         <p:txBody>
-          <a:bodyPr wrap="square" anchor="t" lIns="45720" rIns="45720">
+          <a:bodyPr wrap="square" lIns="45720" rIns="45720" anchor="t">
             <a:spAutoFit/>
           </a:bodyPr>
           <a:lstStyle/>
@@ -19508,7 +20096,9 @@
         <p:txBody>
           <a:bodyPr rtlCol="0" anchor="ctr"/>
           <a:lstStyle/>
-          <a:p/>
+          <a:p>
+            <a:endParaRPr/>
+          </a:p>
         </p:txBody>
       </p:sp>
       <p:sp>
@@ -19528,7 +20118,7 @@
           <a:noFill/>
         </p:spPr>
         <p:txBody>
-          <a:bodyPr wrap="square" anchor="ctr" lIns="45720" rIns="45720">
+          <a:bodyPr wrap="square" lIns="45720" rIns="45720" anchor="ctr">
             <a:spAutoFit/>
           </a:bodyPr>
           <a:lstStyle/>
@@ -19644,7 +20234,9 @@
         <p:txBody>
           <a:bodyPr rtlCol="0" anchor="ctr"/>
           <a:lstStyle/>
-          <a:p/>
+          <a:p>
+            <a:endParaRPr/>
+          </a:p>
         </p:txBody>
       </p:sp>
       <p:sp>
@@ -19664,7 +20256,7 @@
           <a:noFill/>
         </p:spPr>
         <p:txBody>
-          <a:bodyPr wrap="square" anchor="ctr" lIns="45720" rIns="45720">
+          <a:bodyPr wrap="square" lIns="45720" rIns="45720" anchor="ctr">
             <a:spAutoFit/>
           </a:bodyPr>
           <a:lstStyle/>
@@ -19797,7 +20389,9 @@
         <p:txBody>
           <a:bodyPr rtlCol="0" anchor="ctr"/>
           <a:lstStyle/>
-          <a:p/>
+          <a:p>
+            <a:endParaRPr/>
+          </a:p>
         </p:txBody>
       </p:sp>
       <p:sp>
@@ -19817,7 +20411,7 @@
           <a:noFill/>
         </p:spPr>
         <p:txBody>
-          <a:bodyPr wrap="square" anchor="ctr" lIns="45720" rIns="45720">
+          <a:bodyPr wrap="square" lIns="45720" rIns="45720" anchor="ctr">
             <a:spAutoFit/>
           </a:bodyPr>
           <a:lstStyle/>
@@ -19950,7 +20544,9 @@
         <p:txBody>
           <a:bodyPr rtlCol="0" anchor="ctr"/>
           <a:lstStyle/>
-          <a:p/>
+          <a:p>
+            <a:endParaRPr/>
+          </a:p>
         </p:txBody>
       </p:sp>
       <p:sp>
@@ -19970,7 +20566,7 @@
           <a:noFill/>
         </p:spPr>
         <p:txBody>
-          <a:bodyPr wrap="square" anchor="ctr" lIns="45720" rIns="45720">
+          <a:bodyPr wrap="square" lIns="45720" rIns="45720" anchor="ctr">
             <a:spAutoFit/>
           </a:bodyPr>
           <a:lstStyle/>
@@ -20103,7 +20699,9 @@
         <p:txBody>
           <a:bodyPr rtlCol="0" anchor="ctr"/>
           <a:lstStyle/>
-          <a:p/>
+          <a:p>
+            <a:endParaRPr/>
+          </a:p>
         </p:txBody>
       </p:sp>
       <p:sp>
@@ -20123,7 +20721,7 @@
           <a:noFill/>
         </p:spPr>
         <p:txBody>
-          <a:bodyPr wrap="square" anchor="ctr" lIns="45720" rIns="45720">
+          <a:bodyPr wrap="square" lIns="45720" rIns="45720" anchor="ctr">
             <a:spAutoFit/>
           </a:bodyPr>
           <a:lstStyle/>
@@ -20256,7 +20854,9 @@
         <p:txBody>
           <a:bodyPr rtlCol="0" anchor="ctr"/>
           <a:lstStyle/>
-          <a:p/>
+          <a:p>
+            <a:endParaRPr/>
+          </a:p>
         </p:txBody>
       </p:sp>
       <p:sp>
@@ -20276,7 +20876,7 @@
           <a:noFill/>
         </p:spPr>
         <p:txBody>
-          <a:bodyPr wrap="square" anchor="ctr" lIns="45720" rIns="45720">
+          <a:bodyPr wrap="square" lIns="45720" rIns="45720" anchor="ctr">
             <a:spAutoFit/>
           </a:bodyPr>
           <a:lstStyle/>
@@ -20377,7 +20977,7 @@
 </file>
 
 <file path=ppt/slides/slide3.xml><?xml version="1.0" encoding="utf-8"?>
-<p:sld xmlns:a="http://schemas.openxmlformats.org/drawingml/2006/main" xmlns:p="http://schemas.openxmlformats.org/presentationml/2006/main" xmlns:r="http://schemas.openxmlformats.org/officeDocument/2006/relationships">
+<p:sld xmlns:a="http://schemas.openxmlformats.org/drawingml/2006/main" xmlns:r="http://schemas.openxmlformats.org/officeDocument/2006/relationships" xmlns:p="http://schemas.openxmlformats.org/presentationml/2006/main">
   <p:cSld>
     <p:spTree>
       <p:nvGrpSpPr>
@@ -20385,7 +20985,14 @@
         <p:cNvGrpSpPr/>
         <p:nvPr/>
       </p:nvGrpSpPr>
-      <p:grpSpPr/>
+      <p:grpSpPr>
+        <a:xfrm>
+          <a:off x="0" y="0"/>
+          <a:ext cx="0" cy="0"/>
+          <a:chOff x="0" y="0"/>
+          <a:chExt cx="0" cy="0"/>
+        </a:xfrm>
+      </p:grpSpPr>
       <p:sp>
         <p:nvSpPr>
           <p:cNvPr id="2" name="TextBox 1"/>
@@ -20403,7 +21010,7 @@
           <a:noFill/>
         </p:spPr>
         <p:txBody>
-          <a:bodyPr wrap="square" anchor="t" lIns="45720" rIns="45720">
+          <a:bodyPr wrap="square" lIns="45720" rIns="45720" anchor="t">
             <a:spAutoFit/>
           </a:bodyPr>
           <a:lstStyle/>
@@ -20438,7 +21045,7 @@
           <a:noFill/>
         </p:spPr>
         <p:txBody>
-          <a:bodyPr wrap="square" anchor="ctr" lIns="45720" rIns="45720">
+          <a:bodyPr wrap="square" lIns="45720" rIns="45720" anchor="ctr">
             <a:spAutoFit/>
           </a:bodyPr>
           <a:lstStyle/>
@@ -20473,7 +21080,7 @@
           <a:noFill/>
         </p:spPr>
         <p:txBody>
-          <a:bodyPr wrap="square" anchor="t" lIns="45720" rIns="45720">
+          <a:bodyPr wrap="square" lIns="45720" rIns="45720" anchor="t">
             <a:spAutoFit/>
           </a:bodyPr>
           <a:lstStyle/>
@@ -20508,7 +21115,7 @@
           <a:noFill/>
         </p:spPr>
         <p:txBody>
-          <a:bodyPr wrap="square" anchor="t" lIns="45720" rIns="45720">
+          <a:bodyPr wrap="square" lIns="45720" rIns="45720" anchor="t">
             <a:spAutoFit/>
           </a:bodyPr>
           <a:lstStyle/>
@@ -20565,7 +21172,7 @@
           </a:fontRef>
         </p:style>
         <p:txBody>
-          <a:bodyPr rtlCol="0" anchor="ctr" wrap="square" lIns="73152" rIns="73152"/>
+          <a:bodyPr wrap="square" lIns="73152" rIns="73152" rtlCol="0" anchor="ctr"/>
           <a:lstStyle/>
           <a:p>
             <a:pPr algn="ctr"/>
@@ -20634,6 +21241,7 @@
           <a:lstStyle/>
           <a:p>
             <a:pPr algn="ctr"/>
+            <a:endParaRPr/>
           </a:p>
         </p:txBody>
       </p:sp>
@@ -20676,7 +21284,7 @@
           </a:fontRef>
         </p:style>
         <p:txBody>
-          <a:bodyPr rtlCol="0" anchor="ctr" wrap="square" lIns="73152" rIns="73152"/>
+          <a:bodyPr wrap="square" lIns="73152" rIns="73152" rtlCol="0" anchor="ctr"/>
           <a:lstStyle/>
           <a:p>
             <a:pPr algn="ctr"/>
@@ -20745,6 +21353,7 @@
           <a:lstStyle/>
           <a:p>
             <a:pPr algn="ctr"/>
+            <a:endParaRPr/>
           </a:p>
         </p:txBody>
       </p:sp>
@@ -20787,7 +21396,7 @@
           </a:fontRef>
         </p:style>
         <p:txBody>
-          <a:bodyPr rtlCol="0" anchor="ctr" wrap="square" lIns="73152" rIns="73152"/>
+          <a:bodyPr wrap="square" lIns="73152" rIns="73152" rtlCol="0" anchor="ctr"/>
           <a:lstStyle/>
           <a:p>
             <a:pPr algn="ctr"/>
@@ -20856,6 +21465,7 @@
           <a:lstStyle/>
           <a:p>
             <a:pPr algn="ctr"/>
+            <a:endParaRPr/>
           </a:p>
         </p:txBody>
       </p:sp>
@@ -20898,7 +21508,7 @@
           </a:fontRef>
         </p:style>
         <p:txBody>
-          <a:bodyPr rtlCol="0" anchor="ctr" wrap="square" lIns="73152" rIns="73152"/>
+          <a:bodyPr wrap="square" lIns="73152" rIns="73152" rtlCol="0" anchor="ctr"/>
           <a:lstStyle/>
           <a:p>
             <a:pPr algn="ctr"/>
@@ -20967,6 +21577,7 @@
           <a:lstStyle/>
           <a:p>
             <a:pPr algn="ctr"/>
+            <a:endParaRPr/>
           </a:p>
         </p:txBody>
       </p:sp>
@@ -21009,7 +21620,7 @@
           </a:fontRef>
         </p:style>
         <p:txBody>
-          <a:bodyPr rtlCol="0" anchor="ctr" wrap="square" lIns="73152" rIns="73152"/>
+          <a:bodyPr wrap="square" lIns="73152" rIns="73152" rtlCol="0" anchor="ctr"/>
           <a:lstStyle/>
           <a:p>
             <a:pPr algn="ctr"/>
@@ -21078,6 +21689,7 @@
           <a:lstStyle/>
           <a:p>
             <a:pPr algn="ctr"/>
+            <a:endParaRPr/>
           </a:p>
         </p:txBody>
       </p:sp>
@@ -21120,12 +21732,12 @@
           </a:fontRef>
         </p:style>
         <p:txBody>
-          <a:bodyPr rtlCol="0" anchor="ctr" wrap="square" lIns="73152" rIns="73152"/>
+          <a:bodyPr wrap="square" lIns="73152" rIns="73152" rtlCol="0" anchor="ctr"/>
           <a:lstStyle/>
           <a:p>
             <a:pPr algn="ctr"/>
             <a:r>
-              <a:rPr sz="1300" b="1" i="0">
+              <a:rPr sz="1300" b="1" i="0" dirty="0">
                 <a:solidFill>
                   <a:srgbClr val="FFFFFF"/>
                 </a:solidFill>
@@ -21143,8 +21755,14 @@
                 </a:solidFill>
                 <a:latin typeface="Calibri"/>
               </a:rPr>
-              <a:t>or write-off, 2PD</a:t>
-            </a:r>
+              <a:t>or write-off</a:t>
+            </a:r>
+            <a:endParaRPr sz="1000" b="0" i="0" dirty="0">
+              <a:solidFill>
+                <a:srgbClr val="FFFFFF"/>
+              </a:solidFill>
+              <a:latin typeface="Calibri"/>
+            </a:endParaRPr>
           </a:p>
         </p:txBody>
       </p:sp>
@@ -21189,7 +21807,9 @@
         <p:txBody>
           <a:bodyPr rtlCol="0" anchor="ctr"/>
           <a:lstStyle/>
-          <a:p/>
+          <a:p>
+            <a:endParaRPr/>
+          </a:p>
         </p:txBody>
       </p:sp>
       <p:sp>
@@ -21209,7 +21829,7 @@
           <a:noFill/>
         </p:spPr>
         <p:txBody>
-          <a:bodyPr wrap="square" anchor="ctr" lIns="45720" rIns="45720">
+          <a:bodyPr wrap="square" lIns="45720" rIns="45720" anchor="ctr">
             <a:spAutoFit/>
           </a:bodyPr>
           <a:lstStyle/>
@@ -21359,7 +21979,9 @@
         <p:txBody>
           <a:bodyPr rtlCol="0" anchor="ctr"/>
           <a:lstStyle/>
-          <a:p/>
+          <a:p>
+            <a:endParaRPr/>
+          </a:p>
         </p:txBody>
       </p:sp>
       <p:sp>
@@ -21379,7 +22001,7 @@
           <a:noFill/>
         </p:spPr>
         <p:txBody>
-          <a:bodyPr wrap="square" anchor="ctr" lIns="45720" rIns="45720">
+          <a:bodyPr wrap="square" lIns="45720" rIns="45720" anchor="ctr">
             <a:spAutoFit/>
           </a:bodyPr>
           <a:lstStyle/>
@@ -21529,7 +22151,9 @@
         <p:txBody>
           <a:bodyPr rtlCol="0" anchor="ctr"/>
           <a:lstStyle/>
-          <a:p/>
+          <a:p>
+            <a:endParaRPr/>
+          </a:p>
         </p:txBody>
       </p:sp>
       <p:sp>
@@ -21549,7 +22173,7 @@
           <a:noFill/>
         </p:spPr>
         <p:txBody>
-          <a:bodyPr wrap="square" anchor="ctr" lIns="45720" rIns="45720">
+          <a:bodyPr wrap="square" lIns="45720" rIns="45720" anchor="ctr">
             <a:spAutoFit/>
           </a:bodyPr>
           <a:lstStyle/>
@@ -21675,7 +22299,7 @@
           <a:noFill/>
         </p:spPr>
         <p:txBody>
-          <a:bodyPr wrap="square" anchor="t" lIns="45720" rIns="45720">
+          <a:bodyPr wrap="square" lIns="45720" rIns="45720" anchor="t">
             <a:spAutoFit/>
           </a:bodyPr>
           <a:lstStyle/>
@@ -21702,7 +22326,7 @@
 </file>
 
 <file path=ppt/slides/slide4.xml><?xml version="1.0" encoding="utf-8"?>
-<p:sld xmlns:a="http://schemas.openxmlformats.org/drawingml/2006/main" xmlns:p="http://schemas.openxmlformats.org/presentationml/2006/main" xmlns:r="http://schemas.openxmlformats.org/officeDocument/2006/relationships">
+<p:sld xmlns:a="http://schemas.openxmlformats.org/drawingml/2006/main" xmlns:r="http://schemas.openxmlformats.org/officeDocument/2006/relationships" xmlns:p="http://schemas.openxmlformats.org/presentationml/2006/main">
   <p:cSld>
     <p:spTree>
       <p:nvGrpSpPr>
@@ -21710,7 +22334,14 @@
         <p:cNvGrpSpPr/>
         <p:nvPr/>
       </p:nvGrpSpPr>
-      <p:grpSpPr/>
+      <p:grpSpPr>
+        <a:xfrm>
+          <a:off x="0" y="0"/>
+          <a:ext cx="0" cy="0"/>
+          <a:chOff x="0" y="0"/>
+          <a:chExt cx="0" cy="0"/>
+        </a:xfrm>
+      </p:grpSpPr>
       <p:sp>
         <p:nvSpPr>
           <p:cNvPr id="2" name="TextBox 1"/>
@@ -21728,7 +22359,7 @@
           <a:noFill/>
         </p:spPr>
         <p:txBody>
-          <a:bodyPr wrap="square" anchor="t" lIns="45720" rIns="45720">
+          <a:bodyPr wrap="square" lIns="45720" rIns="45720" anchor="t">
             <a:spAutoFit/>
           </a:bodyPr>
           <a:lstStyle/>
@@ -21763,7 +22394,7 @@
           <a:noFill/>
         </p:spPr>
         <p:txBody>
-          <a:bodyPr wrap="square" anchor="ctr" lIns="45720" rIns="45720">
+          <a:bodyPr wrap="square" lIns="45720" rIns="45720" anchor="ctr">
             <a:spAutoFit/>
           </a:bodyPr>
           <a:lstStyle/>
@@ -21798,7 +22429,7 @@
           <a:noFill/>
         </p:spPr>
         <p:txBody>
-          <a:bodyPr wrap="square" anchor="t" lIns="45720" rIns="45720">
+          <a:bodyPr wrap="square" lIns="45720" rIns="45720" anchor="t">
             <a:spAutoFit/>
           </a:bodyPr>
           <a:lstStyle/>
@@ -21833,7 +22464,7 @@
           <a:noFill/>
         </p:spPr>
         <p:txBody>
-          <a:bodyPr wrap="square" anchor="t" lIns="45720" rIns="45720">
+          <a:bodyPr wrap="square" lIns="45720" rIns="45720" anchor="t">
             <a:spAutoFit/>
           </a:bodyPr>
           <a:lstStyle/>
@@ -21892,7 +22523,9 @@
         <p:txBody>
           <a:bodyPr rtlCol="0" anchor="ctr"/>
           <a:lstStyle/>
-          <a:p/>
+          <a:p>
+            <a:endParaRPr/>
+          </a:p>
         </p:txBody>
       </p:sp>
       <p:sp>
@@ -21912,7 +22545,7 @@
           <a:noFill/>
         </p:spPr>
         <p:txBody>
-          <a:bodyPr wrap="square" anchor="t" lIns="45720" rIns="45720">
+          <a:bodyPr wrap="square" lIns="45720" rIns="45720" anchor="t">
             <a:spAutoFit/>
           </a:bodyPr>
           <a:lstStyle/>
@@ -21947,7 +22580,7 @@
           <a:noFill/>
         </p:spPr>
         <p:txBody>
-          <a:bodyPr wrap="square" anchor="t" lIns="45720" rIns="45720">
+          <a:bodyPr wrap="square" lIns="45720" rIns="45720" anchor="t">
             <a:spAutoFit/>
           </a:bodyPr>
           <a:lstStyle/>
@@ -21982,7 +22615,7 @@
           <a:noFill/>
         </p:spPr>
         <p:txBody>
-          <a:bodyPr wrap="square" anchor="t" lIns="45720" rIns="45720">
+          <a:bodyPr wrap="square" lIns="45720" rIns="45720" anchor="t">
             <a:spAutoFit/>
           </a:bodyPr>
           <a:lstStyle/>
@@ -22017,7 +22650,7 @@
           <a:noFill/>
         </p:spPr>
         <p:txBody>
-          <a:bodyPr wrap="square" anchor="t" lIns="45720" rIns="45720">
+          <a:bodyPr wrap="square" lIns="45720" rIns="45720" anchor="t">
             <a:spAutoFit/>
           </a:bodyPr>
           <a:lstStyle/>
@@ -22074,7 +22707,7 @@
           </a:fontRef>
         </p:style>
         <p:txBody>
-          <a:bodyPr rtlCol="0" anchor="ctr" wrap="square" lIns="73152" rIns="73152"/>
+          <a:bodyPr wrap="square" lIns="73152" rIns="73152" rtlCol="0" anchor="ctr"/>
           <a:lstStyle/>
           <a:p>
             <a:pPr algn="ctr"/>
@@ -22131,7 +22764,9 @@
         <p:txBody>
           <a:bodyPr rtlCol="0" anchor="ctr"/>
           <a:lstStyle/>
-          <a:p/>
+          <a:p>
+            <a:endParaRPr/>
+          </a:p>
         </p:txBody>
       </p:sp>
       <p:sp>
@@ -22151,7 +22786,7 @@
           <a:noFill/>
         </p:spPr>
         <p:txBody>
-          <a:bodyPr wrap="square" anchor="t" lIns="45720" rIns="45720">
+          <a:bodyPr wrap="square" lIns="45720" rIns="45720" anchor="t">
             <a:spAutoFit/>
           </a:bodyPr>
           <a:lstStyle/>
@@ -22186,7 +22821,7 @@
           <a:noFill/>
         </p:spPr>
         <p:txBody>
-          <a:bodyPr wrap="square" anchor="t" lIns="45720" rIns="45720">
+          <a:bodyPr wrap="square" lIns="45720" rIns="45720" anchor="t">
             <a:spAutoFit/>
           </a:bodyPr>
           <a:lstStyle/>
@@ -22221,7 +22856,7 @@
           <a:noFill/>
         </p:spPr>
         <p:txBody>
-          <a:bodyPr wrap="square" anchor="t" lIns="45720" rIns="45720">
+          <a:bodyPr wrap="square" lIns="45720" rIns="45720" anchor="t">
             <a:spAutoFit/>
           </a:bodyPr>
           <a:lstStyle/>
@@ -22256,7 +22891,7 @@
           <a:noFill/>
         </p:spPr>
         <p:txBody>
-          <a:bodyPr wrap="square" anchor="t" lIns="45720" rIns="45720">
+          <a:bodyPr wrap="square" lIns="45720" rIns="45720" anchor="t">
             <a:spAutoFit/>
           </a:bodyPr>
           <a:lstStyle/>
@@ -22313,7 +22948,7 @@
           </a:fontRef>
         </p:style>
         <p:txBody>
-          <a:bodyPr rtlCol="0" anchor="ctr" wrap="square" lIns="73152" rIns="73152"/>
+          <a:bodyPr wrap="square" lIns="73152" rIns="73152" rtlCol="0" anchor="ctr"/>
           <a:lstStyle/>
           <a:p>
             <a:pPr algn="ctr"/>
@@ -22370,7 +23005,9 @@
         <p:txBody>
           <a:bodyPr rtlCol="0" anchor="ctr"/>
           <a:lstStyle/>
-          <a:p/>
+          <a:p>
+            <a:endParaRPr/>
+          </a:p>
         </p:txBody>
       </p:sp>
       <p:sp>
@@ -22390,7 +23027,7 @@
           <a:noFill/>
         </p:spPr>
         <p:txBody>
-          <a:bodyPr wrap="square" anchor="t" lIns="45720" rIns="45720">
+          <a:bodyPr wrap="square" lIns="45720" rIns="45720" anchor="t">
             <a:spAutoFit/>
           </a:bodyPr>
           <a:lstStyle/>
@@ -22425,7 +23062,7 @@
           <a:noFill/>
         </p:spPr>
         <p:txBody>
-          <a:bodyPr wrap="square" anchor="t" lIns="45720" rIns="45720">
+          <a:bodyPr wrap="square" lIns="45720" rIns="45720" anchor="t">
             <a:spAutoFit/>
           </a:bodyPr>
           <a:lstStyle/>
@@ -22460,7 +23097,7 @@
           <a:noFill/>
         </p:spPr>
         <p:txBody>
-          <a:bodyPr wrap="square" anchor="t" lIns="45720" rIns="45720">
+          <a:bodyPr wrap="square" lIns="45720" rIns="45720" anchor="t">
             <a:spAutoFit/>
           </a:bodyPr>
           <a:lstStyle/>
@@ -22495,7 +23132,7 @@
           <a:noFill/>
         </p:spPr>
         <p:txBody>
-          <a:bodyPr wrap="square" anchor="t" lIns="45720" rIns="45720">
+          <a:bodyPr wrap="square" lIns="45720" rIns="45720" anchor="t">
             <a:spAutoFit/>
           </a:bodyPr>
           <a:lstStyle/>
@@ -22552,7 +23189,7 @@
           </a:fontRef>
         </p:style>
         <p:txBody>
-          <a:bodyPr rtlCol="0" anchor="ctr" wrap="square" lIns="73152" rIns="73152"/>
+          <a:bodyPr wrap="square" lIns="73152" rIns="73152" rtlCol="0" anchor="ctr"/>
           <a:lstStyle/>
           <a:p>
             <a:pPr algn="ctr"/>
@@ -22609,7 +23246,9 @@
         <p:txBody>
           <a:bodyPr rtlCol="0" anchor="ctr"/>
           <a:lstStyle/>
-          <a:p/>
+          <a:p>
+            <a:endParaRPr/>
+          </a:p>
         </p:txBody>
       </p:sp>
       <p:sp>
@@ -22629,7 +23268,7 @@
           <a:noFill/>
         </p:spPr>
         <p:txBody>
-          <a:bodyPr wrap="square" anchor="ctr" lIns="45720" rIns="45720">
+          <a:bodyPr wrap="square" lIns="45720" rIns="45720" anchor="ctr">
             <a:spAutoFit/>
           </a:bodyPr>
           <a:lstStyle/>
@@ -22668,7 +23307,7 @@
 </file>
 
 <file path=ppt/slides/slide5.xml><?xml version="1.0" encoding="utf-8"?>
-<p:sld xmlns:a="http://schemas.openxmlformats.org/drawingml/2006/main" xmlns:p="http://schemas.openxmlformats.org/presentationml/2006/main" xmlns:r="http://schemas.openxmlformats.org/officeDocument/2006/relationships">
+<p:sld xmlns:a="http://schemas.openxmlformats.org/drawingml/2006/main" xmlns:r="http://schemas.openxmlformats.org/officeDocument/2006/relationships" xmlns:p="http://schemas.openxmlformats.org/presentationml/2006/main">
   <p:cSld>
     <p:spTree>
       <p:nvGrpSpPr>
@@ -22676,7 +23315,14 @@
         <p:cNvGrpSpPr/>
         <p:nvPr/>
       </p:nvGrpSpPr>
-      <p:grpSpPr/>
+      <p:grpSpPr>
+        <a:xfrm>
+          <a:off x="0" y="0"/>
+          <a:ext cx="0" cy="0"/>
+          <a:chOff x="0" y="0"/>
+          <a:chExt cx="0" cy="0"/>
+        </a:xfrm>
+      </p:grpSpPr>
       <p:sp>
         <p:nvSpPr>
           <p:cNvPr id="2" name="TextBox 1"/>
@@ -22694,7 +23340,7 @@
           <a:noFill/>
         </p:spPr>
         <p:txBody>
-          <a:bodyPr wrap="square" anchor="t" lIns="45720" rIns="45720">
+          <a:bodyPr wrap="square" lIns="45720" rIns="45720" anchor="t">
             <a:spAutoFit/>
           </a:bodyPr>
           <a:lstStyle/>
@@ -22729,7 +23375,7 @@
           <a:noFill/>
         </p:spPr>
         <p:txBody>
-          <a:bodyPr wrap="square" anchor="ctr" lIns="45720" rIns="45720">
+          <a:bodyPr wrap="square" lIns="45720" rIns="45720" anchor="ctr">
             <a:spAutoFit/>
           </a:bodyPr>
           <a:lstStyle/>
@@ -22764,7 +23410,7 @@
           <a:noFill/>
         </p:spPr>
         <p:txBody>
-          <a:bodyPr wrap="square" anchor="t" lIns="45720" rIns="45720">
+          <a:bodyPr wrap="square" lIns="45720" rIns="45720" anchor="t">
             <a:spAutoFit/>
           </a:bodyPr>
           <a:lstStyle/>
@@ -22799,7 +23445,7 @@
           <a:noFill/>
         </p:spPr>
         <p:txBody>
-          <a:bodyPr wrap="square" anchor="t" lIns="45720" rIns="45720">
+          <a:bodyPr wrap="square" lIns="45720" rIns="45720" anchor="t">
             <a:spAutoFit/>
           </a:bodyPr>
           <a:lstStyle/>
@@ -22856,7 +23502,7 @@
           </a:fontRef>
         </p:style>
         <p:txBody>
-          <a:bodyPr rtlCol="0" anchor="ctr" wrap="square" lIns="73152" rIns="73152"/>
+          <a:bodyPr wrap="square" lIns="73152" rIns="73152" rtlCol="0" anchor="ctr"/>
           <a:lstStyle/>
           <a:p>
             <a:pPr algn="ctr"/>
@@ -22925,6 +23571,7 @@
           <a:lstStyle/>
           <a:p>
             <a:pPr algn="ctr"/>
+            <a:endParaRPr/>
           </a:p>
         </p:txBody>
       </p:sp>
@@ -22967,7 +23614,7 @@
           </a:fontRef>
         </p:style>
         <p:txBody>
-          <a:bodyPr rtlCol="0" anchor="ctr" wrap="square" lIns="73152" rIns="73152"/>
+          <a:bodyPr wrap="square" lIns="73152" rIns="73152" rtlCol="0" anchor="ctr"/>
           <a:lstStyle/>
           <a:p>
             <a:pPr algn="ctr"/>
@@ -23036,6 +23683,7 @@
           <a:lstStyle/>
           <a:p>
             <a:pPr algn="ctr"/>
+            <a:endParaRPr/>
           </a:p>
         </p:txBody>
       </p:sp>
@@ -23078,7 +23726,7 @@
           </a:fontRef>
         </p:style>
         <p:txBody>
-          <a:bodyPr rtlCol="0" anchor="ctr" wrap="square" lIns="73152" rIns="73152"/>
+          <a:bodyPr wrap="square" lIns="73152" rIns="73152" rtlCol="0" anchor="ctr"/>
           <a:lstStyle/>
           <a:p>
             <a:pPr algn="ctr"/>
@@ -23147,6 +23795,7 @@
           <a:lstStyle/>
           <a:p>
             <a:pPr algn="ctr"/>
+            <a:endParaRPr/>
           </a:p>
         </p:txBody>
       </p:sp>
@@ -23189,7 +23838,7 @@
           </a:fontRef>
         </p:style>
         <p:txBody>
-          <a:bodyPr rtlCol="0" anchor="ctr" wrap="square" lIns="73152" rIns="73152"/>
+          <a:bodyPr wrap="square" lIns="73152" rIns="73152" rtlCol="0" anchor="ctr"/>
           <a:lstStyle/>
           <a:p>
             <a:pPr algn="ctr"/>
@@ -23258,6 +23907,7 @@
           <a:lstStyle/>
           <a:p>
             <a:pPr algn="ctr"/>
+            <a:endParaRPr/>
           </a:p>
         </p:txBody>
       </p:sp>
@@ -23300,7 +23950,7 @@
           </a:fontRef>
         </p:style>
         <p:txBody>
-          <a:bodyPr rtlCol="0" anchor="ctr" wrap="square" lIns="73152" rIns="73152"/>
+          <a:bodyPr wrap="square" lIns="73152" rIns="73152" rtlCol="0" anchor="ctr"/>
           <a:lstStyle/>
           <a:p>
             <a:pPr algn="ctr"/>
@@ -23369,6 +24019,7 @@
           <a:lstStyle/>
           <a:p>
             <a:pPr algn="ctr"/>
+            <a:endParaRPr/>
           </a:p>
         </p:txBody>
       </p:sp>
@@ -23411,7 +24062,7 @@
           </a:fontRef>
         </p:style>
         <p:txBody>
-          <a:bodyPr rtlCol="0" anchor="ctr" wrap="square" lIns="73152" rIns="73152"/>
+          <a:bodyPr wrap="square" lIns="73152" rIns="73152" rtlCol="0" anchor="ctr"/>
           <a:lstStyle/>
           <a:p>
             <a:pPr algn="ctr"/>
@@ -23480,6 +24131,7 @@
           <a:lstStyle/>
           <a:p>
             <a:pPr algn="ctr"/>
+            <a:endParaRPr/>
           </a:p>
         </p:txBody>
       </p:sp>
@@ -23522,7 +24174,7 @@
           </a:fontRef>
         </p:style>
         <p:txBody>
-          <a:bodyPr rtlCol="0" anchor="ctr" wrap="square" lIns="73152" rIns="73152"/>
+          <a:bodyPr wrap="square" lIns="73152" rIns="73152" rtlCol="0" anchor="ctr"/>
           <a:lstStyle/>
           <a:p>
             <a:pPr algn="ctr"/>
@@ -23567,7 +24219,7 @@
           <a:noFill/>
         </p:spPr>
         <p:txBody>
-          <a:bodyPr wrap="square" anchor="t" lIns="45720" rIns="45720">
+          <a:bodyPr wrap="square" lIns="45720" rIns="45720" anchor="t">
             <a:spAutoFit/>
           </a:bodyPr>
           <a:lstStyle/>
@@ -23602,7 +24254,7 @@
           <a:noFill/>
         </p:spPr>
         <p:txBody>
-          <a:bodyPr wrap="square" anchor="t" lIns="45720" rIns="45720">
+          <a:bodyPr wrap="square" lIns="45720" rIns="45720" anchor="t">
             <a:spAutoFit/>
           </a:bodyPr>
           <a:lstStyle/>
@@ -23637,7 +24289,7 @@
           <a:noFill/>
         </p:spPr>
         <p:txBody>
-          <a:bodyPr wrap="square" anchor="t" lIns="45720" rIns="45720">
+          <a:bodyPr wrap="square" lIns="45720" rIns="45720" anchor="t">
             <a:spAutoFit/>
           </a:bodyPr>
           <a:lstStyle/>
@@ -23696,7 +24348,9 @@
         <p:txBody>
           <a:bodyPr rtlCol="0" anchor="ctr"/>
           <a:lstStyle/>
-          <a:p/>
+          <a:p>
+            <a:endParaRPr/>
+          </a:p>
         </p:txBody>
       </p:sp>
       <p:sp>
@@ -23716,7 +24370,7 @@
           <a:noFill/>
         </p:spPr>
         <p:txBody>
-          <a:bodyPr wrap="square" anchor="ctr" lIns="45720" rIns="45720">
+          <a:bodyPr wrap="square" lIns="45720" rIns="45720" anchor="ctr">
             <a:spAutoFit/>
           </a:bodyPr>
           <a:lstStyle/>
@@ -23928,7 +24582,9 @@
         <p:txBody>
           <a:bodyPr rtlCol="0" anchor="ctr"/>
           <a:lstStyle/>
-          <a:p/>
+          <a:p>
+            <a:endParaRPr/>
+          </a:p>
         </p:txBody>
       </p:sp>
       <p:sp>
@@ -23948,7 +24604,7 @@
           <a:noFill/>
         </p:spPr>
         <p:txBody>
-          <a:bodyPr wrap="square" anchor="ctr" lIns="45720" rIns="45720">
+          <a:bodyPr wrap="square" lIns="45720" rIns="45720" anchor="ctr">
             <a:spAutoFit/>
           </a:bodyPr>
           <a:lstStyle/>
@@ -24066,7 +24722,7 @@
 </file>
 
 <file path=ppt/slides/slide6.xml><?xml version="1.0" encoding="utf-8"?>
-<p:sld xmlns:a="http://schemas.openxmlformats.org/drawingml/2006/main" xmlns:p="http://schemas.openxmlformats.org/presentationml/2006/main" xmlns:r="http://schemas.openxmlformats.org/officeDocument/2006/relationships">
+<p:sld xmlns:a="http://schemas.openxmlformats.org/drawingml/2006/main" xmlns:r="http://schemas.openxmlformats.org/officeDocument/2006/relationships" xmlns:p="http://schemas.openxmlformats.org/presentationml/2006/main">
   <p:cSld>
     <p:spTree>
       <p:nvGrpSpPr>
@@ -24074,7 +24730,14 @@
         <p:cNvGrpSpPr/>
         <p:nvPr/>
       </p:nvGrpSpPr>
-      <p:grpSpPr/>
+      <p:grpSpPr>
+        <a:xfrm>
+          <a:off x="0" y="0"/>
+          <a:ext cx="0" cy="0"/>
+          <a:chOff x="0" y="0"/>
+          <a:chExt cx="0" cy="0"/>
+        </a:xfrm>
+      </p:grpSpPr>
       <p:sp>
         <p:nvSpPr>
           <p:cNvPr id="2" name="TextBox 1"/>
@@ -24092,7 +24755,7 @@
           <a:noFill/>
         </p:spPr>
         <p:txBody>
-          <a:bodyPr wrap="square" anchor="t" lIns="45720" rIns="45720">
+          <a:bodyPr wrap="square" lIns="45720" rIns="45720" anchor="t">
             <a:spAutoFit/>
           </a:bodyPr>
           <a:lstStyle/>
@@ -24127,7 +24790,7 @@
           <a:noFill/>
         </p:spPr>
         <p:txBody>
-          <a:bodyPr wrap="square" anchor="ctr" lIns="45720" rIns="45720">
+          <a:bodyPr wrap="square" lIns="45720" rIns="45720" anchor="ctr">
             <a:spAutoFit/>
           </a:bodyPr>
           <a:lstStyle/>
@@ -24162,7 +24825,7 @@
           <a:noFill/>
         </p:spPr>
         <p:txBody>
-          <a:bodyPr wrap="square" anchor="t" lIns="45720" rIns="45720">
+          <a:bodyPr wrap="square" lIns="45720" rIns="45720" anchor="t">
             <a:spAutoFit/>
           </a:bodyPr>
           <a:lstStyle/>
@@ -24197,7 +24860,7 @@
           <a:noFill/>
         </p:spPr>
         <p:txBody>
-          <a:bodyPr wrap="square" anchor="t" lIns="45720" rIns="45720">
+          <a:bodyPr wrap="square" lIns="45720" rIns="45720" anchor="t">
             <a:spAutoFit/>
           </a:bodyPr>
           <a:lstStyle/>
@@ -24254,7 +24917,7 @@
           </a:fontRef>
         </p:style>
         <p:txBody>
-          <a:bodyPr rtlCol="0" anchor="ctr" wrap="square" lIns="73152" rIns="73152"/>
+          <a:bodyPr wrap="square" lIns="73152" rIns="73152" rtlCol="0" anchor="ctr"/>
           <a:lstStyle/>
           <a:p>
             <a:pPr algn="ctr"/>
@@ -24323,6 +24986,7 @@
           <a:lstStyle/>
           <a:p>
             <a:pPr algn="ctr"/>
+            <a:endParaRPr/>
           </a:p>
         </p:txBody>
       </p:sp>
@@ -24365,7 +25029,7 @@
           </a:fontRef>
         </p:style>
         <p:txBody>
-          <a:bodyPr rtlCol="0" anchor="ctr" wrap="square" lIns="73152" rIns="73152"/>
+          <a:bodyPr wrap="square" lIns="73152" rIns="73152" rtlCol="0" anchor="ctr"/>
           <a:lstStyle/>
           <a:p>
             <a:pPr algn="ctr"/>
@@ -24434,6 +25098,7 @@
           <a:lstStyle/>
           <a:p>
             <a:pPr algn="ctr"/>
+            <a:endParaRPr/>
           </a:p>
         </p:txBody>
       </p:sp>
@@ -24476,7 +25141,7 @@
           </a:fontRef>
         </p:style>
         <p:txBody>
-          <a:bodyPr rtlCol="0" anchor="ctr" wrap="square" lIns="73152" rIns="73152"/>
+          <a:bodyPr wrap="square" lIns="73152" rIns="73152" rtlCol="0" anchor="ctr"/>
           <a:lstStyle/>
           <a:p>
             <a:pPr algn="ctr"/>
@@ -24545,6 +25210,7 @@
           <a:lstStyle/>
           <a:p>
             <a:pPr algn="ctr"/>
+            <a:endParaRPr/>
           </a:p>
         </p:txBody>
       </p:sp>
@@ -24587,7 +25253,7 @@
           </a:fontRef>
         </p:style>
         <p:txBody>
-          <a:bodyPr rtlCol="0" anchor="ctr" wrap="square" lIns="73152" rIns="73152"/>
+          <a:bodyPr wrap="square" lIns="73152" rIns="73152" rtlCol="0" anchor="ctr"/>
           <a:lstStyle/>
           <a:p>
             <a:pPr algn="ctr"/>
@@ -24654,7 +25320,7 @@
           </a:fontRef>
         </p:style>
         <p:txBody>
-          <a:bodyPr rtlCol="0" anchor="ctr" wrap="square" lIns="73152" rIns="73152"/>
+          <a:bodyPr wrap="square" lIns="73152" rIns="73152" rtlCol="0" anchor="ctr"/>
           <a:lstStyle/>
           <a:p>
             <a:pPr algn="ctr"/>
@@ -24723,6 +25389,7 @@
           <a:lstStyle/>
           <a:p>
             <a:pPr algn="ctr"/>
+            <a:endParaRPr/>
           </a:p>
         </p:txBody>
       </p:sp>
@@ -24736,23 +25403,41 @@
         </p:nvGraphicFramePr>
         <p:xfrm>
           <a:off x="6035040" y="1554480"/>
-          <a:ext cx="5577840" cy="3657600"/>
+          <a:ext cx="5577840" cy="3730752"/>
         </p:xfrm>
         <a:graphic>
           <a:graphicData uri="http://schemas.openxmlformats.org/drawingml/2006/table">
             <a:tbl>
-              <a:tblPr firstRow="0" bandRow="0">
+              <a:tblPr>
                 <a:tableStyleId>{5C22544A-7EE6-4342-B048-85BDC9FD1C3A}</a:tableStyleId>
               </a:tblPr>
               <a:tblGrid>
-                <a:gridCol w="1920240"/>
-                <a:gridCol w="2651760"/>
-                <a:gridCol w="1005840"/>
+                <a:gridCol w="1920240">
+                  <a:extLst>
+                    <a:ext uri="{9D8B030D-6E8A-4147-A177-3AD203B41FA5}">
+                      <a16:colId xmlns:a16="http://schemas.microsoft.com/office/drawing/2014/main" val="20000"/>
+                    </a:ext>
+                  </a:extLst>
+                </a:gridCol>
+                <a:gridCol w="2651760">
+                  <a:extLst>
+                    <a:ext uri="{9D8B030D-6E8A-4147-A177-3AD203B41FA5}">
+                      <a16:colId xmlns:a16="http://schemas.microsoft.com/office/drawing/2014/main" val="20001"/>
+                    </a:ext>
+                  </a:extLst>
+                </a:gridCol>
+                <a:gridCol w="1005840">
+                  <a:extLst>
+                    <a:ext uri="{9D8B030D-6E8A-4147-A177-3AD203B41FA5}">
+                      <a16:colId xmlns:a16="http://schemas.microsoft.com/office/drawing/2014/main" val="20002"/>
+                    </a:ext>
+                  </a:extLst>
+                </a:gridCol>
               </a:tblGrid>
               <a:tr h="457200">
                 <a:tc>
                   <a:txBody>
-                    <a:bodyPr wrap="square"/>
+                    <a:bodyPr/>
                     <a:lstStyle/>
                     <a:p>
                       <a:r>
@@ -24774,7 +25459,7 @@
                 </a:tc>
                 <a:tc>
                   <a:txBody>
-                    <a:bodyPr wrap="square"/>
+                    <a:bodyPr/>
                     <a:lstStyle/>
                     <a:p>
                       <a:r>
@@ -24796,7 +25481,7 @@
                 </a:tc>
                 <a:tc>
                   <a:txBody>
-                    <a:bodyPr wrap="square"/>
+                    <a:bodyPr/>
                     <a:lstStyle/>
                     <a:p>
                       <a:r>
@@ -24816,11 +25501,16 @@
                     </a:solidFill>
                   </a:tcPr>
                 </a:tc>
+                <a:extLst>
+                  <a:ext uri="{0D108BD9-81ED-4DB2-BD59-A6C34878D82A}">
+                    <a16:rowId xmlns:a16="http://schemas.microsoft.com/office/drawing/2014/main" val="10000"/>
+                  </a:ext>
+                </a:extLst>
               </a:tr>
               <a:tr h="457200">
                 <a:tc>
                   <a:txBody>
-                    <a:bodyPr wrap="square"/>
+                    <a:bodyPr/>
                     <a:lstStyle/>
                     <a:p>
                       <a:r>
@@ -24842,7 +25532,7 @@
                 </a:tc>
                 <a:tc>
                   <a:txBody>
-                    <a:bodyPr wrap="square"/>
+                    <a:bodyPr/>
                     <a:lstStyle/>
                     <a:p>
                       <a:r>
@@ -24864,7 +25554,7 @@
                 </a:tc>
                 <a:tc>
                   <a:txBody>
-                    <a:bodyPr wrap="square"/>
+                    <a:bodyPr/>
                     <a:lstStyle/>
                     <a:p>
                       <a:r>
@@ -24884,11 +25574,16 @@
                     </a:solidFill>
                   </a:tcPr>
                 </a:tc>
+                <a:extLst>
+                  <a:ext uri="{0D108BD9-81ED-4DB2-BD59-A6C34878D82A}">
+                    <a16:rowId xmlns:a16="http://schemas.microsoft.com/office/drawing/2014/main" val="10001"/>
+                  </a:ext>
+                </a:extLst>
               </a:tr>
               <a:tr h="457200">
                 <a:tc>
                   <a:txBody>
-                    <a:bodyPr wrap="square"/>
+                    <a:bodyPr/>
                     <a:lstStyle/>
                     <a:p>
                       <a:r>
@@ -24910,7 +25605,7 @@
                 </a:tc>
                 <a:tc>
                   <a:txBody>
-                    <a:bodyPr wrap="square"/>
+                    <a:bodyPr/>
                     <a:lstStyle/>
                     <a:p>
                       <a:r>
@@ -24932,7 +25627,7 @@
                 </a:tc>
                 <a:tc>
                   <a:txBody>
-                    <a:bodyPr wrap="square"/>
+                    <a:bodyPr/>
                     <a:lstStyle/>
                     <a:p>
                       <a:r>
@@ -24952,11 +25647,16 @@
                     </a:solidFill>
                   </a:tcPr>
                 </a:tc>
+                <a:extLst>
+                  <a:ext uri="{0D108BD9-81ED-4DB2-BD59-A6C34878D82A}">
+                    <a16:rowId xmlns:a16="http://schemas.microsoft.com/office/drawing/2014/main" val="10002"/>
+                  </a:ext>
+                </a:extLst>
               </a:tr>
               <a:tr h="457200">
                 <a:tc>
                   <a:txBody>
-                    <a:bodyPr wrap="square"/>
+                    <a:bodyPr/>
                     <a:lstStyle/>
                     <a:p>
                       <a:r>
@@ -24978,7 +25678,7 @@
                 </a:tc>
                 <a:tc>
                   <a:txBody>
-                    <a:bodyPr wrap="square"/>
+                    <a:bodyPr/>
                     <a:lstStyle/>
                     <a:p>
                       <a:r>
@@ -25000,7 +25700,7 @@
                 </a:tc>
                 <a:tc>
                   <a:txBody>
-                    <a:bodyPr wrap="square"/>
+                    <a:bodyPr/>
                     <a:lstStyle/>
                     <a:p>
                       <a:r>
@@ -25020,11 +25720,16 @@
                     </a:solidFill>
                   </a:tcPr>
                 </a:tc>
+                <a:extLst>
+                  <a:ext uri="{0D108BD9-81ED-4DB2-BD59-A6C34878D82A}">
+                    <a16:rowId xmlns:a16="http://schemas.microsoft.com/office/drawing/2014/main" val="10003"/>
+                  </a:ext>
+                </a:extLst>
               </a:tr>
               <a:tr h="457200">
                 <a:tc>
                   <a:txBody>
-                    <a:bodyPr wrap="square"/>
+                    <a:bodyPr/>
                     <a:lstStyle/>
                     <a:p>
                       <a:r>
@@ -25046,7 +25751,7 @@
                 </a:tc>
                 <a:tc>
                   <a:txBody>
-                    <a:bodyPr wrap="square"/>
+                    <a:bodyPr/>
                     <a:lstStyle/>
                     <a:p>
                       <a:r>
@@ -25068,7 +25773,7 @@
                 </a:tc>
                 <a:tc>
                   <a:txBody>
-                    <a:bodyPr wrap="square"/>
+                    <a:bodyPr/>
                     <a:lstStyle/>
                     <a:p>
                       <a:r>
@@ -25088,11 +25793,16 @@
                     </a:solidFill>
                   </a:tcPr>
                 </a:tc>
+                <a:extLst>
+                  <a:ext uri="{0D108BD9-81ED-4DB2-BD59-A6C34878D82A}">
+                    <a16:rowId xmlns:a16="http://schemas.microsoft.com/office/drawing/2014/main" val="10004"/>
+                  </a:ext>
+                </a:extLst>
               </a:tr>
               <a:tr h="457200">
                 <a:tc>
                   <a:txBody>
-                    <a:bodyPr wrap="square"/>
+                    <a:bodyPr/>
                     <a:lstStyle/>
                     <a:p>
                       <a:r>
@@ -25114,7 +25824,7 @@
                 </a:tc>
                 <a:tc>
                   <a:txBody>
-                    <a:bodyPr wrap="square"/>
+                    <a:bodyPr/>
                     <a:lstStyle/>
                     <a:p>
                       <a:r>
@@ -25136,7 +25846,7 @@
                 </a:tc>
                 <a:tc>
                   <a:txBody>
-                    <a:bodyPr wrap="square"/>
+                    <a:bodyPr/>
                     <a:lstStyle/>
                     <a:p>
                       <a:r>
@@ -25156,11 +25866,16 @@
                     </a:solidFill>
                   </a:tcPr>
                 </a:tc>
+                <a:extLst>
+                  <a:ext uri="{0D108BD9-81ED-4DB2-BD59-A6C34878D82A}">
+                    <a16:rowId xmlns:a16="http://schemas.microsoft.com/office/drawing/2014/main" val="10005"/>
+                  </a:ext>
+                </a:extLst>
               </a:tr>
               <a:tr h="457200">
                 <a:tc>
                   <a:txBody>
-                    <a:bodyPr wrap="square"/>
+                    <a:bodyPr/>
                     <a:lstStyle/>
                     <a:p>
                       <a:r>
@@ -25182,7 +25897,7 @@
                 </a:tc>
                 <a:tc>
                   <a:txBody>
-                    <a:bodyPr wrap="square"/>
+                    <a:bodyPr/>
                     <a:lstStyle/>
                     <a:p>
                       <a:r>
@@ -25204,7 +25919,7 @@
                 </a:tc>
                 <a:tc>
                   <a:txBody>
-                    <a:bodyPr wrap="square"/>
+                    <a:bodyPr/>
                     <a:lstStyle/>
                     <a:p>
                       <a:r>
@@ -25224,11 +25939,16 @@
                     </a:solidFill>
                   </a:tcPr>
                 </a:tc>
+                <a:extLst>
+                  <a:ext uri="{0D108BD9-81ED-4DB2-BD59-A6C34878D82A}">
+                    <a16:rowId xmlns:a16="http://schemas.microsoft.com/office/drawing/2014/main" val="10006"/>
+                  </a:ext>
+                </a:extLst>
               </a:tr>
               <a:tr h="457200">
                 <a:tc>
                   <a:txBody>
-                    <a:bodyPr wrap="square"/>
+                    <a:bodyPr/>
                     <a:lstStyle/>
                     <a:p>
                       <a:r>
@@ -25250,7 +25970,7 @@
                 </a:tc>
                 <a:tc>
                   <a:txBody>
-                    <a:bodyPr wrap="square"/>
+                    <a:bodyPr/>
                     <a:lstStyle/>
                     <a:p>
                       <a:r>
@@ -25272,7 +25992,7 @@
                 </a:tc>
                 <a:tc>
                   <a:txBody>
-                    <a:bodyPr wrap="square"/>
+                    <a:bodyPr/>
                     <a:lstStyle/>
                     <a:p>
                       <a:r>
@@ -25292,6 +26012,11 @@
                     </a:solidFill>
                   </a:tcPr>
                 </a:tc>
+                <a:extLst>
+                  <a:ext uri="{0D108BD9-81ED-4DB2-BD59-A6C34878D82A}">
+                    <a16:rowId xmlns:a16="http://schemas.microsoft.com/office/drawing/2014/main" val="10007"/>
+                  </a:ext>
+                </a:extLst>
               </a:tr>
             </a:tbl>
           </a:graphicData>
@@ -25306,7 +26031,7 @@
 </file>
 
 <file path=ppt/slides/slide7.xml><?xml version="1.0" encoding="utf-8"?>
-<p:sld xmlns:a="http://schemas.openxmlformats.org/drawingml/2006/main" xmlns:p="http://schemas.openxmlformats.org/presentationml/2006/main" xmlns:r="http://schemas.openxmlformats.org/officeDocument/2006/relationships">
+<p:sld xmlns:a="http://schemas.openxmlformats.org/drawingml/2006/main" xmlns:r="http://schemas.openxmlformats.org/officeDocument/2006/relationships" xmlns:p="http://schemas.openxmlformats.org/presentationml/2006/main">
   <p:cSld>
     <p:spTree>
       <p:nvGrpSpPr>
@@ -25314,7 +26039,14 @@
         <p:cNvGrpSpPr/>
         <p:nvPr/>
       </p:nvGrpSpPr>
-      <p:grpSpPr/>
+      <p:grpSpPr>
+        <a:xfrm>
+          <a:off x="0" y="0"/>
+          <a:ext cx="0" cy="0"/>
+          <a:chOff x="0" y="0"/>
+          <a:chExt cx="0" cy="0"/>
+        </a:xfrm>
+      </p:grpSpPr>
       <p:sp>
         <p:nvSpPr>
           <p:cNvPr id="2" name="TextBox 1"/>
@@ -25332,7 +26064,7 @@
           <a:noFill/>
         </p:spPr>
         <p:txBody>
-          <a:bodyPr wrap="square" anchor="t" lIns="45720" rIns="45720">
+          <a:bodyPr wrap="square" lIns="45720" rIns="45720" anchor="t">
             <a:spAutoFit/>
           </a:bodyPr>
           <a:lstStyle/>
@@ -25367,7 +26099,7 @@
           <a:noFill/>
         </p:spPr>
         <p:txBody>
-          <a:bodyPr wrap="square" anchor="ctr" lIns="45720" rIns="45720">
+          <a:bodyPr wrap="square" lIns="45720" rIns="45720" anchor="ctr">
             <a:spAutoFit/>
           </a:bodyPr>
           <a:lstStyle/>
@@ -25402,7 +26134,7 @@
           <a:noFill/>
         </p:spPr>
         <p:txBody>
-          <a:bodyPr wrap="square" anchor="t" lIns="45720" rIns="45720">
+          <a:bodyPr wrap="square" lIns="45720" rIns="45720" anchor="t">
             <a:spAutoFit/>
           </a:bodyPr>
           <a:lstStyle/>
@@ -25437,7 +26169,7 @@
           <a:noFill/>
         </p:spPr>
         <p:txBody>
-          <a:bodyPr wrap="square" anchor="t" lIns="45720" rIns="45720">
+          <a:bodyPr wrap="square" lIns="45720" rIns="45720" anchor="t">
             <a:spAutoFit/>
           </a:bodyPr>
           <a:lstStyle/>
@@ -25470,19 +26202,43 @@
         <a:graphic>
           <a:graphicData uri="http://schemas.openxmlformats.org/drawingml/2006/table">
             <a:tbl>
-              <a:tblPr firstRow="0" bandRow="0">
+              <a:tblPr>
                 <a:tableStyleId>{5C22544A-7EE6-4342-B048-85BDC9FD1C3A}</a:tableStyleId>
               </a:tblPr>
               <a:tblGrid>
-                <a:gridCol w="1828800"/>
-                <a:gridCol w="3657600"/>
-                <a:gridCol w="1463040"/>
-                <a:gridCol w="4114800"/>
+                <a:gridCol w="1828800">
+                  <a:extLst>
+                    <a:ext uri="{9D8B030D-6E8A-4147-A177-3AD203B41FA5}">
+                      <a16:colId xmlns:a16="http://schemas.microsoft.com/office/drawing/2014/main" val="20000"/>
+                    </a:ext>
+                  </a:extLst>
+                </a:gridCol>
+                <a:gridCol w="3657600">
+                  <a:extLst>
+                    <a:ext uri="{9D8B030D-6E8A-4147-A177-3AD203B41FA5}">
+                      <a16:colId xmlns:a16="http://schemas.microsoft.com/office/drawing/2014/main" val="20001"/>
+                    </a:ext>
+                  </a:extLst>
+                </a:gridCol>
+                <a:gridCol w="1463040">
+                  <a:extLst>
+                    <a:ext uri="{9D8B030D-6E8A-4147-A177-3AD203B41FA5}">
+                      <a16:colId xmlns:a16="http://schemas.microsoft.com/office/drawing/2014/main" val="20002"/>
+                    </a:ext>
+                  </a:extLst>
+                </a:gridCol>
+                <a:gridCol w="4114800">
+                  <a:extLst>
+                    <a:ext uri="{9D8B030D-6E8A-4147-A177-3AD203B41FA5}">
+                      <a16:colId xmlns:a16="http://schemas.microsoft.com/office/drawing/2014/main" val="20003"/>
+                    </a:ext>
+                  </a:extLst>
+                </a:gridCol>
               </a:tblGrid>
               <a:tr h="457200">
                 <a:tc>
                   <a:txBody>
-                    <a:bodyPr wrap="square"/>
+                    <a:bodyPr/>
                     <a:lstStyle/>
                     <a:p>
                       <a:r>
@@ -25504,7 +26260,7 @@
                 </a:tc>
                 <a:tc>
                   <a:txBody>
-                    <a:bodyPr wrap="square"/>
+                    <a:bodyPr/>
                     <a:lstStyle/>
                     <a:p>
                       <a:r>
@@ -25526,7 +26282,7 @@
                 </a:tc>
                 <a:tc>
                   <a:txBody>
-                    <a:bodyPr wrap="square"/>
+                    <a:bodyPr/>
                     <a:lstStyle/>
                     <a:p>
                       <a:r>
@@ -25548,7 +26304,7 @@
                 </a:tc>
                 <a:tc>
                   <a:txBody>
-                    <a:bodyPr wrap="square"/>
+                    <a:bodyPr/>
                     <a:lstStyle/>
                     <a:p>
                       <a:r>
@@ -25568,11 +26324,16 @@
                     </a:solidFill>
                   </a:tcPr>
                 </a:tc>
+                <a:extLst>
+                  <a:ext uri="{0D108BD9-81ED-4DB2-BD59-A6C34878D82A}">
+                    <a16:rowId xmlns:a16="http://schemas.microsoft.com/office/drawing/2014/main" val="10000"/>
+                  </a:ext>
+                </a:extLst>
               </a:tr>
               <a:tr h="457200">
                 <a:tc>
                   <a:txBody>
-                    <a:bodyPr wrap="square"/>
+                    <a:bodyPr/>
                     <a:lstStyle/>
                     <a:p>
                       <a:r>
@@ -25594,7 +26355,7 @@
                 </a:tc>
                 <a:tc>
                   <a:txBody>
-                    <a:bodyPr wrap="square"/>
+                    <a:bodyPr/>
                     <a:lstStyle/>
                     <a:p>
                       <a:r>
@@ -25616,7 +26377,7 @@
                 </a:tc>
                 <a:tc>
                   <a:txBody>
-                    <a:bodyPr wrap="square"/>
+                    <a:bodyPr/>
                     <a:lstStyle/>
                     <a:p>
                       <a:r>
@@ -25638,7 +26399,7 @@
                 </a:tc>
                 <a:tc>
                   <a:txBody>
-                    <a:bodyPr wrap="square"/>
+                    <a:bodyPr/>
                     <a:lstStyle/>
                     <a:p>
                       <a:r>
@@ -25658,11 +26419,16 @@
                     </a:solidFill>
                   </a:tcPr>
                 </a:tc>
+                <a:extLst>
+                  <a:ext uri="{0D108BD9-81ED-4DB2-BD59-A6C34878D82A}">
+                    <a16:rowId xmlns:a16="http://schemas.microsoft.com/office/drawing/2014/main" val="10001"/>
+                  </a:ext>
+                </a:extLst>
               </a:tr>
               <a:tr h="457200">
                 <a:tc>
                   <a:txBody>
-                    <a:bodyPr wrap="square"/>
+                    <a:bodyPr/>
                     <a:lstStyle/>
                     <a:p>
                       <a:r>
@@ -25684,7 +26450,7 @@
                 </a:tc>
                 <a:tc>
                   <a:txBody>
-                    <a:bodyPr wrap="square"/>
+                    <a:bodyPr/>
                     <a:lstStyle/>
                     <a:p>
                       <a:r>
@@ -25706,7 +26472,7 @@
                 </a:tc>
                 <a:tc>
                   <a:txBody>
-                    <a:bodyPr wrap="square"/>
+                    <a:bodyPr/>
                     <a:lstStyle/>
                     <a:p>
                       <a:r>
@@ -25728,7 +26494,7 @@
                 </a:tc>
                 <a:tc>
                   <a:txBody>
-                    <a:bodyPr wrap="square"/>
+                    <a:bodyPr/>
                     <a:lstStyle/>
                     <a:p>
                       <a:r>
@@ -25748,11 +26514,16 @@
                     </a:solidFill>
                   </a:tcPr>
                 </a:tc>
+                <a:extLst>
+                  <a:ext uri="{0D108BD9-81ED-4DB2-BD59-A6C34878D82A}">
+                    <a16:rowId xmlns:a16="http://schemas.microsoft.com/office/drawing/2014/main" val="10002"/>
+                  </a:ext>
+                </a:extLst>
               </a:tr>
               <a:tr h="457200">
                 <a:tc>
                   <a:txBody>
-                    <a:bodyPr wrap="square"/>
+                    <a:bodyPr/>
                     <a:lstStyle/>
                     <a:p>
                       <a:r>
@@ -25774,7 +26545,7 @@
                 </a:tc>
                 <a:tc>
                   <a:txBody>
-                    <a:bodyPr wrap="square"/>
+                    <a:bodyPr/>
                     <a:lstStyle/>
                     <a:p>
                       <a:r>
@@ -25796,7 +26567,7 @@
                 </a:tc>
                 <a:tc>
                   <a:txBody>
-                    <a:bodyPr wrap="square"/>
+                    <a:bodyPr/>
                     <a:lstStyle/>
                     <a:p>
                       <a:r>
@@ -25818,7 +26589,7 @@
                 </a:tc>
                 <a:tc>
                   <a:txBody>
-                    <a:bodyPr wrap="square"/>
+                    <a:bodyPr/>
                     <a:lstStyle/>
                     <a:p>
                       <a:r>
@@ -25838,11 +26609,16 @@
                     </a:solidFill>
                   </a:tcPr>
                 </a:tc>
+                <a:extLst>
+                  <a:ext uri="{0D108BD9-81ED-4DB2-BD59-A6C34878D82A}">
+                    <a16:rowId xmlns:a16="http://schemas.microsoft.com/office/drawing/2014/main" val="10003"/>
+                  </a:ext>
+                </a:extLst>
               </a:tr>
               <a:tr h="457200">
                 <a:tc>
                   <a:txBody>
-                    <a:bodyPr wrap="square"/>
+                    <a:bodyPr/>
                     <a:lstStyle/>
                     <a:p>
                       <a:r>
@@ -25864,7 +26640,7 @@
                 </a:tc>
                 <a:tc>
                   <a:txBody>
-                    <a:bodyPr wrap="square"/>
+                    <a:bodyPr/>
                     <a:lstStyle/>
                     <a:p>
                       <a:r>
@@ -25886,7 +26662,7 @@
                 </a:tc>
                 <a:tc>
                   <a:txBody>
-                    <a:bodyPr wrap="square"/>
+                    <a:bodyPr/>
                     <a:lstStyle/>
                     <a:p>
                       <a:r>
@@ -25908,7 +26684,7 @@
                 </a:tc>
                 <a:tc>
                   <a:txBody>
-                    <a:bodyPr wrap="square"/>
+                    <a:bodyPr/>
                     <a:lstStyle/>
                     <a:p>
                       <a:r>
@@ -25928,11 +26704,16 @@
                     </a:solidFill>
                   </a:tcPr>
                 </a:tc>
+                <a:extLst>
+                  <a:ext uri="{0D108BD9-81ED-4DB2-BD59-A6C34878D82A}">
+                    <a16:rowId xmlns:a16="http://schemas.microsoft.com/office/drawing/2014/main" val="10004"/>
+                  </a:ext>
+                </a:extLst>
               </a:tr>
               <a:tr h="457200">
                 <a:tc>
                   <a:txBody>
-                    <a:bodyPr wrap="square"/>
+                    <a:bodyPr/>
                     <a:lstStyle/>
                     <a:p>
                       <a:r>
@@ -25954,7 +26735,7 @@
                 </a:tc>
                 <a:tc>
                   <a:txBody>
-                    <a:bodyPr wrap="square"/>
+                    <a:bodyPr/>
                     <a:lstStyle/>
                     <a:p>
                       <a:r>
@@ -25976,7 +26757,7 @@
                 </a:tc>
                 <a:tc>
                   <a:txBody>
-                    <a:bodyPr wrap="square"/>
+                    <a:bodyPr/>
                     <a:lstStyle/>
                     <a:p>
                       <a:r>
@@ -25998,7 +26779,7 @@
                 </a:tc>
                 <a:tc>
                   <a:txBody>
-                    <a:bodyPr wrap="square"/>
+                    <a:bodyPr/>
                     <a:lstStyle/>
                     <a:p>
                       <a:r>
@@ -26018,11 +26799,16 @@
                     </a:solidFill>
                   </a:tcPr>
                 </a:tc>
+                <a:extLst>
+                  <a:ext uri="{0D108BD9-81ED-4DB2-BD59-A6C34878D82A}">
+                    <a16:rowId xmlns:a16="http://schemas.microsoft.com/office/drawing/2014/main" val="10005"/>
+                  </a:ext>
+                </a:extLst>
               </a:tr>
               <a:tr h="457200">
                 <a:tc>
                   <a:txBody>
-                    <a:bodyPr wrap="square"/>
+                    <a:bodyPr/>
                     <a:lstStyle/>
                     <a:p>
                       <a:r>
@@ -26044,7 +26830,7 @@
                 </a:tc>
                 <a:tc>
                   <a:txBody>
-                    <a:bodyPr wrap="square"/>
+                    <a:bodyPr/>
                     <a:lstStyle/>
                     <a:p>
                       <a:r>
@@ -26066,7 +26852,7 @@
                 </a:tc>
                 <a:tc>
                   <a:txBody>
-                    <a:bodyPr wrap="square"/>
+                    <a:bodyPr/>
                     <a:lstStyle/>
                     <a:p>
                       <a:r>
@@ -26088,7 +26874,7 @@
                 </a:tc>
                 <a:tc>
                   <a:txBody>
-                    <a:bodyPr wrap="square"/>
+                    <a:bodyPr/>
                     <a:lstStyle/>
                     <a:p>
                       <a:r>
@@ -26108,11 +26894,16 @@
                     </a:solidFill>
                   </a:tcPr>
                 </a:tc>
+                <a:extLst>
+                  <a:ext uri="{0D108BD9-81ED-4DB2-BD59-A6C34878D82A}">
+                    <a16:rowId xmlns:a16="http://schemas.microsoft.com/office/drawing/2014/main" val="10006"/>
+                  </a:ext>
+                </a:extLst>
               </a:tr>
               <a:tr h="457200">
                 <a:tc>
                   <a:txBody>
-                    <a:bodyPr wrap="square"/>
+                    <a:bodyPr/>
                     <a:lstStyle/>
                     <a:p>
                       <a:r>
@@ -26134,7 +26925,7 @@
                 </a:tc>
                 <a:tc>
                   <a:txBody>
-                    <a:bodyPr wrap="square"/>
+                    <a:bodyPr/>
                     <a:lstStyle/>
                     <a:p>
                       <a:r>
@@ -26156,7 +26947,7 @@
                 </a:tc>
                 <a:tc>
                   <a:txBody>
-                    <a:bodyPr wrap="square"/>
+                    <a:bodyPr/>
                     <a:lstStyle/>
                     <a:p>
                       <a:r>
@@ -26178,7 +26969,7 @@
                 </a:tc>
                 <a:tc>
                   <a:txBody>
-                    <a:bodyPr wrap="square"/>
+                    <a:bodyPr/>
                     <a:lstStyle/>
                     <a:p>
                       <a:r>
@@ -26198,11 +26989,16 @@
                     </a:solidFill>
                   </a:tcPr>
                 </a:tc>
+                <a:extLst>
+                  <a:ext uri="{0D108BD9-81ED-4DB2-BD59-A6C34878D82A}">
+                    <a16:rowId xmlns:a16="http://schemas.microsoft.com/office/drawing/2014/main" val="10007"/>
+                  </a:ext>
+                </a:extLst>
               </a:tr>
               <a:tr h="457200">
                 <a:tc>
                   <a:txBody>
-                    <a:bodyPr wrap="square"/>
+                    <a:bodyPr/>
                     <a:lstStyle/>
                     <a:p>
                       <a:r>
@@ -26224,7 +27020,7 @@
                 </a:tc>
                 <a:tc>
                   <a:txBody>
-                    <a:bodyPr wrap="square"/>
+                    <a:bodyPr/>
                     <a:lstStyle/>
                     <a:p>
                       <a:r>
@@ -26246,7 +27042,7 @@
                 </a:tc>
                 <a:tc>
                   <a:txBody>
-                    <a:bodyPr wrap="square"/>
+                    <a:bodyPr/>
                     <a:lstStyle/>
                     <a:p>
                       <a:r>
@@ -26268,7 +27064,7 @@
                 </a:tc>
                 <a:tc>
                   <a:txBody>
-                    <a:bodyPr wrap="square"/>
+                    <a:bodyPr/>
                     <a:lstStyle/>
                     <a:p>
                       <a:r>
@@ -26288,6 +27084,11 @@
                     </a:solidFill>
                   </a:tcPr>
                 </a:tc>
+                <a:extLst>
+                  <a:ext uri="{0D108BD9-81ED-4DB2-BD59-A6C34878D82A}">
+                    <a16:rowId xmlns:a16="http://schemas.microsoft.com/office/drawing/2014/main" val="10008"/>
+                  </a:ext>
+                </a:extLst>
               </a:tr>
             </a:tbl>
           </a:graphicData>
@@ -26302,7 +27103,7 @@
 </file>
 
 <file path=ppt/slides/slide8.xml><?xml version="1.0" encoding="utf-8"?>
-<p:sld xmlns:a="http://schemas.openxmlformats.org/drawingml/2006/main" xmlns:p="http://schemas.openxmlformats.org/presentationml/2006/main" xmlns:r="http://schemas.openxmlformats.org/officeDocument/2006/relationships">
+<p:sld xmlns:a="http://schemas.openxmlformats.org/drawingml/2006/main" xmlns:r="http://schemas.openxmlformats.org/officeDocument/2006/relationships" xmlns:p="http://schemas.openxmlformats.org/presentationml/2006/main">
   <p:cSld>
     <p:spTree>
       <p:nvGrpSpPr>
@@ -26310,7 +27111,14 @@
         <p:cNvGrpSpPr/>
         <p:nvPr/>
       </p:nvGrpSpPr>
-      <p:grpSpPr/>
+      <p:grpSpPr>
+        <a:xfrm>
+          <a:off x="0" y="0"/>
+          <a:ext cx="0" cy="0"/>
+          <a:chOff x="0" y="0"/>
+          <a:chExt cx="0" cy="0"/>
+        </a:xfrm>
+      </p:grpSpPr>
       <p:sp>
         <p:nvSpPr>
           <p:cNvPr id="2" name="TextBox 1"/>
@@ -26328,7 +27136,7 @@
           <a:noFill/>
         </p:spPr>
         <p:txBody>
-          <a:bodyPr wrap="square" anchor="t" lIns="45720" rIns="45720">
+          <a:bodyPr wrap="square" lIns="45720" rIns="45720" anchor="t">
             <a:spAutoFit/>
           </a:bodyPr>
           <a:lstStyle/>
@@ -26363,7 +27171,7 @@
           <a:noFill/>
         </p:spPr>
         <p:txBody>
-          <a:bodyPr wrap="square" anchor="ctr" lIns="45720" rIns="45720">
+          <a:bodyPr wrap="square" lIns="45720" rIns="45720" anchor="ctr">
             <a:spAutoFit/>
           </a:bodyPr>
           <a:lstStyle/>
@@ -26398,7 +27206,7 @@
           <a:noFill/>
         </p:spPr>
         <p:txBody>
-          <a:bodyPr wrap="square" anchor="t" lIns="45720" rIns="45720">
+          <a:bodyPr wrap="square" lIns="45720" rIns="45720" anchor="t">
             <a:spAutoFit/>
           </a:bodyPr>
           <a:lstStyle/>
@@ -26433,7 +27241,7 @@
           <a:noFill/>
         </p:spPr>
         <p:txBody>
-          <a:bodyPr wrap="square" anchor="t" lIns="45720" rIns="45720">
+          <a:bodyPr wrap="square" lIns="45720" rIns="45720" anchor="t">
             <a:spAutoFit/>
           </a:bodyPr>
           <a:lstStyle/>
@@ -26492,7 +27300,9 @@
         <p:txBody>
           <a:bodyPr rtlCol="0" anchor="ctr"/>
           <a:lstStyle/>
-          <a:p/>
+          <a:p>
+            <a:endParaRPr/>
+          </a:p>
         </p:txBody>
       </p:sp>
       <p:sp>
@@ -26532,7 +27342,7 @@
           </a:fontRef>
         </p:style>
         <p:txBody>
-          <a:bodyPr rtlCol="0" anchor="ctr" lIns="0" rIns="0" tIns="0" bIns="0"/>
+          <a:bodyPr lIns="0" tIns="0" rIns="0" bIns="0" rtlCol="0" anchor="ctr"/>
           <a:lstStyle/>
           <a:p>
             <a:pPr algn="ctr"/>
@@ -26565,7 +27375,7 @@
           <a:noFill/>
         </p:spPr>
         <p:txBody>
-          <a:bodyPr wrap="square" anchor="ctr" lIns="45720" rIns="45720">
+          <a:bodyPr wrap="square" lIns="45720" rIns="45720" anchor="ctr">
             <a:spAutoFit/>
           </a:bodyPr>
           <a:lstStyle/>
@@ -26600,7 +27410,7 @@
           <a:noFill/>
         </p:spPr>
         <p:txBody>
-          <a:bodyPr wrap="square" anchor="t" lIns="45720" rIns="45720">
+          <a:bodyPr wrap="square" lIns="45720" rIns="45720" anchor="t">
             <a:spAutoFit/>
           </a:bodyPr>
           <a:lstStyle/>
@@ -26659,7 +27469,9 @@
         <p:txBody>
           <a:bodyPr rtlCol="0" anchor="ctr"/>
           <a:lstStyle/>
-          <a:p/>
+          <a:p>
+            <a:endParaRPr/>
+          </a:p>
         </p:txBody>
       </p:sp>
       <p:sp>
@@ -26699,7 +27511,7 @@
           </a:fontRef>
         </p:style>
         <p:txBody>
-          <a:bodyPr rtlCol="0" anchor="ctr" lIns="0" rIns="0" tIns="0" bIns="0"/>
+          <a:bodyPr lIns="0" tIns="0" rIns="0" bIns="0" rtlCol="0" anchor="ctr"/>
           <a:lstStyle/>
           <a:p>
             <a:pPr algn="ctr"/>
@@ -26732,7 +27544,7 @@
           <a:noFill/>
         </p:spPr>
         <p:txBody>
-          <a:bodyPr wrap="square" anchor="ctr" lIns="45720" rIns="45720">
+          <a:bodyPr wrap="square" lIns="45720" rIns="45720" anchor="ctr">
             <a:spAutoFit/>
           </a:bodyPr>
           <a:lstStyle/>
@@ -26767,7 +27579,7 @@
           <a:noFill/>
         </p:spPr>
         <p:txBody>
-          <a:bodyPr wrap="square" anchor="t" lIns="45720" rIns="45720">
+          <a:bodyPr wrap="square" lIns="45720" rIns="45720" anchor="t">
             <a:spAutoFit/>
           </a:bodyPr>
           <a:lstStyle/>
@@ -26826,7 +27638,9 @@
         <p:txBody>
           <a:bodyPr rtlCol="0" anchor="ctr"/>
           <a:lstStyle/>
-          <a:p/>
+          <a:p>
+            <a:endParaRPr/>
+          </a:p>
         </p:txBody>
       </p:sp>
       <p:sp>
@@ -26866,7 +27680,7 @@
           </a:fontRef>
         </p:style>
         <p:txBody>
-          <a:bodyPr rtlCol="0" anchor="ctr" lIns="0" rIns="0" tIns="0" bIns="0"/>
+          <a:bodyPr lIns="0" tIns="0" rIns="0" bIns="0" rtlCol="0" anchor="ctr"/>
           <a:lstStyle/>
           <a:p>
             <a:pPr algn="ctr"/>
@@ -26899,7 +27713,7 @@
           <a:noFill/>
         </p:spPr>
         <p:txBody>
-          <a:bodyPr wrap="square" anchor="ctr" lIns="45720" rIns="45720">
+          <a:bodyPr wrap="square" lIns="45720" rIns="45720" anchor="ctr">
             <a:spAutoFit/>
           </a:bodyPr>
           <a:lstStyle/>
@@ -26934,7 +27748,7 @@
           <a:noFill/>
         </p:spPr>
         <p:txBody>
-          <a:bodyPr wrap="square" anchor="t" lIns="45720" rIns="45720">
+          <a:bodyPr wrap="square" lIns="45720" rIns="45720" anchor="t">
             <a:spAutoFit/>
           </a:bodyPr>
           <a:lstStyle/>
@@ -26993,7 +27807,9 @@
         <p:txBody>
           <a:bodyPr rtlCol="0" anchor="ctr"/>
           <a:lstStyle/>
-          <a:p/>
+          <a:p>
+            <a:endParaRPr/>
+          </a:p>
         </p:txBody>
       </p:sp>
       <p:sp>
@@ -27033,7 +27849,7 @@
           </a:fontRef>
         </p:style>
         <p:txBody>
-          <a:bodyPr rtlCol="0" anchor="ctr" lIns="0" rIns="0" tIns="0" bIns="0"/>
+          <a:bodyPr lIns="0" tIns="0" rIns="0" bIns="0" rtlCol="0" anchor="ctr"/>
           <a:lstStyle/>
           <a:p>
             <a:pPr algn="ctr"/>
@@ -27066,7 +27882,7 @@
           <a:noFill/>
         </p:spPr>
         <p:txBody>
-          <a:bodyPr wrap="square" anchor="ctr" lIns="45720" rIns="45720">
+          <a:bodyPr wrap="square" lIns="45720" rIns="45720" anchor="ctr">
             <a:spAutoFit/>
           </a:bodyPr>
           <a:lstStyle/>
@@ -27101,7 +27917,7 @@
           <a:noFill/>
         </p:spPr>
         <p:txBody>
-          <a:bodyPr wrap="square" anchor="t" lIns="45720" rIns="45720">
+          <a:bodyPr wrap="square" lIns="45720" rIns="45720" anchor="t">
             <a:spAutoFit/>
           </a:bodyPr>
           <a:lstStyle/>
@@ -27160,7 +27976,9 @@
         <p:txBody>
           <a:bodyPr rtlCol="0" anchor="ctr"/>
           <a:lstStyle/>
-          <a:p/>
+          <a:p>
+            <a:endParaRPr/>
+          </a:p>
         </p:txBody>
       </p:sp>
       <p:sp>
@@ -27200,7 +28018,7 @@
           </a:fontRef>
         </p:style>
         <p:txBody>
-          <a:bodyPr rtlCol="0" anchor="ctr" lIns="0" rIns="0" tIns="0" bIns="0"/>
+          <a:bodyPr lIns="0" tIns="0" rIns="0" bIns="0" rtlCol="0" anchor="ctr"/>
           <a:lstStyle/>
           <a:p>
             <a:pPr algn="ctr"/>
@@ -27233,7 +28051,7 @@
           <a:noFill/>
         </p:spPr>
         <p:txBody>
-          <a:bodyPr wrap="square" anchor="ctr" lIns="45720" rIns="45720">
+          <a:bodyPr wrap="square" lIns="45720" rIns="45720" anchor="ctr">
             <a:spAutoFit/>
           </a:bodyPr>
           <a:lstStyle/>
@@ -27268,7 +28086,7 @@
           <a:noFill/>
         </p:spPr>
         <p:txBody>
-          <a:bodyPr wrap="square" anchor="t" lIns="45720" rIns="45720">
+          <a:bodyPr wrap="square" lIns="45720" rIns="45720" anchor="t">
             <a:spAutoFit/>
           </a:bodyPr>
           <a:lstStyle/>
@@ -27327,7 +28145,9 @@
         <p:txBody>
           <a:bodyPr rtlCol="0" anchor="ctr"/>
           <a:lstStyle/>
-          <a:p/>
+          <a:p>
+            <a:endParaRPr/>
+          </a:p>
         </p:txBody>
       </p:sp>
       <p:sp>
@@ -27367,7 +28187,7 @@
           </a:fontRef>
         </p:style>
         <p:txBody>
-          <a:bodyPr rtlCol="0" anchor="ctr" lIns="0" rIns="0" tIns="0" bIns="0"/>
+          <a:bodyPr lIns="0" tIns="0" rIns="0" bIns="0" rtlCol="0" anchor="ctr"/>
           <a:lstStyle/>
           <a:p>
             <a:pPr algn="ctr"/>
@@ -27400,7 +28220,7 @@
           <a:noFill/>
         </p:spPr>
         <p:txBody>
-          <a:bodyPr wrap="square" anchor="ctr" lIns="45720" rIns="45720">
+          <a:bodyPr wrap="square" lIns="45720" rIns="45720" anchor="ctr">
             <a:spAutoFit/>
           </a:bodyPr>
           <a:lstStyle/>
@@ -27435,7 +28255,7 @@
           <a:noFill/>
         </p:spPr>
         <p:txBody>
-          <a:bodyPr wrap="square" anchor="t" lIns="45720" rIns="45720">
+          <a:bodyPr wrap="square" lIns="45720" rIns="45720" anchor="t">
             <a:spAutoFit/>
           </a:bodyPr>
           <a:lstStyle/>
@@ -27494,7 +28314,9 @@
         <p:txBody>
           <a:bodyPr rtlCol="0" anchor="ctr"/>
           <a:lstStyle/>
-          <a:p/>
+          <a:p>
+            <a:endParaRPr/>
+          </a:p>
         </p:txBody>
       </p:sp>
       <p:sp>
@@ -27581,7 +28403,7 @@
 </file>
 
 <file path=ppt/slides/slide9.xml><?xml version="1.0" encoding="utf-8"?>
-<p:sld xmlns:a="http://schemas.openxmlformats.org/drawingml/2006/main" xmlns:p="http://schemas.openxmlformats.org/presentationml/2006/main" xmlns:r="http://schemas.openxmlformats.org/officeDocument/2006/relationships">
+<p:sld xmlns:a="http://schemas.openxmlformats.org/drawingml/2006/main" xmlns:r="http://schemas.openxmlformats.org/officeDocument/2006/relationships" xmlns:p="http://schemas.openxmlformats.org/presentationml/2006/main">
   <p:cSld>
     <p:spTree>
       <p:nvGrpSpPr>
@@ -27589,7 +28411,14 @@
         <p:cNvGrpSpPr/>
         <p:nvPr/>
       </p:nvGrpSpPr>
-      <p:grpSpPr/>
+      <p:grpSpPr>
+        <a:xfrm>
+          <a:off x="0" y="0"/>
+          <a:ext cx="0" cy="0"/>
+          <a:chOff x="0" y="0"/>
+          <a:chExt cx="0" cy="0"/>
+        </a:xfrm>
+      </p:grpSpPr>
       <p:sp>
         <p:nvSpPr>
           <p:cNvPr id="2" name="TextBox 1"/>
@@ -27607,7 +28436,7 @@
           <a:noFill/>
         </p:spPr>
         <p:txBody>
-          <a:bodyPr wrap="square" anchor="t" lIns="45720" rIns="45720">
+          <a:bodyPr wrap="square" lIns="45720" rIns="45720" anchor="t">
             <a:spAutoFit/>
           </a:bodyPr>
           <a:lstStyle/>
@@ -27642,7 +28471,7 @@
           <a:noFill/>
         </p:spPr>
         <p:txBody>
-          <a:bodyPr wrap="square" anchor="ctr" lIns="45720" rIns="45720">
+          <a:bodyPr wrap="square" lIns="45720" rIns="45720" anchor="ctr">
             <a:spAutoFit/>
           </a:bodyPr>
           <a:lstStyle/>
@@ -27677,7 +28506,7 @@
           <a:noFill/>
         </p:spPr>
         <p:txBody>
-          <a:bodyPr wrap="square" anchor="t" lIns="45720" rIns="45720">
+          <a:bodyPr wrap="square" lIns="45720" rIns="45720" anchor="t">
             <a:spAutoFit/>
           </a:bodyPr>
           <a:lstStyle/>
@@ -27712,7 +28541,7 @@
           <a:noFill/>
         </p:spPr>
         <p:txBody>
-          <a:bodyPr wrap="square" anchor="t" lIns="45720" rIns="45720">
+          <a:bodyPr wrap="square" lIns="45720" rIns="45720" anchor="t">
             <a:spAutoFit/>
           </a:bodyPr>
           <a:lstStyle/>
@@ -27771,7 +28600,9 @@
         <p:txBody>
           <a:bodyPr rtlCol="0" anchor="ctr"/>
           <a:lstStyle/>
-          <a:p/>
+          <a:p>
+            <a:endParaRPr/>
+          </a:p>
         </p:txBody>
       </p:sp>
       <p:sp>
@@ -27791,7 +28622,7 @@
           <a:noFill/>
         </p:spPr>
         <p:txBody>
-          <a:bodyPr wrap="square" anchor="ctr" lIns="45720" rIns="45720">
+          <a:bodyPr wrap="square" lIns="45720" rIns="45720" anchor="ctr">
             <a:spAutoFit/>
           </a:bodyPr>
           <a:lstStyle/>
@@ -27941,7 +28772,9 @@
         <p:txBody>
           <a:bodyPr rtlCol="0" anchor="ctr"/>
           <a:lstStyle/>
-          <a:p/>
+          <a:p>
+            <a:endParaRPr/>
+          </a:p>
         </p:txBody>
       </p:sp>
       <p:sp>
@@ -27961,7 +28794,7 @@
           <a:noFill/>
         </p:spPr>
         <p:txBody>
-          <a:bodyPr wrap="square" anchor="ctr" lIns="45720" rIns="45720">
+          <a:bodyPr wrap="square" lIns="45720" rIns="45720" anchor="ctr">
             <a:spAutoFit/>
           </a:bodyPr>
           <a:lstStyle/>
@@ -28087,7 +28920,7 @@
           <a:noFill/>
         </p:spPr>
         <p:txBody>
-          <a:bodyPr wrap="square" anchor="t" lIns="45720" rIns="45720">
+          <a:bodyPr wrap="square" lIns="45720" rIns="45720" anchor="t">
             <a:spAutoFit/>
           </a:bodyPr>
           <a:lstStyle/>
@@ -28146,7 +28979,9 @@
         <p:txBody>
           <a:bodyPr rtlCol="0" anchor="ctr"/>
           <a:lstStyle/>
-          <a:p/>
+          <a:p>
+            <a:endParaRPr/>
+          </a:p>
         </p:txBody>
       </p:sp>
       <p:sp>
@@ -28166,7 +29001,7 @@
           <a:noFill/>
         </p:spPr>
         <p:txBody>
-          <a:bodyPr wrap="square" anchor="ctr" lIns="45720" rIns="45720">
+          <a:bodyPr wrap="square" lIns="45720" rIns="45720" anchor="ctr">
             <a:spAutoFit/>
           </a:bodyPr>
           <a:lstStyle/>
@@ -28201,7 +29036,7 @@
           <a:noFill/>
         </p:spPr>
         <p:txBody>
-          <a:bodyPr wrap="square" anchor="t" lIns="45720" rIns="45720">
+          <a:bodyPr wrap="square" lIns="45720" rIns="45720" anchor="t">
             <a:spAutoFit/>
           </a:bodyPr>
           <a:lstStyle/>
@@ -28260,7 +29095,9 @@
         <p:txBody>
           <a:bodyPr rtlCol="0" anchor="ctr"/>
           <a:lstStyle/>
-          <a:p/>
+          <a:p>
+            <a:endParaRPr/>
+          </a:p>
         </p:txBody>
       </p:sp>
       <p:sp>
@@ -28280,7 +29117,7 @@
           <a:noFill/>
         </p:spPr>
         <p:txBody>
-          <a:bodyPr wrap="square" anchor="ctr" lIns="45720" rIns="45720">
+          <a:bodyPr wrap="square" lIns="45720" rIns="45720" anchor="ctr">
             <a:spAutoFit/>
           </a:bodyPr>
           <a:lstStyle/>
@@ -28315,7 +29152,7 @@
           <a:noFill/>
         </p:spPr>
         <p:txBody>
-          <a:bodyPr wrap="square" anchor="t" lIns="45720" rIns="45720">
+          <a:bodyPr wrap="square" lIns="45720" rIns="45720" anchor="t">
             <a:spAutoFit/>
           </a:bodyPr>
           <a:lstStyle/>
@@ -28374,7 +29211,9 @@
         <p:txBody>
           <a:bodyPr rtlCol="0" anchor="ctr"/>
           <a:lstStyle/>
-          <a:p/>
+          <a:p>
+            <a:endParaRPr/>
+          </a:p>
         </p:txBody>
       </p:sp>
       <p:sp>
@@ -28394,7 +29233,7 @@
           <a:noFill/>
         </p:spPr>
         <p:txBody>
-          <a:bodyPr wrap="square" anchor="ctr" lIns="45720" rIns="45720">
+          <a:bodyPr wrap="square" lIns="45720" rIns="45720" anchor="ctr">
             <a:spAutoFit/>
           </a:bodyPr>
           <a:lstStyle/>
@@ -28429,7 +29268,7 @@
           <a:noFill/>
         </p:spPr>
         <p:txBody>
-          <a:bodyPr wrap="square" anchor="t" lIns="45720" rIns="45720">
+          <a:bodyPr wrap="square" lIns="45720" rIns="45720" anchor="t">
             <a:spAutoFit/>
           </a:bodyPr>
           <a:lstStyle/>
@@ -28488,7 +29327,9 @@
         <p:txBody>
           <a:bodyPr rtlCol="0" anchor="ctr"/>
           <a:lstStyle/>
-          <a:p/>
+          <a:p>
+            <a:endParaRPr/>
+          </a:p>
         </p:txBody>
       </p:sp>
       <p:sp>
@@ -28508,7 +29349,7 @@
           <a:noFill/>
         </p:spPr>
         <p:txBody>
-          <a:bodyPr wrap="square" anchor="ctr" lIns="45720" rIns="45720">
+          <a:bodyPr wrap="square" lIns="45720" rIns="45720" anchor="ctr">
             <a:spAutoFit/>
           </a:bodyPr>
           <a:lstStyle/>
@@ -28543,7 +29384,7 @@
           <a:noFill/>
         </p:spPr>
         <p:txBody>
-          <a:bodyPr wrap="square" anchor="t" lIns="45720" rIns="45720">
+          <a:bodyPr wrap="square" lIns="45720" rIns="45720" anchor="t">
             <a:spAutoFit/>
           </a:bodyPr>
           <a:lstStyle/>
@@ -28900,44 +29741,44 @@
         <a:sysClr val="window" lastClr="FFFFFF"/>
       </a:lt1>
       <a:dk2>
-        <a:srgbClr val="1F497D"/>
+        <a:srgbClr val="0E2841"/>
       </a:dk2>
       <a:lt2>
-        <a:srgbClr val="EEECE1"/>
+        <a:srgbClr val="E8E8E8"/>
       </a:lt2>
       <a:accent1>
-        <a:srgbClr val="4F81BD"/>
+        <a:srgbClr val="156082"/>
       </a:accent1>
       <a:accent2>
-        <a:srgbClr val="C0504D"/>
+        <a:srgbClr val="E97132"/>
       </a:accent2>
       <a:accent3>
-        <a:srgbClr val="9BBB59"/>
+        <a:srgbClr val="196B24"/>
       </a:accent3>
       <a:accent4>
-        <a:srgbClr val="8064A2"/>
+        <a:srgbClr val="0F9ED5"/>
       </a:accent4>
       <a:accent5>
-        <a:srgbClr val="4BACC6"/>
+        <a:srgbClr val="A02B93"/>
       </a:accent5>
       <a:accent6>
-        <a:srgbClr val="F79646"/>
+        <a:srgbClr val="4EA72E"/>
       </a:accent6>
       <a:hlink>
-        <a:srgbClr val="0000FF"/>
+        <a:srgbClr val="467886"/>
       </a:hlink>
       <a:folHlink>
-        <a:srgbClr val="800080"/>
+        <a:srgbClr val="96607D"/>
       </a:folHlink>
     </a:clrScheme>
     <a:fontScheme name="Office">
       <a:majorFont>
-        <a:latin typeface="Calibri"/>
+        <a:latin typeface="Aptos Display" panose="02110004020202020204"/>
         <a:ea typeface=""/>
         <a:cs typeface=""/>
-        <a:font script="Jpan" typeface="ＭＳ Ｐゴシック"/>
+        <a:font script="Jpan" typeface="游ゴシック Light"/>
         <a:font script="Hang" typeface="맑은 고딕"/>
-        <a:font script="Hans" typeface="宋体"/>
+        <a:font script="Hans" typeface="等线 Light"/>
         <a:font script="Hant" typeface="新細明體"/>
         <a:font script="Arab" typeface="Times New Roman"/>
         <a:font script="Hebr" typeface="Times New Roman"/>
@@ -28965,14 +29806,31 @@
         <a:font script="Viet" typeface="Times New Roman"/>
         <a:font script="Uigh" typeface="Microsoft Uighur"/>
         <a:font script="Geor" typeface="Sylfaen"/>
+        <a:font script="Armn" typeface="Arial"/>
+        <a:font script="Bugi" typeface="Leelawadee UI"/>
+        <a:font script="Bopo" typeface="Microsoft JhengHei"/>
+        <a:font script="Java" typeface="Javanese Text"/>
+        <a:font script="Lisu" typeface="Segoe UI"/>
+        <a:font script="Mymr" typeface="Myanmar Text"/>
+        <a:font script="Nkoo" typeface="Ebrima"/>
+        <a:font script="Olck" typeface="Nirmala UI"/>
+        <a:font script="Osma" typeface="Ebrima"/>
+        <a:font script="Phag" typeface="Phagspa"/>
+        <a:font script="Syrn" typeface="Estrangelo Edessa"/>
+        <a:font script="Syrj" typeface="Estrangelo Edessa"/>
+        <a:font script="Syre" typeface="Estrangelo Edessa"/>
+        <a:font script="Sora" typeface="Nirmala UI"/>
+        <a:font script="Tale" typeface="Microsoft Tai Le"/>
+        <a:font script="Talu" typeface="Microsoft New Tai Lue"/>
+        <a:font script="Tfng" typeface="Ebrima"/>
       </a:majorFont>
       <a:minorFont>
-        <a:latin typeface="Calibri"/>
+        <a:latin typeface="Aptos" panose="02110004020202020204"/>
         <a:ea typeface=""/>
         <a:cs typeface=""/>
-        <a:font script="Jpan" typeface="ＭＳ Ｐゴシック"/>
+        <a:font script="Jpan" typeface="游ゴシック"/>
         <a:font script="Hang" typeface="맑은 고딕"/>
-        <a:font script="Hans" typeface="宋体"/>
+        <a:font script="Hans" typeface="等线"/>
         <a:font script="Hant" typeface="新細明體"/>
         <a:font script="Arab" typeface="Arial"/>
         <a:font script="Hebr" typeface="Arial"/>
@@ -29000,6 +29858,23 @@
         <a:font script="Viet" typeface="Arial"/>
         <a:font script="Uigh" typeface="Microsoft Uighur"/>
         <a:font script="Geor" typeface="Sylfaen"/>
+        <a:font script="Armn" typeface="Arial"/>
+        <a:font script="Bugi" typeface="Leelawadee UI"/>
+        <a:font script="Bopo" typeface="Microsoft JhengHei"/>
+        <a:font script="Java" typeface="Javanese Text"/>
+        <a:font script="Lisu" typeface="Segoe UI"/>
+        <a:font script="Mymr" typeface="Myanmar Text"/>
+        <a:font script="Nkoo" typeface="Ebrima"/>
+        <a:font script="Olck" typeface="Nirmala UI"/>
+        <a:font script="Osma" typeface="Ebrima"/>
+        <a:font script="Phag" typeface="Phagspa"/>
+        <a:font script="Syrn" typeface="Estrangelo Edessa"/>
+        <a:font script="Syrj" typeface="Estrangelo Edessa"/>
+        <a:font script="Syre" typeface="Estrangelo Edessa"/>
+        <a:font script="Sora" typeface="Nirmala UI"/>
+        <a:font script="Tale" typeface="Microsoft Tai Le"/>
+        <a:font script="Talu" typeface="Microsoft New Tai Lue"/>
+        <a:font script="Tfng" typeface="Ebrima"/>
       </a:minorFont>
     </a:fontScheme>
     <a:fmtScheme name="Office">
@@ -29011,180 +29886,136 @@
           <a:gsLst>
             <a:gs pos="0">
               <a:schemeClr val="phClr">
-                <a:tint val="50000"/>
-                <a:satMod val="300000"/>
+                <a:lumMod val="110000"/>
+                <a:satMod val="105000"/>
+                <a:tint val="67000"/>
               </a:schemeClr>
             </a:gs>
-            <a:gs pos="35000">
+            <a:gs pos="50000">
               <a:schemeClr val="phClr">
-                <a:tint val="37000"/>
-                <a:satMod val="300000"/>
+                <a:lumMod val="105000"/>
+                <a:satMod val="103000"/>
+                <a:tint val="73000"/>
               </a:schemeClr>
             </a:gs>
             <a:gs pos="100000">
               <a:schemeClr val="phClr">
-                <a:tint val="15000"/>
-                <a:satMod val="350000"/>
+                <a:lumMod val="105000"/>
+                <a:satMod val="109000"/>
+                <a:tint val="81000"/>
               </a:schemeClr>
             </a:gs>
           </a:gsLst>
-          <a:lin ang="16200000" scaled="1"/>
+          <a:lin ang="5400000" scaled="0"/>
         </a:gradFill>
         <a:gradFill rotWithShape="1">
           <a:gsLst>
             <a:gs pos="0">
               <a:schemeClr val="phClr">
-                <a:tint val="100000"/>
+                <a:satMod val="103000"/>
+                <a:lumMod val="102000"/>
+                <a:tint val="94000"/>
+              </a:schemeClr>
+            </a:gs>
+            <a:gs pos="50000">
+              <a:schemeClr val="phClr">
+                <a:satMod val="110000"/>
+                <a:lumMod val="100000"/>
                 <a:shade val="100000"/>
-                <a:satMod val="130000"/>
               </a:schemeClr>
             </a:gs>
             <a:gs pos="100000">
               <a:schemeClr val="phClr">
-                <a:tint val="50000"/>
-                <a:shade val="100000"/>
-                <a:satMod val="350000"/>
+                <a:lumMod val="99000"/>
+                <a:satMod val="120000"/>
+                <a:shade val="78000"/>
               </a:schemeClr>
             </a:gs>
           </a:gsLst>
-          <a:lin ang="16200000" scaled="0"/>
+          <a:lin ang="5400000" scaled="0"/>
         </a:gradFill>
       </a:fillStyleLst>
       <a:lnStyleLst>
-        <a:ln w="9525" cap="flat" cmpd="sng" algn="ctr">
+        <a:ln w="12700" cap="flat" cmpd="sng" algn="ctr">
           <a:solidFill>
-            <a:schemeClr val="phClr">
-              <a:shade val="95000"/>
-              <a:satMod val="105000"/>
-            </a:schemeClr>
+            <a:schemeClr val="phClr"/>
           </a:solidFill>
           <a:prstDash val="solid"/>
+          <a:miter lim="800000"/>
+        </a:ln>
+        <a:ln w="19050" cap="flat" cmpd="sng" algn="ctr">
+          <a:solidFill>
+            <a:schemeClr val="phClr"/>
+          </a:solidFill>
+          <a:prstDash val="solid"/>
+          <a:miter lim="800000"/>
         </a:ln>
         <a:ln w="25400" cap="flat" cmpd="sng" algn="ctr">
           <a:solidFill>
             <a:schemeClr val="phClr"/>
           </a:solidFill>
           <a:prstDash val="solid"/>
-        </a:ln>
-        <a:ln w="38100" cap="flat" cmpd="sng" algn="ctr">
-          <a:solidFill>
-            <a:schemeClr val="phClr"/>
-          </a:solidFill>
-          <a:prstDash val="solid"/>
+          <a:miter lim="800000"/>
         </a:ln>
       </a:lnStyleLst>
       <a:effectStyleLst>
         <a:effectStyle>
+          <a:effectLst/>
+        </a:effectStyle>
+        <a:effectStyle>
+          <a:effectLst/>
+        </a:effectStyle>
+        <a:effectStyle>
           <a:effectLst>
-            <a:outerShdw blurRad="40000" dist="20000" dir="5400000" rotWithShape="0">
+            <a:outerShdw blurRad="57150" dist="19050" dir="5400000" algn="ctr" rotWithShape="0">
               <a:srgbClr val="000000">
-                <a:alpha val="38000"/>
+                <a:alpha val="63000"/>
               </a:srgbClr>
             </a:outerShdw>
           </a:effectLst>
-        </a:effectStyle>
-        <a:effectStyle>
-          <a:effectLst>
-            <a:outerShdw blurRad="40000" dist="23000" dir="5400000" rotWithShape="0">
-              <a:srgbClr val="000000">
-                <a:alpha val="35000"/>
-              </a:srgbClr>
-            </a:outerShdw>
-          </a:effectLst>
-        </a:effectStyle>
-        <a:effectStyle>
-          <a:effectLst>
-            <a:outerShdw blurRad="40000" dist="23000" dir="5400000" rotWithShape="0">
-              <a:srgbClr val="000000">
-                <a:alpha val="35000"/>
-              </a:srgbClr>
-            </a:outerShdw>
-          </a:effectLst>
-          <a:scene3d>
-            <a:camera prst="orthographicFront">
-              <a:rot lat="0" lon="0" rev="0"/>
-            </a:camera>
-            <a:lightRig rig="threePt" dir="t">
-              <a:rot lat="0" lon="0" rev="1200000"/>
-            </a:lightRig>
-          </a:scene3d>
-          <a:sp3d>
-            <a:bevelT w="63500" h="25400"/>
-          </a:sp3d>
         </a:effectStyle>
       </a:effectStyleLst>
       <a:bgFillStyleLst>
         <a:solidFill>
           <a:schemeClr val="phClr"/>
         </a:solidFill>
+        <a:solidFill>
+          <a:schemeClr val="phClr">
+            <a:tint val="95000"/>
+            <a:satMod val="170000"/>
+          </a:schemeClr>
+        </a:solidFill>
         <a:gradFill rotWithShape="1">
           <a:gsLst>
             <a:gs pos="0">
               <a:schemeClr val="phClr">
-                <a:tint val="40000"/>
-                <a:satMod val="350000"/>
+                <a:tint val="93000"/>
+                <a:satMod val="150000"/>
+                <a:shade val="98000"/>
+                <a:lumMod val="102000"/>
               </a:schemeClr>
             </a:gs>
-            <a:gs pos="40000">
+            <a:gs pos="50000">
               <a:schemeClr val="phClr">
-                <a:tint val="45000"/>
-                <a:shade val="99000"/>
-                <a:satMod val="350000"/>
+                <a:tint val="98000"/>
+                <a:satMod val="130000"/>
+                <a:shade val="90000"/>
+                <a:lumMod val="103000"/>
               </a:schemeClr>
             </a:gs>
             <a:gs pos="100000">
               <a:schemeClr val="phClr">
-                <a:shade val="20000"/>
-                <a:satMod val="255000"/>
+                <a:shade val="63000"/>
+                <a:satMod val="120000"/>
               </a:schemeClr>
             </a:gs>
           </a:gsLst>
-          <a:path path="circle">
-            <a:fillToRect l="50000" t="-80000" r="50000" b="180000"/>
-          </a:path>
-        </a:gradFill>
-        <a:gradFill rotWithShape="1">
-          <a:gsLst>
-            <a:gs pos="0">
-              <a:schemeClr val="phClr">
-                <a:tint val="80000"/>
-                <a:satMod val="300000"/>
-              </a:schemeClr>
-            </a:gs>
-            <a:gs pos="100000">
-              <a:schemeClr val="phClr">
-                <a:shade val="30000"/>
-                <a:satMod val="200000"/>
-              </a:schemeClr>
-            </a:gs>
-          </a:gsLst>
-          <a:path path="circle">
-            <a:fillToRect l="50000" t="50000" r="50000" b="50000"/>
-          </a:path>
+          <a:lin ang="5400000" scaled="0"/>
         </a:gradFill>
       </a:bgFillStyleLst>
     </a:fmtScheme>
   </a:themeElements>
   <a:objectDefaults>
-    <a:spDef>
-      <a:spPr/>
-      <a:bodyPr/>
-      <a:lstStyle/>
-      <a:style>
-        <a:lnRef idx="1">
-          <a:schemeClr val="accent1"/>
-        </a:lnRef>
-        <a:fillRef idx="3">
-          <a:schemeClr val="accent1"/>
-        </a:fillRef>
-        <a:effectRef idx="2">
-          <a:schemeClr val="accent1"/>
-        </a:effectRef>
-        <a:fontRef idx="minor">
-          <a:schemeClr val="lt1"/>
-        </a:fontRef>
-      </a:style>
-    </a:spDef>
     <a:lnDef>
       <a:spPr/>
       <a:bodyPr/>
@@ -29206,5 +30037,16 @@
     </a:lnDef>
   </a:objectDefaults>
   <a:extraClrSchemeLst/>
+  <a:extLst>
+    <a:ext uri="{05A4C25C-085E-4340-85A3-A5531E510DB2}">
+      <thm15:themeFamily xmlns:thm15="http://schemas.microsoft.com/office/thememl/2012/main" name="Office Theme" id="{2E142A2C-CD16-42D6-873A-C26D2A0506FA}" vid="{1BDDFF52-6CD6-40A5-AB3C-68EB2F1E4D0A}"/>
+    </a:ext>
+  </a:extLst>
 </a:theme>
+</file>
+
+<file path=docMetadata/LabelInfo.xml><?xml version="1.0" encoding="utf-8"?>
+<clbl:labelList xmlns:clbl="http://schemas.microsoft.com/office/2020/mipLabelMetadata">
+  <clbl:label id="{36da45f1-dd2c-4d1f-af13-5abe46b99921}" enabled="0" method="" siteId="{36da45f1-dd2c-4d1f-af13-5abe46b99921}" removed="1"/>
+</clbl:labelList>
 </file>